--- a/CLASES/CLASE 05 31-08/Clase4.pptx
+++ b/CLASES/CLASE 05 31-08/Clase4.pptx
@@ -4,6 +4,9 @@
   <p:sldMasterIdLst>
     <p:sldMasterId id="2147483648" r:id="rId1"/>
   </p:sldMasterIdLst>
+  <p:notesMasterIdLst>
+    <p:notesMasterId r:id="rId37"/>
+  </p:notesMasterIdLst>
   <p:sldIdLst>
     <p:sldId id="256" r:id="rId2"/>
     <p:sldId id="257" r:id="rId3"/>
@@ -41,9 +44,6 @@
     <p:sldId id="289" r:id="rId35"/>
     <p:sldId id="290" r:id="rId36"/>
   </p:sldIdLst>
-  <p:notesMasterIdLst>
-    <p:notesMasterId r:id="rId37"/>
-  </p:notesMasterIdLst>
   <p:sldSz cx="12192000" cy="6858000"/>
   <p:notesSz cx="6858000" cy="12192000"/>
   <p:defaultTextStyle>
@@ -138,6 +138,11 @@
       </a:defRPr>
     </a:lvl9pPr>
   </p:defaultTextStyle>
+  <p:extLst>
+    <p:ext uri="{EFAFB233-063F-42B5-8137-9DF3F51BA10A}">
+      <p15:sldGuideLst xmlns:p15="http://schemas.microsoft.com/office/powerpoint/2012/main"/>
+    </p:ext>
+  </p:extLst>
 </p:presentation>
 </file>
 
@@ -163,234 +168,10 @@
           <a:chExt cx="0" cy="0"/>
         </a:xfrm>
       </p:grpSpPr>
-      <p:sp>
-        <p:nvSpPr>
-          <p:cNvPr id="2" name="Header Placeholder 1"/>
-          <p:cNvSpPr>
-            <a:spLocks noGrp="1"/>
-          </p:cNvSpPr>
-          <p:nvPr>
-            <p:ph type="hdr" sz="quarter"/>
-          </p:nvPr>
-        </p:nvSpPr>
-        <p:spPr>
-          <a:xfrm>
-            <a:off x="0" y="0"/>
-            <a:ext cx="2971800" cy="458788"/>
-          </a:xfrm>
-          <a:prstGeom prst="rect">
-            <a:avLst/>
-          </a:prstGeom>
-        </p:spPr>
-        <p:txBody>
-          <a:bodyPr vert="horz" lIns="91440" tIns="45720" rIns="91440" bIns="45720" rtlCol="0"/>
-          <a:lstStyle>
-            <a:lvl1pPr algn="l">
-              <a:defRPr sz="1200"/>
-            </a:lvl1pPr>
-          </a:lstStyle>
-          <a:p>
-            <a:endParaRPr lang="en-US"/>
-          </a:p>
-        </p:txBody>
-      </p:sp>
-      <p:sp>
-        <p:nvSpPr>
-          <p:cNvPr id="3" name="Date Placeholder 2"/>
-          <p:cNvSpPr>
-            <a:spLocks noGrp="1"/>
-          </p:cNvSpPr>
-          <p:nvPr>
-            <p:ph type="dt" idx="1"/>
-          </p:nvPr>
-        </p:nvSpPr>
-        <p:spPr>
-          <a:xfrm>
-            <a:off x="3884613" y="0"/>
-            <a:ext cx="2971800" cy="458788"/>
-          </a:xfrm>
-          <a:prstGeom prst="rect">
-            <a:avLst/>
-          </a:prstGeom>
-        </p:spPr>
-        <p:txBody>
-          <a:bodyPr vert="horz" lIns="91440" tIns="45720" rIns="91440" bIns="45720" rtlCol="0"/>
-          <a:lstStyle>
-            <a:lvl1pPr algn="r">
-              <a:defRPr sz="1200"/>
-            </a:lvl1pPr>
-          </a:lstStyle>
-          <a:p>
-            <a:fld id="{5282F153-3F37-0F45-9E97-73ACFA13230C}" type="datetimeFigureOut">
-              <a:rPr lang="en-US"/>
-              <a:t>7/23/19</a:t>
-            </a:fld>
-            <a:endParaRPr lang="en-US"/>
-          </a:p>
-        </p:txBody>
-      </p:sp>
-      <p:sp>
-        <p:nvSpPr>
-          <p:cNvPr id="4" name="Slide Image Placeholder 3"/>
-          <p:cNvSpPr>
-            <a:spLocks noGrp="1" noRot="1" noChangeAspect="1"/>
-          </p:cNvSpPr>
-          <p:nvPr>
-            <p:ph type="sldImg" idx="2"/>
-          </p:nvPr>
-        </p:nvSpPr>
-        <p:spPr>
-          <a:xfrm>
-            <a:off x="685800" y="1143000"/>
-            <a:ext cx="5486400" cy="3086100"/>
-          </a:xfrm>
-          <a:prstGeom prst="rect">
-            <a:avLst/>
-          </a:prstGeom>
-          <a:noFill/>
-          <a:ln w="12700">
-            <a:solidFill>
-              <a:prstClr val="black"/>
-            </a:solidFill>
-          </a:ln>
-        </p:spPr>
-        <p:txBody>
-          <a:bodyPr vert="horz" lIns="91440" tIns="45720" rIns="91440" bIns="45720" rtlCol="0" anchor="ctr"/>
-          <a:lstStyle/>
-          <a:p>
-            <a:endParaRPr lang="en-US"/>
-          </a:p>
-        </p:txBody>
-      </p:sp>
-      <p:sp>
-        <p:nvSpPr>
-          <p:cNvPr id="5" name="Notes Placeholder 4"/>
-          <p:cNvSpPr>
-            <a:spLocks noGrp="1"/>
-          </p:cNvSpPr>
-          <p:nvPr>
-            <p:ph type="body" sz="quarter" idx="3"/>
-          </p:nvPr>
-        </p:nvSpPr>
-        <p:spPr>
-          <a:xfrm>
-            <a:off x="685800" y="4400550"/>
-            <a:ext cx="5486400" cy="3600450"/>
-          </a:xfrm>
-          <a:prstGeom prst="rect">
-            <a:avLst/>
-          </a:prstGeom>
-        </p:spPr>
-        <p:txBody>
-          <a:bodyPr vert="horz" lIns="91440" tIns="45720" rIns="91440" bIns="45720" rtlCol="0"/>
-          <a:lstStyle/>
-          <a:p>
-            <a:pPr lvl="0"/>
-            <a:r>
-              <a:rPr lang="en-US"/>
-              <a:t>Click to edit Master text styles</a:t>
-            </a:r>
-          </a:p>
-          <a:p>
-            <a:pPr lvl="1"/>
-            <a:r>
-              <a:rPr lang="en-US"/>
-              <a:t>Second level</a:t>
-            </a:r>
-          </a:p>
-          <a:p>
-            <a:pPr lvl="2"/>
-            <a:r>
-              <a:rPr lang="en-US"/>
-              <a:t>Third level</a:t>
-            </a:r>
-          </a:p>
-          <a:p>
-            <a:pPr lvl="3"/>
-            <a:r>
-              <a:rPr lang="en-US"/>
-              <a:t>Fourth level</a:t>
-            </a:r>
-          </a:p>
-          <a:p>
-            <a:pPr lvl="4"/>
-            <a:r>
-              <a:rPr lang="en-US"/>
-              <a:t>Fifth level</a:t>
-            </a:r>
-          </a:p>
-        </p:txBody>
-      </p:sp>
-      <p:sp>
-        <p:nvSpPr>
-          <p:cNvPr id="6" name="Footer Placeholder 5"/>
-          <p:cNvSpPr>
-            <a:spLocks noGrp="1"/>
-          </p:cNvSpPr>
-          <p:nvPr>
-            <p:ph type="ftr" sz="quarter" idx="4"/>
-          </p:nvPr>
-        </p:nvSpPr>
-        <p:spPr>
-          <a:xfrm>
-            <a:off x="0" y="8685213"/>
-            <a:ext cx="2971800" cy="458787"/>
-          </a:xfrm>
-          <a:prstGeom prst="rect">
-            <a:avLst/>
-          </a:prstGeom>
-        </p:spPr>
-        <p:txBody>
-          <a:bodyPr vert="horz" lIns="91440" tIns="45720" rIns="91440" bIns="45720" rtlCol="0" anchor="b"/>
-          <a:lstStyle>
-            <a:lvl1pPr algn="l">
-              <a:defRPr sz="1200"/>
-            </a:lvl1pPr>
-          </a:lstStyle>
-          <a:p>
-            <a:endParaRPr lang="en-US"/>
-          </a:p>
-        </p:txBody>
-      </p:sp>
-      <p:sp>
-        <p:nvSpPr>
-          <p:cNvPr id="7" name="Slide Number Placeholder 6"/>
-          <p:cNvSpPr>
-            <a:spLocks noGrp="1"/>
-          </p:cNvSpPr>
-          <p:nvPr>
-            <p:ph type="sldNum" sz="quarter" idx="5"/>
-          </p:nvPr>
-        </p:nvSpPr>
-        <p:spPr>
-          <a:xfrm>
-            <a:off x="3884613" y="8685213"/>
-            <a:ext cx="2971800" cy="458787"/>
-          </a:xfrm>
-          <a:prstGeom prst="rect">
-            <a:avLst/>
-          </a:prstGeom>
-        </p:spPr>
-        <p:txBody>
-          <a:bodyPr vert="horz" lIns="91440" tIns="45720" rIns="91440" bIns="45720" rtlCol="0" anchor="b"/>
-          <a:lstStyle>
-            <a:lvl1pPr algn="r">
-              <a:defRPr sz="1200"/>
-            </a:lvl1pPr>
-          </a:lstStyle>
-          <a:p>
-            <a:fld id="{CE5E9CC1-C706-0F49-92D6-E571CC5EEA8F}" type="slidenum">
-              <a:rPr lang="en-US"/>
-              <a:t>‹#›</a:t>
-            </a:fld>
-            <a:endParaRPr lang="en-US"/>
-          </a:p>
-        </p:txBody>
-      </p:sp>
     </p:spTree>
     <p:extLst>
       <p:ext uri="{BB962C8B-B14F-4D97-AF65-F5344CB8AC3E}">
-        <p14:creationId xmlns:p14="http://schemas.microsoft.com/office/powerpoint/2010/main" val="1024086991"/>
+        <p14:creationId xmlns:p14="http://schemas.microsoft.com/office/powerpoint/2010/main" val="3586482187"/>
       </p:ext>
     </p:extLst>
   </p:cSld>
@@ -518,6 +299,13 @@
           </p:nvPr>
         </p:nvSpPr>
         <p:spPr/>
+        <p:txBody>
+          <a:bodyPr/>
+          <a:lstStyle/>
+          <a:p>
+            <a:endParaRPr lang="es-AR"/>
+          </a:p>
+        </p:txBody>
       </p:sp>
       <p:sp>
         <p:nvSpPr>
@@ -534,10 +322,6 @@
           <a:bodyPr/>
           <a:lstStyle/>
           <a:p>
-            <a:r>
-              <a:rPr lang="en-US" dirty="0"/>
-              <a:t/>
-            </a:r>
             <a:endParaRPr lang="en-US" dirty="0"/>
           </a:p>
         </p:txBody>
@@ -606,6 +390,13 @@
           </p:nvPr>
         </p:nvSpPr>
         <p:spPr/>
+        <p:txBody>
+          <a:bodyPr/>
+          <a:lstStyle/>
+          <a:p>
+            <a:endParaRPr lang="es-AR"/>
+          </a:p>
+        </p:txBody>
       </p:sp>
       <p:sp>
         <p:nvSpPr>
@@ -622,10 +413,6 @@
           <a:bodyPr/>
           <a:lstStyle/>
           <a:p>
-            <a:r>
-              <a:rPr lang="en-US" dirty="0"/>
-              <a:t/>
-            </a:r>
             <a:endParaRPr lang="en-US" dirty="0"/>
           </a:p>
         </p:txBody>
@@ -694,6 +481,13 @@
           </p:nvPr>
         </p:nvSpPr>
         <p:spPr/>
+        <p:txBody>
+          <a:bodyPr/>
+          <a:lstStyle/>
+          <a:p>
+            <a:endParaRPr lang="es-AR"/>
+          </a:p>
+        </p:txBody>
       </p:sp>
       <p:sp>
         <p:nvSpPr>
@@ -710,10 +504,6 @@
           <a:bodyPr/>
           <a:lstStyle/>
           <a:p>
-            <a:r>
-              <a:rPr lang="en-US" dirty="0"/>
-              <a:t/>
-            </a:r>
             <a:endParaRPr lang="en-US" dirty="0"/>
           </a:p>
         </p:txBody>
@@ -782,6 +572,13 @@
           </p:nvPr>
         </p:nvSpPr>
         <p:spPr/>
+        <p:txBody>
+          <a:bodyPr/>
+          <a:lstStyle/>
+          <a:p>
+            <a:endParaRPr lang="es-AR"/>
+          </a:p>
+        </p:txBody>
       </p:sp>
       <p:sp>
         <p:nvSpPr>
@@ -798,10 +595,6 @@
           <a:bodyPr/>
           <a:lstStyle/>
           <a:p>
-            <a:r>
-              <a:rPr lang="en-US" dirty="0"/>
-              <a:t/>
-            </a:r>
             <a:endParaRPr lang="en-US" dirty="0"/>
           </a:p>
         </p:txBody>
@@ -870,6 +663,13 @@
           </p:nvPr>
         </p:nvSpPr>
         <p:spPr/>
+        <p:txBody>
+          <a:bodyPr/>
+          <a:lstStyle/>
+          <a:p>
+            <a:endParaRPr lang="es-AR"/>
+          </a:p>
+        </p:txBody>
       </p:sp>
       <p:sp>
         <p:nvSpPr>
@@ -886,10 +686,6 @@
           <a:bodyPr/>
           <a:lstStyle/>
           <a:p>
-            <a:r>
-              <a:rPr lang="en-US" dirty="0"/>
-              <a:t/>
-            </a:r>
             <a:endParaRPr lang="en-US" dirty="0"/>
           </a:p>
         </p:txBody>
@@ -958,6 +754,13 @@
           </p:nvPr>
         </p:nvSpPr>
         <p:spPr/>
+        <p:txBody>
+          <a:bodyPr/>
+          <a:lstStyle/>
+          <a:p>
+            <a:endParaRPr lang="es-AR"/>
+          </a:p>
+        </p:txBody>
       </p:sp>
       <p:sp>
         <p:nvSpPr>
@@ -974,10 +777,6 @@
           <a:bodyPr/>
           <a:lstStyle/>
           <a:p>
-            <a:r>
-              <a:rPr lang="en-US" dirty="0"/>
-              <a:t/>
-            </a:r>
             <a:endParaRPr lang="en-US" dirty="0"/>
           </a:p>
         </p:txBody>
@@ -1046,6 +845,13 @@
           </p:nvPr>
         </p:nvSpPr>
         <p:spPr/>
+        <p:txBody>
+          <a:bodyPr/>
+          <a:lstStyle/>
+          <a:p>
+            <a:endParaRPr lang="es-AR"/>
+          </a:p>
+        </p:txBody>
       </p:sp>
       <p:sp>
         <p:nvSpPr>
@@ -1062,10 +868,6 @@
           <a:bodyPr/>
           <a:lstStyle/>
           <a:p>
-            <a:r>
-              <a:rPr lang="en-US" dirty="0"/>
-              <a:t/>
-            </a:r>
             <a:endParaRPr lang="en-US" dirty="0"/>
           </a:p>
         </p:txBody>
@@ -1134,6 +936,13 @@
           </p:nvPr>
         </p:nvSpPr>
         <p:spPr/>
+        <p:txBody>
+          <a:bodyPr/>
+          <a:lstStyle/>
+          <a:p>
+            <a:endParaRPr lang="es-AR"/>
+          </a:p>
+        </p:txBody>
       </p:sp>
       <p:sp>
         <p:nvSpPr>
@@ -1150,10 +959,6 @@
           <a:bodyPr/>
           <a:lstStyle/>
           <a:p>
-            <a:r>
-              <a:rPr lang="en-US" dirty="0"/>
-              <a:t/>
-            </a:r>
             <a:endParaRPr lang="en-US" dirty="0"/>
           </a:p>
         </p:txBody>
@@ -1222,6 +1027,13 @@
           </p:nvPr>
         </p:nvSpPr>
         <p:spPr/>
+        <p:txBody>
+          <a:bodyPr/>
+          <a:lstStyle/>
+          <a:p>
+            <a:endParaRPr lang="es-AR"/>
+          </a:p>
+        </p:txBody>
       </p:sp>
       <p:sp>
         <p:nvSpPr>
@@ -1238,10 +1050,6 @@
           <a:bodyPr/>
           <a:lstStyle/>
           <a:p>
-            <a:r>
-              <a:rPr lang="en-US" dirty="0"/>
-              <a:t/>
-            </a:r>
             <a:endParaRPr lang="en-US" dirty="0"/>
           </a:p>
         </p:txBody>
@@ -1310,6 +1118,13 @@
           </p:nvPr>
         </p:nvSpPr>
         <p:spPr/>
+        <p:txBody>
+          <a:bodyPr/>
+          <a:lstStyle/>
+          <a:p>
+            <a:endParaRPr lang="es-AR"/>
+          </a:p>
+        </p:txBody>
       </p:sp>
       <p:sp>
         <p:nvSpPr>
@@ -1326,10 +1141,6 @@
           <a:bodyPr/>
           <a:lstStyle/>
           <a:p>
-            <a:r>
-              <a:rPr lang="en-US" dirty="0"/>
-              <a:t/>
-            </a:r>
             <a:endParaRPr lang="en-US" dirty="0"/>
           </a:p>
         </p:txBody>
@@ -1398,6 +1209,13 @@
           </p:nvPr>
         </p:nvSpPr>
         <p:spPr/>
+        <p:txBody>
+          <a:bodyPr/>
+          <a:lstStyle/>
+          <a:p>
+            <a:endParaRPr lang="es-AR"/>
+          </a:p>
+        </p:txBody>
       </p:sp>
       <p:sp>
         <p:nvSpPr>
@@ -1414,10 +1232,6 @@
           <a:bodyPr/>
           <a:lstStyle/>
           <a:p>
-            <a:r>
-              <a:rPr lang="en-US" dirty="0"/>
-              <a:t/>
-            </a:r>
             <a:endParaRPr lang="en-US" dirty="0"/>
           </a:p>
         </p:txBody>
@@ -1486,6 +1300,13 @@
           </p:nvPr>
         </p:nvSpPr>
         <p:spPr/>
+        <p:txBody>
+          <a:bodyPr/>
+          <a:lstStyle/>
+          <a:p>
+            <a:endParaRPr lang="es-AR"/>
+          </a:p>
+        </p:txBody>
       </p:sp>
       <p:sp>
         <p:nvSpPr>
@@ -1502,10 +1323,6 @@
           <a:bodyPr/>
           <a:lstStyle/>
           <a:p>
-            <a:r>
-              <a:rPr lang="en-US" dirty="0"/>
-              <a:t/>
-            </a:r>
             <a:endParaRPr lang="en-US" dirty="0"/>
           </a:p>
         </p:txBody>
@@ -1574,6 +1391,13 @@
           </p:nvPr>
         </p:nvSpPr>
         <p:spPr/>
+        <p:txBody>
+          <a:bodyPr/>
+          <a:lstStyle/>
+          <a:p>
+            <a:endParaRPr lang="es-AR"/>
+          </a:p>
+        </p:txBody>
       </p:sp>
       <p:sp>
         <p:nvSpPr>
@@ -1590,10 +1414,6 @@
           <a:bodyPr/>
           <a:lstStyle/>
           <a:p>
-            <a:r>
-              <a:rPr lang="en-US" dirty="0"/>
-              <a:t/>
-            </a:r>
             <a:endParaRPr lang="en-US" dirty="0"/>
           </a:p>
         </p:txBody>
@@ -1662,6 +1482,13 @@
           </p:nvPr>
         </p:nvSpPr>
         <p:spPr/>
+        <p:txBody>
+          <a:bodyPr/>
+          <a:lstStyle/>
+          <a:p>
+            <a:endParaRPr lang="es-AR"/>
+          </a:p>
+        </p:txBody>
       </p:sp>
       <p:sp>
         <p:nvSpPr>
@@ -1678,10 +1505,6 @@
           <a:bodyPr/>
           <a:lstStyle/>
           <a:p>
-            <a:r>
-              <a:rPr lang="en-US" dirty="0"/>
-              <a:t/>
-            </a:r>
             <a:endParaRPr lang="en-US" dirty="0"/>
           </a:p>
         </p:txBody>
@@ -1750,6 +1573,13 @@
           </p:nvPr>
         </p:nvSpPr>
         <p:spPr/>
+        <p:txBody>
+          <a:bodyPr/>
+          <a:lstStyle/>
+          <a:p>
+            <a:endParaRPr lang="es-AR"/>
+          </a:p>
+        </p:txBody>
       </p:sp>
       <p:sp>
         <p:nvSpPr>
@@ -1766,10 +1596,6 @@
           <a:bodyPr/>
           <a:lstStyle/>
           <a:p>
-            <a:r>
-              <a:rPr lang="en-US" dirty="0"/>
-              <a:t/>
-            </a:r>
             <a:endParaRPr lang="en-US" dirty="0"/>
           </a:p>
         </p:txBody>
@@ -1838,6 +1664,13 @@
           </p:nvPr>
         </p:nvSpPr>
         <p:spPr/>
+        <p:txBody>
+          <a:bodyPr/>
+          <a:lstStyle/>
+          <a:p>
+            <a:endParaRPr lang="es-AR"/>
+          </a:p>
+        </p:txBody>
       </p:sp>
       <p:sp>
         <p:nvSpPr>
@@ -1854,10 +1687,6 @@
           <a:bodyPr/>
           <a:lstStyle/>
           <a:p>
-            <a:r>
-              <a:rPr lang="en-US" dirty="0"/>
-              <a:t/>
-            </a:r>
             <a:endParaRPr lang="en-US" dirty="0"/>
           </a:p>
         </p:txBody>
@@ -1926,6 +1755,13 @@
           </p:nvPr>
         </p:nvSpPr>
         <p:spPr/>
+        <p:txBody>
+          <a:bodyPr/>
+          <a:lstStyle/>
+          <a:p>
+            <a:endParaRPr lang="es-AR"/>
+          </a:p>
+        </p:txBody>
       </p:sp>
       <p:sp>
         <p:nvSpPr>
@@ -1942,10 +1778,6 @@
           <a:bodyPr/>
           <a:lstStyle/>
           <a:p>
-            <a:r>
-              <a:rPr lang="en-US" dirty="0"/>
-              <a:t/>
-            </a:r>
             <a:endParaRPr lang="en-US" dirty="0"/>
           </a:p>
         </p:txBody>
@@ -2014,6 +1846,13 @@
           </p:nvPr>
         </p:nvSpPr>
         <p:spPr/>
+        <p:txBody>
+          <a:bodyPr/>
+          <a:lstStyle/>
+          <a:p>
+            <a:endParaRPr lang="es-AR"/>
+          </a:p>
+        </p:txBody>
       </p:sp>
       <p:sp>
         <p:nvSpPr>
@@ -2030,10 +1869,6 @@
           <a:bodyPr/>
           <a:lstStyle/>
           <a:p>
-            <a:r>
-              <a:rPr lang="en-US" dirty="0"/>
-              <a:t/>
-            </a:r>
             <a:endParaRPr lang="en-US" dirty="0"/>
           </a:p>
         </p:txBody>
@@ -2102,6 +1937,13 @@
           </p:nvPr>
         </p:nvSpPr>
         <p:spPr/>
+        <p:txBody>
+          <a:bodyPr/>
+          <a:lstStyle/>
+          <a:p>
+            <a:endParaRPr lang="es-AR"/>
+          </a:p>
+        </p:txBody>
       </p:sp>
       <p:sp>
         <p:nvSpPr>
@@ -2118,10 +1960,6 @@
           <a:bodyPr/>
           <a:lstStyle/>
           <a:p>
-            <a:r>
-              <a:rPr lang="en-US" dirty="0"/>
-              <a:t/>
-            </a:r>
             <a:endParaRPr lang="en-US" dirty="0"/>
           </a:p>
         </p:txBody>
@@ -2190,6 +2028,13 @@
           </p:nvPr>
         </p:nvSpPr>
         <p:spPr/>
+        <p:txBody>
+          <a:bodyPr/>
+          <a:lstStyle/>
+          <a:p>
+            <a:endParaRPr lang="es-AR"/>
+          </a:p>
+        </p:txBody>
       </p:sp>
       <p:sp>
         <p:nvSpPr>
@@ -2206,10 +2051,6 @@
           <a:bodyPr/>
           <a:lstStyle/>
           <a:p>
-            <a:r>
-              <a:rPr lang="en-US" dirty="0"/>
-              <a:t/>
-            </a:r>
             <a:endParaRPr lang="en-US" dirty="0"/>
           </a:p>
         </p:txBody>
@@ -2278,6 +2119,13 @@
           </p:nvPr>
         </p:nvSpPr>
         <p:spPr/>
+        <p:txBody>
+          <a:bodyPr/>
+          <a:lstStyle/>
+          <a:p>
+            <a:endParaRPr lang="es-AR"/>
+          </a:p>
+        </p:txBody>
       </p:sp>
       <p:sp>
         <p:nvSpPr>
@@ -2294,10 +2142,6 @@
           <a:bodyPr/>
           <a:lstStyle/>
           <a:p>
-            <a:r>
-              <a:rPr lang="en-US" dirty="0"/>
-              <a:t/>
-            </a:r>
             <a:endParaRPr lang="en-US" dirty="0"/>
           </a:p>
         </p:txBody>
@@ -2366,6 +2210,13 @@
           </p:nvPr>
         </p:nvSpPr>
         <p:spPr/>
+        <p:txBody>
+          <a:bodyPr/>
+          <a:lstStyle/>
+          <a:p>
+            <a:endParaRPr lang="es-AR"/>
+          </a:p>
+        </p:txBody>
       </p:sp>
       <p:sp>
         <p:nvSpPr>
@@ -2382,10 +2233,6 @@
           <a:bodyPr/>
           <a:lstStyle/>
           <a:p>
-            <a:r>
-              <a:rPr lang="en-US" dirty="0"/>
-              <a:t/>
-            </a:r>
             <a:endParaRPr lang="en-US" dirty="0"/>
           </a:p>
         </p:txBody>
@@ -2454,6 +2301,13 @@
           </p:nvPr>
         </p:nvSpPr>
         <p:spPr/>
+        <p:txBody>
+          <a:bodyPr/>
+          <a:lstStyle/>
+          <a:p>
+            <a:endParaRPr lang="es-AR"/>
+          </a:p>
+        </p:txBody>
       </p:sp>
       <p:sp>
         <p:nvSpPr>
@@ -2470,10 +2324,6 @@
           <a:bodyPr/>
           <a:lstStyle/>
           <a:p>
-            <a:r>
-              <a:rPr lang="en-US" dirty="0"/>
-              <a:t/>
-            </a:r>
             <a:endParaRPr lang="en-US" dirty="0"/>
           </a:p>
         </p:txBody>
@@ -2542,6 +2392,13 @@
           </p:nvPr>
         </p:nvSpPr>
         <p:spPr/>
+        <p:txBody>
+          <a:bodyPr/>
+          <a:lstStyle/>
+          <a:p>
+            <a:endParaRPr lang="es-AR"/>
+          </a:p>
+        </p:txBody>
       </p:sp>
       <p:sp>
         <p:nvSpPr>
@@ -2558,10 +2415,6 @@
           <a:bodyPr/>
           <a:lstStyle/>
           <a:p>
-            <a:r>
-              <a:rPr lang="en-US" dirty="0"/>
-              <a:t/>
-            </a:r>
             <a:endParaRPr lang="en-US" dirty="0"/>
           </a:p>
         </p:txBody>
@@ -2630,6 +2483,13 @@
           </p:nvPr>
         </p:nvSpPr>
         <p:spPr/>
+        <p:txBody>
+          <a:bodyPr/>
+          <a:lstStyle/>
+          <a:p>
+            <a:endParaRPr lang="es-AR"/>
+          </a:p>
+        </p:txBody>
       </p:sp>
       <p:sp>
         <p:nvSpPr>
@@ -2646,10 +2506,6 @@
           <a:bodyPr/>
           <a:lstStyle/>
           <a:p>
-            <a:r>
-              <a:rPr lang="en-US" dirty="0"/>
-              <a:t/>
-            </a:r>
             <a:endParaRPr lang="en-US" dirty="0"/>
           </a:p>
         </p:txBody>
@@ -2718,6 +2574,13 @@
           </p:nvPr>
         </p:nvSpPr>
         <p:spPr/>
+        <p:txBody>
+          <a:bodyPr/>
+          <a:lstStyle/>
+          <a:p>
+            <a:endParaRPr lang="es-AR"/>
+          </a:p>
+        </p:txBody>
       </p:sp>
       <p:sp>
         <p:nvSpPr>
@@ -2734,10 +2597,6 @@
           <a:bodyPr/>
           <a:lstStyle/>
           <a:p>
-            <a:r>
-              <a:rPr lang="en-US" dirty="0"/>
-              <a:t/>
-            </a:r>
             <a:endParaRPr lang="en-US" dirty="0"/>
           </a:p>
         </p:txBody>
@@ -2806,6 +2665,13 @@
           </p:nvPr>
         </p:nvSpPr>
         <p:spPr/>
+        <p:txBody>
+          <a:bodyPr/>
+          <a:lstStyle/>
+          <a:p>
+            <a:endParaRPr lang="es-AR"/>
+          </a:p>
+        </p:txBody>
       </p:sp>
       <p:sp>
         <p:nvSpPr>
@@ -2822,10 +2688,6 @@
           <a:bodyPr/>
           <a:lstStyle/>
           <a:p>
-            <a:r>
-              <a:rPr lang="en-US" dirty="0"/>
-              <a:t/>
-            </a:r>
             <a:endParaRPr lang="en-US" dirty="0"/>
           </a:p>
         </p:txBody>
@@ -2894,6 +2756,13 @@
           </p:nvPr>
         </p:nvSpPr>
         <p:spPr/>
+        <p:txBody>
+          <a:bodyPr/>
+          <a:lstStyle/>
+          <a:p>
+            <a:endParaRPr lang="es-AR"/>
+          </a:p>
+        </p:txBody>
       </p:sp>
       <p:sp>
         <p:nvSpPr>
@@ -2910,10 +2779,6 @@
           <a:bodyPr/>
           <a:lstStyle/>
           <a:p>
-            <a:r>
-              <a:rPr lang="en-US" dirty="0"/>
-              <a:t/>
-            </a:r>
             <a:endParaRPr lang="en-US" dirty="0"/>
           </a:p>
         </p:txBody>
@@ -2982,6 +2847,13 @@
           </p:nvPr>
         </p:nvSpPr>
         <p:spPr/>
+        <p:txBody>
+          <a:bodyPr/>
+          <a:lstStyle/>
+          <a:p>
+            <a:endParaRPr lang="es-AR"/>
+          </a:p>
+        </p:txBody>
       </p:sp>
       <p:sp>
         <p:nvSpPr>
@@ -2998,10 +2870,6 @@
           <a:bodyPr/>
           <a:lstStyle/>
           <a:p>
-            <a:r>
-              <a:rPr lang="en-US" dirty="0"/>
-              <a:t/>
-            </a:r>
             <a:endParaRPr lang="en-US" dirty="0"/>
           </a:p>
         </p:txBody>
@@ -3070,6 +2938,13 @@
           </p:nvPr>
         </p:nvSpPr>
         <p:spPr/>
+        <p:txBody>
+          <a:bodyPr/>
+          <a:lstStyle/>
+          <a:p>
+            <a:endParaRPr lang="es-AR"/>
+          </a:p>
+        </p:txBody>
       </p:sp>
       <p:sp>
         <p:nvSpPr>
@@ -3086,10 +2961,6 @@
           <a:bodyPr/>
           <a:lstStyle/>
           <a:p>
-            <a:r>
-              <a:rPr lang="en-US" dirty="0"/>
-              <a:t/>
-            </a:r>
             <a:endParaRPr lang="en-US" dirty="0"/>
           </a:p>
         </p:txBody>
@@ -3158,6 +3029,13 @@
           </p:nvPr>
         </p:nvSpPr>
         <p:spPr/>
+        <p:txBody>
+          <a:bodyPr/>
+          <a:lstStyle/>
+          <a:p>
+            <a:endParaRPr lang="es-AR"/>
+          </a:p>
+        </p:txBody>
       </p:sp>
       <p:sp>
         <p:nvSpPr>
@@ -3174,10 +3052,6 @@
           <a:bodyPr/>
           <a:lstStyle/>
           <a:p>
-            <a:r>
-              <a:rPr lang="en-US" dirty="0"/>
-              <a:t/>
-            </a:r>
             <a:endParaRPr lang="en-US" dirty="0"/>
           </a:p>
         </p:txBody>
@@ -3246,6 +3120,13 @@
           </p:nvPr>
         </p:nvSpPr>
         <p:spPr/>
+        <p:txBody>
+          <a:bodyPr/>
+          <a:lstStyle/>
+          <a:p>
+            <a:endParaRPr lang="es-AR"/>
+          </a:p>
+        </p:txBody>
       </p:sp>
       <p:sp>
         <p:nvSpPr>
@@ -3262,10 +3143,6 @@
           <a:bodyPr/>
           <a:lstStyle/>
           <a:p>
-            <a:r>
-              <a:rPr lang="en-US" dirty="0"/>
-              <a:t/>
-            </a:r>
             <a:endParaRPr lang="en-US" dirty="0"/>
           </a:p>
         </p:txBody>
@@ -3334,6 +3211,13 @@
           </p:nvPr>
         </p:nvSpPr>
         <p:spPr/>
+        <p:txBody>
+          <a:bodyPr/>
+          <a:lstStyle/>
+          <a:p>
+            <a:endParaRPr lang="es-AR"/>
+          </a:p>
+        </p:txBody>
       </p:sp>
       <p:sp>
         <p:nvSpPr>
@@ -3350,10 +3234,6 @@
           <a:bodyPr/>
           <a:lstStyle/>
           <a:p>
-            <a:r>
-              <a:rPr lang="en-US" dirty="0"/>
-              <a:t/>
-            </a:r>
             <a:endParaRPr lang="en-US" dirty="0"/>
           </a:p>
         </p:txBody>
@@ -3422,6 +3302,13 @@
           </p:nvPr>
         </p:nvSpPr>
         <p:spPr/>
+        <p:txBody>
+          <a:bodyPr/>
+          <a:lstStyle/>
+          <a:p>
+            <a:endParaRPr lang="es-AR"/>
+          </a:p>
+        </p:txBody>
       </p:sp>
       <p:sp>
         <p:nvSpPr>
@@ -3438,10 +3325,6 @@
           <a:bodyPr/>
           <a:lstStyle/>
           <a:p>
-            <a:r>
-              <a:rPr lang="en-US" dirty="0"/>
-              <a:t/>
-            </a:r>
             <a:endParaRPr lang="en-US" dirty="0"/>
           </a:p>
         </p:txBody>
@@ -3510,6 +3393,13 @@
           </p:nvPr>
         </p:nvSpPr>
         <p:spPr/>
+        <p:txBody>
+          <a:bodyPr/>
+          <a:lstStyle/>
+          <a:p>
+            <a:endParaRPr lang="es-AR"/>
+          </a:p>
+        </p:txBody>
       </p:sp>
       <p:sp>
         <p:nvSpPr>
@@ -3526,10 +3416,6 @@
           <a:bodyPr/>
           <a:lstStyle/>
           <a:p>
-            <a:r>
-              <a:rPr lang="en-US" dirty="0"/>
-              <a:t/>
-            </a:r>
             <a:endParaRPr lang="en-US" dirty="0"/>
           </a:p>
         </p:txBody>
@@ -3603,6 +3489,11 @@
 <file path=ppt/slideMasters/slideMaster1.xml><?xml version="1.0" encoding="utf-8"?>
 <p:sldMaster xmlns:a="http://schemas.openxmlformats.org/drawingml/2006/main" xmlns:r="http://schemas.openxmlformats.org/officeDocument/2006/relationships" xmlns:p="http://schemas.openxmlformats.org/presentationml/2006/main">
   <p:cSld>
+    <p:bg>
+      <p:bgRef idx="1001">
+        <a:schemeClr val="bg1"/>
+      </p:bgRef>
+    </p:bg>
     <p:spTree>
       <p:nvGrpSpPr>
         <p:cNvPr id="1" name=""/>
@@ -3885,6 +3776,7 @@
         <a:solidFill>
           <a:srgbClr val="1E2761"/>
         </a:solidFill>
+        <a:effectLst/>
       </p:bgPr>
     </p:bg>
     <p:spTree>
@@ -3920,6 +3812,13 @@
           </a:solidFill>
           <a:ln/>
         </p:spPr>
+        <p:txBody>
+          <a:bodyPr/>
+          <a:lstStyle/>
+          <a:p>
+            <a:endParaRPr lang="es-AR"/>
+          </a:p>
+        </p:txBody>
       </p:sp>
       <p:sp>
         <p:nvSpPr>
@@ -3940,6 +3839,13 @@
           </a:solidFill>
           <a:ln/>
         </p:spPr>
+        <p:txBody>
+          <a:bodyPr/>
+          <a:lstStyle/>
+          <a:p>
+            <a:endParaRPr lang="es-AR"/>
+          </a:p>
+        </p:txBody>
       </p:sp>
       <p:sp>
         <p:nvSpPr>
@@ -3962,11 +3868,11 @@
           <a:bodyPr wrap="square" lIns="0" tIns="0" rIns="0" bIns="0" rtlCol="0" anchor="ctr"/>
           <a:lstStyle/>
           <a:p>
-            <a:pPr indent="0" marL="0">
-              <a:buNone/>
-            </a:pPr>
-            <a:r>
-              <a:rPr lang="en-US" sz="1400" b="1" spc="200" kern="0" dirty="0">
+            <a:pPr marL="0" indent="0">
+              <a:buNone/>
+            </a:pPr>
+            <a:r>
+              <a:rPr lang="en-US" sz="1400" b="1" kern="0" spc="200" dirty="0">
                 <a:solidFill>
                   <a:srgbClr val="CADCFC"/>
                 </a:solidFill>
@@ -4001,7 +3907,7 @@
           <a:bodyPr wrap="square" lIns="0" tIns="0" rIns="0" bIns="0" rtlCol="0" anchor="ctr"/>
           <a:lstStyle/>
           <a:p>
-            <a:pPr indent="0" marL="0">
+            <a:pPr marL="0" indent="0">
               <a:buNone/>
             </a:pPr>
             <a:r>
@@ -4040,7 +3946,7 @@
           <a:bodyPr wrap="square" lIns="0" tIns="0" rIns="0" bIns="0" rtlCol="0" anchor="t"/>
           <a:lstStyle/>
           <a:p>
-            <a:pPr indent="0" marL="0">
+            <a:pPr marL="0" indent="0">
               <a:buNone/>
             </a:pPr>
             <a:r>
@@ -4057,7 +3963,7 @@
             <a:endParaRPr lang="en-US" sz="2000" dirty="0"/>
           </a:p>
           <a:p>
-            <a:pPr indent="0" marL="0">
+            <a:pPr marL="0" indent="0">
               <a:buNone/>
             </a:pPr>
             <a:r>
@@ -4096,6 +4002,13 @@
           </a:solidFill>
           <a:ln/>
         </p:spPr>
+        <p:txBody>
+          <a:bodyPr/>
+          <a:lstStyle/>
+          <a:p>
+            <a:endParaRPr lang="es-AR"/>
+          </a:p>
+        </p:txBody>
       </p:sp>
       <p:sp>
         <p:nvSpPr>
@@ -4118,7 +4031,7 @@
           <a:bodyPr wrap="square" lIns="0" tIns="0" rIns="0" bIns="0" rtlCol="0" anchor="ctr"/>
           <a:lstStyle/>
           <a:p>
-            <a:pPr algn="ctr" indent="0" marL="0">
+            <a:pPr marL="0" indent="0" algn="ctr">
               <a:buNone/>
             </a:pPr>
             <a:r>
@@ -4157,6 +4070,13 @@
           </a:solidFill>
           <a:ln/>
         </p:spPr>
+        <p:txBody>
+          <a:bodyPr/>
+          <a:lstStyle/>
+          <a:p>
+            <a:endParaRPr lang="es-AR"/>
+          </a:p>
+        </p:txBody>
       </p:sp>
       <p:sp>
         <p:nvSpPr>
@@ -4179,7 +4099,7 @@
           <a:bodyPr wrap="square" lIns="0" tIns="0" rIns="0" bIns="0" rtlCol="0" anchor="ctr"/>
           <a:lstStyle/>
           <a:p>
-            <a:pPr algn="ctr" indent="0" marL="0">
+            <a:pPr marL="0" indent="0" algn="ctr">
               <a:buNone/>
             </a:pPr>
             <a:r>
@@ -4218,7 +4138,7 @@
           <a:bodyPr wrap="square" lIns="0" tIns="0" rIns="0" bIns="0" rtlCol="0" anchor="ctr"/>
           <a:lstStyle/>
           <a:p>
-            <a:pPr indent="0" marL="0">
+            <a:pPr marL="0" indent="0">
               <a:buNone/>
             </a:pPr>
             <a:r>
@@ -4257,7 +4177,7 @@
           <a:bodyPr wrap="square" lIns="0" tIns="0" rIns="0" bIns="0" rtlCol="0" anchor="ctr"/>
           <a:lstStyle/>
           <a:p>
-            <a:pPr indent="0" marL="0">
+            <a:pPr marL="0" indent="0">
               <a:buNone/>
             </a:pPr>
             <a:r>
@@ -4291,6 +4211,7 @@
         <a:solidFill>
           <a:srgbClr val="FFFFFF"/>
         </a:solidFill>
+        <a:effectLst/>
       </p:bgPr>
     </p:bg>
     <p:spTree>
@@ -4328,11 +4249,11 @@
           <a:bodyPr wrap="square" lIns="0" tIns="0" rIns="0" bIns="0" rtlCol="0" anchor="ctr"/>
           <a:lstStyle/>
           <a:p>
-            <a:pPr algn="l" indent="0" marL="0">
-              <a:buNone/>
-            </a:pPr>
-            <a:r>
-              <a:rPr lang="en-US" sz="1300" b="1" spc="200" kern="0" dirty="0">
+            <a:pPr marL="0" indent="0" algn="l">
+              <a:buNone/>
+            </a:pPr>
+            <a:r>
+              <a:rPr lang="en-US" sz="1300" b="1" kern="0" spc="200" dirty="0">
                 <a:solidFill>
                   <a:srgbClr val="E8A33D"/>
                 </a:solidFill>
@@ -4367,7 +4288,7 @@
           <a:bodyPr wrap="square" lIns="0" tIns="0" rIns="0" bIns="0" rtlCol="0" anchor="ctr"/>
           <a:lstStyle/>
           <a:p>
-            <a:pPr algn="l" indent="0" marL="0">
+            <a:pPr marL="0" indent="0" algn="l">
               <a:buNone/>
             </a:pPr>
             <a:r>
@@ -4411,6 +4332,13 @@
             <a:prstDash val="solid"/>
           </a:ln>
         </p:spPr>
+        <p:txBody>
+          <a:bodyPr/>
+          <a:lstStyle/>
+          <a:p>
+            <a:endParaRPr lang="es-AR"/>
+          </a:p>
+        </p:txBody>
       </p:sp>
       <p:sp>
         <p:nvSpPr>
@@ -4433,7 +4361,7 @@
           <a:bodyPr wrap="square" lIns="0" tIns="0" rIns="0" bIns="0" rtlCol="0" anchor="t"/>
           <a:lstStyle/>
           <a:p>
-            <a:pPr indent="0" marL="0">
+            <a:pPr marL="0" indent="0">
               <a:lnSpc>
                 <a:spcPct val="112000"/>
               </a:lnSpc>
@@ -4448,12 +4376,34 @@
                 <a:ea typeface="Courier New" pitchFamily="34" charset="-122"/>
                 <a:cs typeface="Courier New" pitchFamily="34" charset="-120"/>
               </a:rPr>
-              <a:t>public void insertar(Object x, int prioridad) {</a:t>
-            </a:r>
-            <a:endParaRPr lang="en-US" sz="1350" dirty="0"/>
-          </a:p>
-          <a:p>
-            <a:pPr indent="0" marL="0">
+              <a:t>public void insertar(Object x, int </a:t>
+            </a:r>
+            <a:r>
+              <a:rPr lang="en-US" sz="1350" dirty="0" err="1">
+                <a:solidFill>
+                  <a:srgbClr val="1C1C2A"/>
+                </a:solidFill>
+                <a:latin typeface="Courier New" pitchFamily="34" charset="0"/>
+                <a:ea typeface="Courier New" pitchFamily="34" charset="-122"/>
+                <a:cs typeface="Courier New" pitchFamily="34" charset="-120"/>
+              </a:rPr>
+              <a:t>prioridad</a:t>
+            </a:r>
+            <a:r>
+              <a:rPr lang="en-US" sz="1350" dirty="0">
+                <a:solidFill>
+                  <a:srgbClr val="1C1C2A"/>
+                </a:solidFill>
+                <a:latin typeface="Courier New" pitchFamily="34" charset="0"/>
+                <a:ea typeface="Courier New" pitchFamily="34" charset="-122"/>
+                <a:cs typeface="Courier New" pitchFamily="34" charset="-120"/>
+              </a:rPr>
+              <a:t>) {</a:t>
+            </a:r>
+            <a:endParaRPr lang="en-US" sz="1350" dirty="0"/>
+          </a:p>
+          <a:p>
+            <a:pPr marL="0" indent="0">
               <a:lnSpc>
                 <a:spcPct val="112000"/>
               </a:lnSpc>
@@ -4473,7 +4423,7 @@
             <a:endParaRPr lang="en-US" sz="1350" dirty="0"/>
           </a:p>
           <a:p>
-            <a:pPr indent="0" marL="0">
+            <a:pPr marL="0" indent="0">
               <a:lnSpc>
                 <a:spcPct val="112000"/>
               </a:lnSpc>
@@ -4488,12 +4438,34 @@
                 <a:ea typeface="Courier New" pitchFamily="34" charset="-122"/>
                 <a:cs typeface="Courier New" pitchFamily="34" charset="-120"/>
               </a:rPr>
-              <a:t>    prioridades[cantidad] = prioridad;</a:t>
-            </a:r>
-            <a:endParaRPr lang="en-US" sz="1350" dirty="0"/>
-          </a:p>
-          <a:p>
-            <a:pPr indent="0" marL="0">
+              <a:t>    prioridades[cantidad] = </a:t>
+            </a:r>
+            <a:r>
+              <a:rPr lang="en-US" sz="1350" dirty="0" err="1">
+                <a:solidFill>
+                  <a:srgbClr val="1C1C2A"/>
+                </a:solidFill>
+                <a:latin typeface="Courier New" pitchFamily="34" charset="0"/>
+                <a:ea typeface="Courier New" pitchFamily="34" charset="-122"/>
+                <a:cs typeface="Courier New" pitchFamily="34" charset="-120"/>
+              </a:rPr>
+              <a:t>prioridad</a:t>
+            </a:r>
+            <a:r>
+              <a:rPr lang="en-US" sz="1350" dirty="0">
+                <a:solidFill>
+                  <a:srgbClr val="1C1C2A"/>
+                </a:solidFill>
+                <a:latin typeface="Courier New" pitchFamily="34" charset="0"/>
+                <a:ea typeface="Courier New" pitchFamily="34" charset="-122"/>
+                <a:cs typeface="Courier New" pitchFamily="34" charset="-120"/>
+              </a:rPr>
+              <a:t>;</a:t>
+            </a:r>
+            <a:endParaRPr lang="en-US" sz="1350" dirty="0"/>
+          </a:p>
+          <a:p>
+            <a:pPr marL="0" indent="0">
               <a:lnSpc>
                 <a:spcPct val="112000"/>
               </a:lnSpc>
@@ -4513,7 +4485,7 @@
             <a:endParaRPr lang="en-US" sz="1350" dirty="0"/>
           </a:p>
           <a:p>
-            <a:pPr indent="0" marL="0">
+            <a:pPr marL="0" indent="0">
               <a:lnSpc>
                 <a:spcPct val="112000"/>
               </a:lnSpc>
@@ -4533,7 +4505,7 @@
             <a:endParaRPr lang="en-US" sz="1350" dirty="0"/>
           </a:p>
           <a:p>
-            <a:pPr indent="0" marL="0">
+            <a:pPr marL="0" indent="0">
               <a:lnSpc>
                 <a:spcPct val="112000"/>
               </a:lnSpc>
@@ -4542,7 +4514,7 @@
             <a:endParaRPr lang="en-US" sz="1350" dirty="0"/>
           </a:p>
           <a:p>
-            <a:pPr indent="0" marL="0">
+            <a:pPr marL="0" indent="0">
               <a:lnSpc>
                 <a:spcPct val="112000"/>
               </a:lnSpc>
@@ -4562,7 +4534,7 @@
             <a:endParaRPr lang="en-US" sz="1350" dirty="0"/>
           </a:p>
           <a:p>
-            <a:pPr indent="0" marL="0">
+            <a:pPr marL="0" indent="0">
               <a:lnSpc>
                 <a:spcPct val="112000"/>
               </a:lnSpc>
@@ -4582,7 +4554,7 @@
             <a:endParaRPr lang="en-US" sz="1350" dirty="0"/>
           </a:p>
           <a:p>
-            <a:pPr indent="0" marL="0">
+            <a:pPr marL="0" indent="0">
               <a:lnSpc>
                 <a:spcPct val="112000"/>
               </a:lnSpc>
@@ -4602,7 +4574,7 @@
             <a:endParaRPr lang="en-US" sz="1350" dirty="0"/>
           </a:p>
           <a:p>
-            <a:pPr indent="0" marL="0">
+            <a:pPr marL="0" indent="0">
               <a:lnSpc>
                 <a:spcPct val="112000"/>
               </a:lnSpc>
@@ -4622,7 +4594,7 @@
             <a:endParaRPr lang="en-US" sz="1350" dirty="0"/>
           </a:p>
           <a:p>
-            <a:pPr indent="0" marL="0">
+            <a:pPr marL="0" indent="0">
               <a:lnSpc>
                 <a:spcPct val="112000"/>
               </a:lnSpc>
@@ -4642,7 +4614,7 @@
             <a:endParaRPr lang="en-US" sz="1350" dirty="0"/>
           </a:p>
           <a:p>
-            <a:pPr indent="0" marL="0">
+            <a:pPr marL="0" indent="0">
               <a:lnSpc>
                 <a:spcPct val="112000"/>
               </a:lnSpc>
@@ -4684,6 +4656,13 @@
           </a:solidFill>
           <a:ln/>
         </p:spPr>
+        <p:txBody>
+          <a:bodyPr/>
+          <a:lstStyle/>
+          <a:p>
+            <a:endParaRPr lang="es-AR"/>
+          </a:p>
+        </p:txBody>
       </p:sp>
       <p:sp>
         <p:nvSpPr>
@@ -4706,7 +4685,7 @@
           <a:bodyPr wrap="square" lIns="0" tIns="0" rIns="0" bIns="0" rtlCol="0" anchor="ctr"/>
           <a:lstStyle/>
           <a:p>
-            <a:pPr indent="0" marL="0">
+            <a:pPr marL="0" indent="0">
               <a:buNone/>
             </a:pPr>
             <a:r>
@@ -4745,7 +4724,7 @@
           <a:bodyPr wrap="square" lIns="0" tIns="0" rIns="0" bIns="0" rtlCol="0" anchor="ctr"/>
           <a:lstStyle/>
           <a:p>
-            <a:pPr algn="l" indent="0" marL="0">
+            <a:pPr marL="0" indent="0" algn="l">
               <a:buNone/>
             </a:pPr>
             <a:r>
@@ -4784,7 +4763,7 @@
           <a:bodyPr wrap="square" lIns="0" tIns="0" rIns="0" bIns="0" rtlCol="0" anchor="ctr"/>
           <a:lstStyle/>
           <a:p>
-            <a:pPr algn="r" indent="0" marL="0">
+            <a:pPr marL="0" indent="0" algn="r">
               <a:buNone/>
             </a:pPr>
             <a:r>
@@ -4818,6 +4797,7 @@
         <a:solidFill>
           <a:srgbClr val="FFFFFF"/>
         </a:solidFill>
+        <a:effectLst/>
       </p:bgPr>
     </p:bg>
     <p:spTree>
@@ -4855,11 +4835,11 @@
           <a:bodyPr wrap="square" lIns="0" tIns="0" rIns="0" bIns="0" rtlCol="0" anchor="ctr"/>
           <a:lstStyle/>
           <a:p>
-            <a:pPr algn="l" indent="0" marL="0">
-              <a:buNone/>
-            </a:pPr>
-            <a:r>
-              <a:rPr lang="en-US" sz="1300" b="1" spc="200" kern="0" dirty="0">
+            <a:pPr marL="0" indent="0" algn="l">
+              <a:buNone/>
+            </a:pPr>
+            <a:r>
+              <a:rPr lang="en-US" sz="1300" b="1" kern="0" spc="200" dirty="0">
                 <a:solidFill>
                   <a:srgbClr val="E8A33D"/>
                 </a:solidFill>
@@ -4894,7 +4874,7 @@
           <a:bodyPr wrap="square" lIns="0" tIns="0" rIns="0" bIns="0" rtlCol="0" anchor="ctr"/>
           <a:lstStyle/>
           <a:p>
-            <a:pPr algn="l" indent="0" marL="0">
+            <a:pPr marL="0" indent="0" algn="l">
               <a:buNone/>
             </a:pPr>
             <a:r>
@@ -4938,6 +4918,13 @@
             <a:prstDash val="solid"/>
           </a:ln>
         </p:spPr>
+        <p:txBody>
+          <a:bodyPr/>
+          <a:lstStyle/>
+          <a:p>
+            <a:endParaRPr lang="es-AR"/>
+          </a:p>
+        </p:txBody>
       </p:sp>
       <p:sp>
         <p:nvSpPr>
@@ -4960,7 +4947,7 @@
           <a:bodyPr wrap="square" lIns="0" tIns="0" rIns="0" bIns="0" rtlCol="0" anchor="t"/>
           <a:lstStyle/>
           <a:p>
-            <a:pPr indent="0" marL="0">
+            <a:pPr marL="0" indent="0">
               <a:lnSpc>
                 <a:spcPct val="115000"/>
               </a:lnSpc>
@@ -4980,7 +4967,7 @@
             <a:endParaRPr lang="en-US" sz="1350" dirty="0"/>
           </a:p>
           <a:p>
-            <a:pPr indent="0" marL="0">
+            <a:pPr marL="0" indent="0">
               <a:lnSpc>
                 <a:spcPct val="115000"/>
               </a:lnSpc>
@@ -5000,7 +4987,7 @@
             <a:endParaRPr lang="en-US" sz="1350" dirty="0"/>
           </a:p>
           <a:p>
-            <a:pPr indent="0" marL="0">
+            <a:pPr marL="0" indent="0">
               <a:lnSpc>
                 <a:spcPct val="115000"/>
               </a:lnSpc>
@@ -5020,7 +5007,7 @@
             <a:endParaRPr lang="en-US" sz="1350" dirty="0"/>
           </a:p>
           <a:p>
-            <a:pPr indent="0" marL="0">
+            <a:pPr marL="0" indent="0">
               <a:lnSpc>
                 <a:spcPct val="115000"/>
               </a:lnSpc>
@@ -5040,7 +5027,7 @@
             <a:endParaRPr lang="en-US" sz="1350" dirty="0"/>
           </a:p>
           <a:p>
-            <a:pPr indent="0" marL="0">
+            <a:pPr marL="0" indent="0">
               <a:lnSpc>
                 <a:spcPct val="115000"/>
               </a:lnSpc>
@@ -5060,7 +5047,7 @@
             <a:endParaRPr lang="en-US" sz="1350" dirty="0"/>
           </a:p>
           <a:p>
-            <a:pPr indent="0" marL="0">
+            <a:pPr marL="0" indent="0">
               <a:lnSpc>
                 <a:spcPct val="115000"/>
               </a:lnSpc>
@@ -5080,7 +5067,7 @@
             <a:endParaRPr lang="en-US" sz="1350" dirty="0"/>
           </a:p>
           <a:p>
-            <a:pPr indent="0" marL="0">
+            <a:pPr marL="0" indent="0">
               <a:lnSpc>
                 <a:spcPct val="115000"/>
               </a:lnSpc>
@@ -5100,7 +5087,7 @@
             <a:endParaRPr lang="en-US" sz="1350" dirty="0"/>
           </a:p>
           <a:p>
-            <a:pPr indent="0" marL="0">
+            <a:pPr marL="0" indent="0">
               <a:lnSpc>
                 <a:spcPct val="115000"/>
               </a:lnSpc>
@@ -5120,7 +5107,7 @@
             <a:endParaRPr lang="en-US" sz="1350" dirty="0"/>
           </a:p>
           <a:p>
-            <a:pPr indent="0" marL="0">
+            <a:pPr marL="0" indent="0">
               <a:lnSpc>
                 <a:spcPct val="115000"/>
               </a:lnSpc>
@@ -5140,7 +5127,7 @@
             <a:endParaRPr lang="en-US" sz="1350" dirty="0"/>
           </a:p>
           <a:p>
-            <a:pPr indent="0" marL="0">
+            <a:pPr marL="0" indent="0">
               <a:lnSpc>
                 <a:spcPct val="115000"/>
               </a:lnSpc>
@@ -5160,7 +5147,7 @@
             <a:endParaRPr lang="en-US" sz="1350" dirty="0"/>
           </a:p>
           <a:p>
-            <a:pPr indent="0" marL="0">
+            <a:pPr marL="0" indent="0">
               <a:lnSpc>
                 <a:spcPct val="115000"/>
               </a:lnSpc>
@@ -5207,6 +5194,13 @@
             <a:prstDash val="solid"/>
           </a:ln>
         </p:spPr>
+        <p:txBody>
+          <a:bodyPr/>
+          <a:lstStyle/>
+          <a:p>
+            <a:endParaRPr lang="es-AR"/>
+          </a:p>
+        </p:txBody>
       </p:sp>
       <p:sp>
         <p:nvSpPr>
@@ -5229,7 +5223,7 @@
           <a:bodyPr wrap="square" lIns="0" tIns="0" rIns="0" bIns="0" rtlCol="0" anchor="ctr"/>
           <a:lstStyle/>
           <a:p>
-            <a:pPr indent="0" marL="0">
+            <a:pPr marL="0" indent="0">
               <a:buNone/>
             </a:pPr>
             <a:r>
@@ -5268,7 +5262,7 @@
           <a:bodyPr wrap="square" lIns="0" tIns="0" rIns="0" bIns="0" rtlCol="0" anchor="t"/>
           <a:lstStyle/>
           <a:p>
-            <a:pPr indent="0" marL="0">
+            <a:pPr marL="0" indent="0">
               <a:lnSpc>
                 <a:spcPct val="120000"/>
               </a:lnSpc>
@@ -5285,12 +5279,6 @@
               </a:rPr>
               <a:t>pertenece: </a:t>
             </a:r>
-            <a:pPr indent="0" marL="0">
-              <a:lnSpc>
-                <a:spcPct val="120000"/>
-              </a:lnSpc>
-              <a:buNone/>
-            </a:pPr>
             <a:r>
               <a:rPr lang="en-US" sz="1250" dirty="0">
                 <a:solidFill>
@@ -5305,7 +5293,7 @@
             <a:endParaRPr lang="en-US" sz="1250" dirty="0"/>
           </a:p>
           <a:p>
-            <a:pPr indent="0" marL="0">
+            <a:pPr marL="0" indent="0">
               <a:lnSpc>
                 <a:spcPct val="120000"/>
               </a:lnSpc>
@@ -5314,7 +5302,7 @@
             <a:endParaRPr lang="en-US" sz="1250" dirty="0"/>
           </a:p>
           <a:p>
-            <a:pPr indent="0" marL="0">
+            <a:pPr marL="0" indent="0">
               <a:lnSpc>
                 <a:spcPct val="120000"/>
               </a:lnSpc>
@@ -5331,12 +5319,6 @@
               </a:rPr>
               <a:t>agregar: </a:t>
             </a:r>
-            <a:pPr indent="0" marL="0">
-              <a:lnSpc>
-                <a:spcPct val="120000"/>
-              </a:lnSpc>
-              <a:buNone/>
-            </a:pPr>
             <a:r>
               <a:rPr lang="en-US" sz="1250" dirty="0">
                 <a:solidFill>
@@ -5351,7 +5333,7 @@
             <a:endParaRPr lang="en-US" sz="1250" dirty="0"/>
           </a:p>
           <a:p>
-            <a:pPr indent="0" marL="0">
+            <a:pPr marL="0" indent="0">
               <a:lnSpc>
                 <a:spcPct val="120000"/>
               </a:lnSpc>
@@ -5360,7 +5342,7 @@
             <a:endParaRPr lang="en-US" sz="1250" dirty="0"/>
           </a:p>
           <a:p>
-            <a:pPr indent="0" marL="0">
+            <a:pPr marL="0" indent="0">
               <a:lnSpc>
                 <a:spcPct val="120000"/>
               </a:lnSpc>
@@ -5377,12 +5359,6 @@
               </a:rPr>
               <a:t>Diferencia con Diccionario: </a:t>
             </a:r>
-            <a:pPr indent="0" marL="0">
-              <a:lnSpc>
-                <a:spcPct val="120000"/>
-              </a:lnSpc>
-              <a:buNone/>
-            </a:pPr>
             <a:r>
               <a:rPr lang="en-US" sz="1250" dirty="0">
                 <a:solidFill>
@@ -5397,7 +5373,7 @@
             <a:endParaRPr lang="en-US" sz="1250" dirty="0"/>
           </a:p>
           <a:p>
-            <a:pPr indent="0" marL="0">
+            <a:pPr marL="0" indent="0">
               <a:lnSpc>
                 <a:spcPct val="120000"/>
               </a:lnSpc>
@@ -5428,7 +5404,7 @@
           <a:bodyPr wrap="square" lIns="0" tIns="0" rIns="0" bIns="0" rtlCol="0" anchor="ctr"/>
           <a:lstStyle/>
           <a:p>
-            <a:pPr algn="l" indent="0" marL="0">
+            <a:pPr marL="0" indent="0" algn="l">
               <a:buNone/>
             </a:pPr>
             <a:r>
@@ -5467,7 +5443,7 @@
           <a:bodyPr wrap="square" lIns="0" tIns="0" rIns="0" bIns="0" rtlCol="0" anchor="ctr"/>
           <a:lstStyle/>
           <a:p>
-            <a:pPr algn="r" indent="0" marL="0">
+            <a:pPr marL="0" indent="0" algn="r">
               <a:buNone/>
             </a:pPr>
             <a:r>
@@ -5501,6 +5477,7 @@
         <a:solidFill>
           <a:srgbClr val="FFFFFF"/>
         </a:solidFill>
+        <a:effectLst/>
       </p:bgPr>
     </p:bg>
     <p:spTree>
@@ -5538,11 +5515,11 @@
           <a:bodyPr wrap="square" lIns="0" tIns="0" rIns="0" bIns="0" rtlCol="0" anchor="ctr"/>
           <a:lstStyle/>
           <a:p>
-            <a:pPr algn="l" indent="0" marL="0">
-              <a:buNone/>
-            </a:pPr>
-            <a:r>
-              <a:rPr lang="en-US" sz="1300" b="1" spc="200" kern="0" dirty="0">
+            <a:pPr marL="0" indent="0" algn="l">
+              <a:buNone/>
+            </a:pPr>
+            <a:r>
+              <a:rPr lang="en-US" sz="1300" b="1" kern="0" spc="200" dirty="0">
                 <a:solidFill>
                   <a:srgbClr val="E8A33D"/>
                 </a:solidFill>
@@ -5577,7 +5554,7 @@
           <a:bodyPr wrap="square" lIns="0" tIns="0" rIns="0" bIns="0" rtlCol="0" anchor="ctr"/>
           <a:lstStyle/>
           <a:p>
-            <a:pPr algn="l" indent="0" marL="0">
+            <a:pPr marL="0" indent="0" algn="l">
               <a:buNone/>
             </a:pPr>
             <a:r>
@@ -5621,6 +5598,13 @@
             <a:prstDash val="solid"/>
           </a:ln>
         </p:spPr>
+        <p:txBody>
+          <a:bodyPr/>
+          <a:lstStyle/>
+          <a:p>
+            <a:endParaRPr lang="es-AR"/>
+          </a:p>
+        </p:txBody>
       </p:sp>
       <p:sp>
         <p:nvSpPr>
@@ -5643,7 +5627,7 @@
           <a:bodyPr wrap="square" lIns="0" tIns="0" rIns="0" bIns="0" rtlCol="0" anchor="t"/>
           <a:lstStyle/>
           <a:p>
-            <a:pPr indent="0" marL="0">
+            <a:pPr marL="0" indent="0">
               <a:lnSpc>
                 <a:spcPct val="112000"/>
               </a:lnSpc>
@@ -5663,7 +5647,7 @@
             <a:endParaRPr lang="en-US" sz="1350" dirty="0"/>
           </a:p>
           <a:p>
-            <a:pPr indent="0" marL="0">
+            <a:pPr marL="0" indent="0">
               <a:lnSpc>
                 <a:spcPct val="112000"/>
               </a:lnSpc>
@@ -5683,7 +5667,7 @@
             <a:endParaRPr lang="en-US" sz="1350" dirty="0"/>
           </a:p>
           <a:p>
-            <a:pPr indent="0" marL="0">
+            <a:pPr marL="0" indent="0">
               <a:lnSpc>
                 <a:spcPct val="112000"/>
               </a:lnSpc>
@@ -5703,7 +5687,7 @@
             <a:endParaRPr lang="en-US" sz="1350" dirty="0"/>
           </a:p>
           <a:p>
-            <a:pPr indent="0" marL="0">
+            <a:pPr marL="0" indent="0">
               <a:lnSpc>
                 <a:spcPct val="112000"/>
               </a:lnSpc>
@@ -5723,7 +5707,7 @@
             <a:endParaRPr lang="en-US" sz="1350" dirty="0"/>
           </a:p>
           <a:p>
-            <a:pPr indent="0" marL="0">
+            <a:pPr marL="0" indent="0">
               <a:lnSpc>
                 <a:spcPct val="112000"/>
               </a:lnSpc>
@@ -5743,7 +5727,7 @@
             <a:endParaRPr lang="en-US" sz="1350" dirty="0"/>
           </a:p>
           <a:p>
-            <a:pPr indent="0" marL="0">
+            <a:pPr marL="0" indent="0">
               <a:lnSpc>
                 <a:spcPct val="112000"/>
               </a:lnSpc>
@@ -5763,7 +5747,7 @@
             <a:endParaRPr lang="en-US" sz="1350" dirty="0"/>
           </a:p>
           <a:p>
-            <a:pPr indent="0" marL="0">
+            <a:pPr marL="0" indent="0">
               <a:lnSpc>
                 <a:spcPct val="112000"/>
               </a:lnSpc>
@@ -5772,7 +5756,7 @@
             <a:endParaRPr lang="en-US" sz="1350" dirty="0"/>
           </a:p>
           <a:p>
-            <a:pPr indent="0" marL="0">
+            <a:pPr marL="0" indent="0">
               <a:lnSpc>
                 <a:spcPct val="112000"/>
               </a:lnSpc>
@@ -5792,7 +5776,7 @@
             <a:endParaRPr lang="en-US" sz="1350" dirty="0"/>
           </a:p>
           <a:p>
-            <a:pPr indent="0" marL="0">
+            <a:pPr marL="0" indent="0">
               <a:lnSpc>
                 <a:spcPct val="112000"/>
               </a:lnSpc>
@@ -5812,7 +5796,7 @@
             <a:endParaRPr lang="en-US" sz="1350" dirty="0"/>
           </a:p>
           <a:p>
-            <a:pPr indent="0" marL="0">
+            <a:pPr marL="0" indent="0">
               <a:lnSpc>
                 <a:spcPct val="112000"/>
               </a:lnSpc>
@@ -5832,7 +5816,7 @@
             <a:endParaRPr lang="en-US" sz="1350" dirty="0"/>
           </a:p>
           <a:p>
-            <a:pPr indent="0" marL="0">
+            <a:pPr marL="0" indent="0">
               <a:lnSpc>
                 <a:spcPct val="112000"/>
               </a:lnSpc>
@@ -5852,7 +5836,7 @@
             <a:endParaRPr lang="en-US" sz="1350" dirty="0"/>
           </a:p>
           <a:p>
-            <a:pPr indent="0" marL="0">
+            <a:pPr marL="0" indent="0">
               <a:lnSpc>
                 <a:spcPct val="112000"/>
               </a:lnSpc>
@@ -5894,6 +5878,13 @@
           </a:solidFill>
           <a:ln/>
         </p:spPr>
+        <p:txBody>
+          <a:bodyPr/>
+          <a:lstStyle/>
+          <a:p>
+            <a:endParaRPr lang="es-AR"/>
+          </a:p>
+        </p:txBody>
       </p:sp>
       <p:sp>
         <p:nvSpPr>
@@ -5916,7 +5907,7 @@
           <a:bodyPr wrap="square" lIns="0" tIns="0" rIns="0" bIns="0" rtlCol="0" anchor="ctr"/>
           <a:lstStyle/>
           <a:p>
-            <a:pPr indent="0" marL="0">
+            <a:pPr marL="0" indent="0">
               <a:buNone/>
             </a:pPr>
             <a:r>
@@ -5955,7 +5946,7 @@
           <a:bodyPr wrap="square" lIns="0" tIns="0" rIns="0" bIns="0" rtlCol="0" anchor="ctr"/>
           <a:lstStyle/>
           <a:p>
-            <a:pPr algn="l" indent="0" marL="0">
+            <a:pPr marL="0" indent="0" algn="l">
               <a:buNone/>
             </a:pPr>
             <a:r>
@@ -5994,7 +5985,7 @@
           <a:bodyPr wrap="square" lIns="0" tIns="0" rIns="0" bIns="0" rtlCol="0" anchor="ctr"/>
           <a:lstStyle/>
           <a:p>
-            <a:pPr algn="r" indent="0" marL="0">
+            <a:pPr marL="0" indent="0" algn="r">
               <a:buNone/>
             </a:pPr>
             <a:r>
@@ -6028,6 +6019,7 @@
         <a:solidFill>
           <a:srgbClr val="1E2761"/>
         </a:solidFill>
+        <a:effectLst/>
       </p:bgPr>
     </p:bg>
     <p:spTree>
@@ -6063,6 +6055,13 @@
           </a:solidFill>
           <a:ln/>
         </p:spPr>
+        <p:txBody>
+          <a:bodyPr/>
+          <a:lstStyle/>
+          <a:p>
+            <a:endParaRPr lang="es-AR"/>
+          </a:p>
+        </p:txBody>
       </p:sp>
       <p:sp>
         <p:nvSpPr>
@@ -6085,11 +6084,11 @@
           <a:bodyPr wrap="square" lIns="0" tIns="0" rIns="0" bIns="0" rtlCol="0" anchor="ctr"/>
           <a:lstStyle/>
           <a:p>
-            <a:pPr indent="0" marL="0">
-              <a:buNone/>
-            </a:pPr>
-            <a:r>
-              <a:rPr lang="en-US" sz="1400" b="1" spc="200" kern="0" dirty="0">
+            <a:pPr marL="0" indent="0">
+              <a:buNone/>
+            </a:pPr>
+            <a:r>
+              <a:rPr lang="en-US" sz="1400" b="1" kern="0" spc="200" dirty="0">
                 <a:solidFill>
                   <a:srgbClr val="E8A33D"/>
                 </a:solidFill>
@@ -6124,7 +6123,7 @@
           <a:bodyPr wrap="square" lIns="0" tIns="0" rIns="0" bIns="0" rtlCol="0" anchor="ctr"/>
           <a:lstStyle/>
           <a:p>
-            <a:pPr indent="0" marL="0">
+            <a:pPr marL="0" indent="0">
               <a:buNone/>
             </a:pPr>
             <a:r>
@@ -6163,7 +6162,7 @@
           <a:bodyPr wrap="square" lIns="0" tIns="0" rIns="0" bIns="0" rtlCol="0" anchor="ctr"/>
           <a:lstStyle/>
           <a:p>
-            <a:pPr algn="l" indent="0" marL="0">
+            <a:pPr marL="0" indent="0" algn="l">
               <a:buNone/>
             </a:pPr>
             <a:r>
@@ -6202,7 +6201,7 @@
           <a:bodyPr wrap="square" lIns="0" tIns="0" rIns="0" bIns="0" rtlCol="0" anchor="ctr"/>
           <a:lstStyle/>
           <a:p>
-            <a:pPr algn="r" indent="0" marL="0">
+            <a:pPr marL="0" indent="0" algn="r">
               <a:buNone/>
             </a:pPr>
             <a:r>
@@ -6236,6 +6235,7 @@
         <a:solidFill>
           <a:srgbClr val="FFFFFF"/>
         </a:solidFill>
+        <a:effectLst/>
       </p:bgPr>
     </p:bg>
     <p:spTree>
@@ -6273,11 +6273,11 @@
           <a:bodyPr wrap="square" lIns="0" tIns="0" rIns="0" bIns="0" rtlCol="0" anchor="ctr"/>
           <a:lstStyle/>
           <a:p>
-            <a:pPr algn="l" indent="0" marL="0">
-              <a:buNone/>
-            </a:pPr>
-            <a:r>
-              <a:rPr lang="en-US" sz="1300" b="1" spc="200" kern="0" dirty="0">
+            <a:pPr marL="0" indent="0" algn="l">
+              <a:buNone/>
+            </a:pPr>
+            <a:r>
+              <a:rPr lang="en-US" sz="1300" b="1" kern="0" spc="200" dirty="0">
                 <a:solidFill>
                   <a:srgbClr val="E8A33D"/>
                 </a:solidFill>
@@ -6312,7 +6312,7 @@
           <a:bodyPr wrap="square" lIns="0" tIns="0" rIns="0" bIns="0" rtlCol="0" anchor="ctr"/>
           <a:lstStyle/>
           <a:p>
-            <a:pPr algn="l" indent="0" marL="0">
+            <a:pPr marL="0" indent="0" algn="l">
               <a:buNone/>
             </a:pPr>
             <a:r>
@@ -6338,8 +6338,8 @@
         </p:nvSpPr>
         <p:spPr>
           <a:xfrm>
-            <a:off x="548640" y="1737360"/>
-            <a:ext cx="3301898" cy="3108960"/>
+            <a:off x="548640" y="1661752"/>
+            <a:ext cx="3301898" cy="3562643"/>
           </a:xfrm>
           <a:prstGeom prst="roundRect">
             <a:avLst>
@@ -6356,6 +6356,13 @@
             <a:prstDash val="solid"/>
           </a:ln>
         </p:spPr>
+        <p:txBody>
+          <a:bodyPr/>
+          <a:lstStyle/>
+          <a:p>
+            <a:endParaRPr lang="es-AR"/>
+          </a:p>
+        </p:txBody>
       </p:sp>
       <p:sp>
         <p:nvSpPr>
@@ -6365,7 +6372,7 @@
         </p:nvSpPr>
         <p:spPr>
           <a:xfrm>
-            <a:off x="777240" y="1965960"/>
+            <a:off x="777240" y="1603371"/>
             <a:ext cx="2844698" cy="457200"/>
           </a:xfrm>
           <a:prstGeom prst="rect">
@@ -6378,7 +6385,7 @@
           <a:bodyPr wrap="square" lIns="0" tIns="0" rIns="0" bIns="0" rtlCol="0" anchor="ctr"/>
           <a:lstStyle/>
           <a:p>
-            <a:pPr indent="0" marL="0">
+            <a:pPr marL="0" indent="0">
               <a:buNone/>
             </a:pPr>
             <a:r>
@@ -6404,8 +6411,8 @@
         </p:nvSpPr>
         <p:spPr>
           <a:xfrm>
-            <a:off x="777240" y="2514600"/>
-            <a:ext cx="2844698" cy="2103120"/>
+            <a:off x="777240" y="2152011"/>
+            <a:ext cx="2844698" cy="773723"/>
           </a:xfrm>
           <a:prstGeom prst="rect">
             <a:avLst/>
@@ -6417,7 +6424,7 @@
           <a:bodyPr wrap="square" lIns="0" tIns="0" rIns="0" bIns="0" rtlCol="0" anchor="t"/>
           <a:lstStyle/>
           <a:p>
-            <a:pPr indent="0" marL="0">
+            <a:pPr marL="0" indent="0">
               <a:buNone/>
             </a:pPr>
             <a:r>
@@ -6437,40 +6444,13 @@
       </p:sp>
       <p:sp>
         <p:nvSpPr>
-          <p:cNvPr id="7" name="Shape 5"/>
-          <p:cNvSpPr/>
-          <p:nvPr/>
-        </p:nvSpPr>
-        <p:spPr>
-          <a:xfrm>
-            <a:off x="4017874" y="1737360"/>
-            <a:ext cx="3301898" cy="3108960"/>
-          </a:xfrm>
-          <a:prstGeom prst="roundRect">
-            <a:avLst>
-              <a:gd name="adj" fmla="val 1471"/>
-            </a:avLst>
-          </a:prstGeom>
-          <a:solidFill>
-            <a:srgbClr val="F5F7FC"/>
-          </a:solidFill>
-          <a:ln w="12700">
-            <a:solidFill>
-              <a:srgbClr val="CADCFC"/>
-            </a:solidFill>
-            <a:prstDash val="solid"/>
-          </a:ln>
-        </p:spPr>
-      </p:sp>
-      <p:sp>
-        <p:nvSpPr>
           <p:cNvPr id="8" name="Text 6"/>
           <p:cNvSpPr txBox="1"/>
           <p:nvPr/>
         </p:nvSpPr>
         <p:spPr>
           <a:xfrm>
-            <a:off x="4246474" y="1965960"/>
+            <a:off x="777240" y="2834294"/>
             <a:ext cx="2844698" cy="457200"/>
           </a:xfrm>
           <a:prstGeom prst="rect">
@@ -6483,7 +6463,7 @@
           <a:bodyPr wrap="square" lIns="0" tIns="0" rIns="0" bIns="0" rtlCol="0" anchor="ctr"/>
           <a:lstStyle/>
           <a:p>
-            <a:pPr indent="0" marL="0">
+            <a:pPr marL="0" indent="0">
               <a:buNone/>
             </a:pPr>
             <a:r>
@@ -6509,8 +6489,8 @@
         </p:nvSpPr>
         <p:spPr>
           <a:xfrm>
-            <a:off x="4246474" y="2514600"/>
-            <a:ext cx="2844698" cy="2103120"/>
+            <a:off x="777240" y="3382934"/>
+            <a:ext cx="2844698" cy="735037"/>
           </a:xfrm>
           <a:prstGeom prst="rect">
             <a:avLst/>
@@ -6522,7 +6502,7 @@
           <a:bodyPr wrap="square" lIns="0" tIns="0" rIns="0" bIns="0" rtlCol="0" anchor="t"/>
           <a:lstStyle/>
           <a:p>
-            <a:pPr indent="0" marL="0">
+            <a:pPr marL="0" indent="0">
               <a:buNone/>
             </a:pPr>
             <a:r>
@@ -6542,40 +6522,13 @@
       </p:sp>
       <p:sp>
         <p:nvSpPr>
-          <p:cNvPr id="10" name="Shape 8"/>
-          <p:cNvSpPr/>
-          <p:nvPr/>
-        </p:nvSpPr>
-        <p:spPr>
-          <a:xfrm>
-            <a:off x="7487107" y="1737360"/>
-            <a:ext cx="3301898" cy="3108960"/>
-          </a:xfrm>
-          <a:prstGeom prst="roundRect">
-            <a:avLst>
-              <a:gd name="adj" fmla="val 1471"/>
-            </a:avLst>
-          </a:prstGeom>
-          <a:solidFill>
-            <a:srgbClr val="F5F7FC"/>
-          </a:solidFill>
-          <a:ln w="12700">
-            <a:solidFill>
-              <a:srgbClr val="CADCFC"/>
-            </a:solidFill>
-            <a:prstDash val="solid"/>
-          </a:ln>
-        </p:spPr>
-      </p:sp>
-      <p:sp>
-        <p:nvSpPr>
           <p:cNvPr id="11" name="Text 9"/>
           <p:cNvSpPr txBox="1"/>
           <p:nvPr/>
         </p:nvSpPr>
         <p:spPr>
           <a:xfrm>
-            <a:off x="7715707" y="1965960"/>
+            <a:off x="777240" y="3980811"/>
             <a:ext cx="2844698" cy="457200"/>
           </a:xfrm>
           <a:prstGeom prst="rect">
@@ -6588,7 +6541,7 @@
           <a:bodyPr wrap="square" lIns="0" tIns="0" rIns="0" bIns="0" rtlCol="0" anchor="ctr"/>
           <a:lstStyle/>
           <a:p>
-            <a:pPr indent="0" marL="0">
+            <a:pPr marL="0" indent="0">
               <a:buNone/>
             </a:pPr>
             <a:r>
@@ -6614,8 +6567,8 @@
         </p:nvSpPr>
         <p:spPr>
           <a:xfrm>
-            <a:off x="7715707" y="2514600"/>
-            <a:ext cx="2844698" cy="2103120"/>
+            <a:off x="777240" y="4529451"/>
+            <a:ext cx="2844698" cy="703385"/>
           </a:xfrm>
           <a:prstGeom prst="rect">
             <a:avLst/>
@@ -6627,7 +6580,7 @@
           <a:bodyPr wrap="square" lIns="0" tIns="0" rIns="0" bIns="0" rtlCol="0" anchor="t"/>
           <a:lstStyle/>
           <a:p>
-            <a:pPr indent="0" marL="0">
+            <a:pPr marL="0" indent="0">
               <a:buNone/>
             </a:pPr>
             <a:r>
@@ -6653,7 +6606,7 @@
         </p:nvSpPr>
         <p:spPr>
           <a:xfrm>
-            <a:off x="548640" y="5074920"/>
+            <a:off x="548640" y="5437163"/>
             <a:ext cx="10881360" cy="594360"/>
           </a:xfrm>
           <a:prstGeom prst="rect">
@@ -6666,7 +6619,7 @@
           <a:bodyPr wrap="square" lIns="0" tIns="0" rIns="0" bIns="0" rtlCol="0" anchor="ctr"/>
           <a:lstStyle/>
           <a:p>
-            <a:pPr indent="0" marL="0">
+            <a:pPr marL="0" indent="0">
               <a:buNone/>
             </a:pPr>
             <a:r>
@@ -6705,7 +6658,7 @@
           <a:bodyPr wrap="square" lIns="0" tIns="0" rIns="0" bIns="0" rtlCol="0" anchor="ctr"/>
           <a:lstStyle/>
           <a:p>
-            <a:pPr algn="l" indent="0" marL="0">
+            <a:pPr marL="0" indent="0" algn="l">
               <a:buNone/>
             </a:pPr>
             <a:r>
@@ -6744,7 +6697,7 @@
           <a:bodyPr wrap="square" lIns="0" tIns="0" rIns="0" bIns="0" rtlCol="0" anchor="ctr"/>
           <a:lstStyle/>
           <a:p>
-            <a:pPr algn="r" indent="0" marL="0">
+            <a:pPr marL="0" indent="0" algn="r">
               <a:buNone/>
             </a:pPr>
             <a:r>
@@ -6762,6 +6715,36 @@
           </a:p>
         </p:txBody>
       </p:sp>
+      <p:pic>
+        <p:nvPicPr>
+          <p:cNvPr id="17" name="Imagen 16">
+            <a:extLst>
+              <a:ext uri="{FF2B5EF4-FFF2-40B4-BE49-F238E27FC236}">
+                <a16:creationId xmlns:a16="http://schemas.microsoft.com/office/drawing/2014/main" id="{A34DA335-2B04-0078-6070-31C148AABCBE}"/>
+              </a:ext>
+            </a:extLst>
+          </p:cNvPr>
+          <p:cNvPicPr>
+            <a:picLocks noChangeAspect="1"/>
+          </p:cNvPicPr>
+          <p:nvPr/>
+        </p:nvPicPr>
+        <p:blipFill>
+          <a:blip r:embed="rId3"/>
+          <a:stretch>
+            <a:fillRect/>
+          </a:stretch>
+        </p:blipFill>
+        <p:spPr>
+          <a:xfrm>
+            <a:off x="4431324" y="1288453"/>
+            <a:ext cx="6125782" cy="4079867"/>
+          </a:xfrm>
+          <a:prstGeom prst="rect">
+            <a:avLst/>
+          </a:prstGeom>
+        </p:spPr>
+      </p:pic>
     </p:spTree>
   </p:cSld>
   <p:clrMapOvr>
@@ -6778,6 +6761,7 @@
         <a:solidFill>
           <a:srgbClr val="FFFFFF"/>
         </a:solidFill>
+        <a:effectLst/>
       </p:bgPr>
     </p:bg>
     <p:spTree>
@@ -6815,11 +6799,11 @@
           <a:bodyPr wrap="square" lIns="0" tIns="0" rIns="0" bIns="0" rtlCol="0" anchor="ctr"/>
           <a:lstStyle/>
           <a:p>
-            <a:pPr algn="l" indent="0" marL="0">
-              <a:buNone/>
-            </a:pPr>
-            <a:r>
-              <a:rPr lang="en-US" sz="1300" b="1" spc="200" kern="0" dirty="0">
+            <a:pPr marL="0" indent="0" algn="l">
+              <a:buNone/>
+            </a:pPr>
+            <a:r>
+              <a:rPr lang="en-US" sz="1300" b="1" kern="0" spc="200" dirty="0">
                 <a:solidFill>
                   <a:srgbClr val="E8A33D"/>
                 </a:solidFill>
@@ -6854,7 +6838,7 @@
           <a:bodyPr wrap="square" lIns="0" tIns="0" rIns="0" bIns="0" rtlCol="0" anchor="ctr"/>
           <a:lstStyle/>
           <a:p>
-            <a:pPr algn="l" indent="0" marL="0">
+            <a:pPr marL="0" indent="0" algn="l">
               <a:buNone/>
             </a:pPr>
             <a:r>
@@ -6893,6 +6877,13 @@
           </a:solidFill>
           <a:ln/>
         </p:spPr>
+        <p:txBody>
+          <a:bodyPr/>
+          <a:lstStyle/>
+          <a:p>
+            <a:endParaRPr lang="es-AR"/>
+          </a:p>
+        </p:txBody>
       </p:sp>
       <p:sp>
         <p:nvSpPr>
@@ -6915,7 +6906,7 @@
           <a:bodyPr wrap="square" lIns="0" tIns="0" rIns="0" bIns="0" rtlCol="0" anchor="t"/>
           <a:lstStyle/>
           <a:p>
-            <a:pPr indent="0" marL="0">
+            <a:pPr marL="0" indent="0">
               <a:buNone/>
             </a:pPr>
             <a:r>
@@ -6954,6 +6945,13 @@
           </a:solidFill>
           <a:ln/>
         </p:spPr>
+        <p:txBody>
+          <a:bodyPr/>
+          <a:lstStyle/>
+          <a:p>
+            <a:endParaRPr lang="es-AR"/>
+          </a:p>
+        </p:txBody>
       </p:sp>
       <p:sp>
         <p:nvSpPr>
@@ -6976,7 +6974,7 @@
           <a:bodyPr wrap="square" lIns="0" tIns="0" rIns="0" bIns="0" rtlCol="0" anchor="t"/>
           <a:lstStyle/>
           <a:p>
-            <a:pPr indent="0" marL="0">
+            <a:pPr marL="0" indent="0">
               <a:buNone/>
             </a:pPr>
             <a:r>
@@ -6993,7 +6991,7 @@
             <a:endParaRPr lang="en-US" sz="1300" dirty="0"/>
           </a:p>
           <a:p>
-            <a:pPr indent="0" marL="0">
+            <a:pPr marL="0" indent="0">
               <a:buNone/>
             </a:pPr>
             <a:r>
@@ -7010,13 +7008,13 @@
             <a:endParaRPr lang="en-US" sz="1300" dirty="0"/>
           </a:p>
           <a:p>
-            <a:pPr indent="0" marL="0">
+            <a:pPr marL="0" indent="0">
               <a:buNone/>
             </a:pPr>
             <a:endParaRPr lang="en-US" sz="1300" dirty="0"/>
           </a:p>
           <a:p>
-            <a:pPr indent="0" marL="0">
+            <a:pPr marL="0" indent="0">
               <a:buNone/>
             </a:pPr>
             <a:r>
@@ -7033,7 +7031,7 @@
             <a:endParaRPr lang="en-US" sz="1300" dirty="0"/>
           </a:p>
           <a:p>
-            <a:pPr indent="0" marL="0">
+            <a:pPr marL="0" indent="0">
               <a:buNone/>
             </a:pPr>
             <a:r>
@@ -7050,7 +7048,7 @@
             <a:endParaRPr lang="en-US" sz="1300" dirty="0"/>
           </a:p>
           <a:p>
-            <a:pPr indent="0" marL="0">
+            <a:pPr marL="0" indent="0">
               <a:buNone/>
             </a:pPr>
             <a:r>
@@ -7089,6 +7087,13 @@
           </a:solidFill>
           <a:ln/>
         </p:spPr>
+        <p:txBody>
+          <a:bodyPr/>
+          <a:lstStyle/>
+          <a:p>
+            <a:endParaRPr lang="es-AR"/>
+          </a:p>
+        </p:txBody>
       </p:sp>
       <p:sp>
         <p:nvSpPr>
@@ -7111,7 +7116,7 @@
           <a:bodyPr wrap="square" lIns="0" tIns="0" rIns="0" bIns="0" rtlCol="0" anchor="ctr"/>
           <a:lstStyle/>
           <a:p>
-            <a:pPr indent="0" marL="0">
+            <a:pPr marL="0" indent="0">
               <a:buNone/>
             </a:pPr>
             <a:r>
@@ -7150,7 +7155,7 @@
           <a:bodyPr wrap="square" lIns="0" tIns="0" rIns="0" bIns="0" rtlCol="0" anchor="t"/>
           <a:lstStyle/>
           <a:p>
-            <a:pPr indent="0" marL="0">
+            <a:pPr marL="0" indent="0">
               <a:spcAft>
                 <a:spcPts val="1200"/>
               </a:spcAft>
@@ -7170,7 +7175,7 @@
             <a:endParaRPr lang="en-US" sz="1450" dirty="0"/>
           </a:p>
           <a:p>
-            <a:pPr indent="0" marL="0">
+            <a:pPr marL="0" indent="0">
               <a:spcAft>
                 <a:spcPts val="1200"/>
               </a:spcAft>
@@ -7190,7 +7195,7 @@
             <a:endParaRPr lang="en-US" sz="1450" dirty="0"/>
           </a:p>
           <a:p>
-            <a:pPr indent="0" marL="0">
+            <a:pPr marL="0" indent="0">
               <a:spcAft>
                 <a:spcPts val="1200"/>
               </a:spcAft>
@@ -7232,7 +7237,7 @@
           <a:bodyPr wrap="square" lIns="0" tIns="0" rIns="0" bIns="0" rtlCol="0" anchor="ctr"/>
           <a:lstStyle/>
           <a:p>
-            <a:pPr algn="l" indent="0" marL="0">
+            <a:pPr marL="0" indent="0" algn="l">
               <a:buNone/>
             </a:pPr>
             <a:r>
@@ -7271,7 +7276,7 @@
           <a:bodyPr wrap="square" lIns="0" tIns="0" rIns="0" bIns="0" rtlCol="0" anchor="ctr"/>
           <a:lstStyle/>
           <a:p>
-            <a:pPr algn="r" indent="0" marL="0">
+            <a:pPr marL="0" indent="0" algn="r">
               <a:buNone/>
             </a:pPr>
             <a:r>
@@ -7305,6 +7310,7 @@
         <a:solidFill>
           <a:srgbClr val="FFFFFF"/>
         </a:solidFill>
+        <a:effectLst/>
       </p:bgPr>
     </p:bg>
     <p:spTree>
@@ -7342,11 +7348,11 @@
           <a:bodyPr wrap="square" lIns="0" tIns="0" rIns="0" bIns="0" rtlCol="0" anchor="ctr"/>
           <a:lstStyle/>
           <a:p>
-            <a:pPr algn="l" indent="0" marL="0">
-              <a:buNone/>
-            </a:pPr>
-            <a:r>
-              <a:rPr lang="en-US" sz="1300" b="1" spc="200" kern="0" dirty="0">
+            <a:pPr marL="0" indent="0" algn="l">
+              <a:buNone/>
+            </a:pPr>
+            <a:r>
+              <a:rPr lang="en-US" sz="1300" b="1" kern="0" spc="200" dirty="0">
                 <a:solidFill>
                   <a:srgbClr val="E8A33D"/>
                 </a:solidFill>
@@ -7381,7 +7387,7 @@
           <a:bodyPr wrap="square" lIns="0" tIns="0" rIns="0" bIns="0" rtlCol="0" anchor="ctr"/>
           <a:lstStyle/>
           <a:p>
-            <a:pPr algn="l" indent="0" marL="0">
+            <a:pPr marL="0" indent="0" algn="l">
               <a:buNone/>
             </a:pPr>
             <a:r>
@@ -7425,6 +7431,13 @@
             <a:prstDash val="solid"/>
           </a:ln>
         </p:spPr>
+        <p:txBody>
+          <a:bodyPr/>
+          <a:lstStyle/>
+          <a:p>
+            <a:endParaRPr lang="es-AR"/>
+          </a:p>
+        </p:txBody>
       </p:sp>
       <p:sp>
         <p:nvSpPr>
@@ -7447,7 +7460,7 @@
           <a:bodyPr wrap="square" lIns="0" tIns="0" rIns="0" bIns="0" rtlCol="0" anchor="t"/>
           <a:lstStyle/>
           <a:p>
-            <a:pPr indent="0" marL="0">
+            <a:pPr marL="0" indent="0">
               <a:lnSpc>
                 <a:spcPct val="115000"/>
               </a:lnSpc>
@@ -7467,7 +7480,7 @@
             <a:endParaRPr lang="en-US" sz="1350" dirty="0"/>
           </a:p>
           <a:p>
-            <a:pPr indent="0" marL="0">
+            <a:pPr marL="0" indent="0">
               <a:lnSpc>
                 <a:spcPct val="115000"/>
               </a:lnSpc>
@@ -7487,7 +7500,7 @@
             <a:endParaRPr lang="en-US" sz="1350" dirty="0"/>
           </a:p>
           <a:p>
-            <a:pPr indent="0" marL="0">
+            <a:pPr marL="0" indent="0">
               <a:lnSpc>
                 <a:spcPct val="115000"/>
               </a:lnSpc>
@@ -7507,7 +7520,7 @@
             <a:endParaRPr lang="en-US" sz="1350" dirty="0"/>
           </a:p>
           <a:p>
-            <a:pPr indent="0" marL="0">
+            <a:pPr marL="0" indent="0">
               <a:lnSpc>
                 <a:spcPct val="115000"/>
               </a:lnSpc>
@@ -7527,7 +7540,7 @@
             <a:endParaRPr lang="en-US" sz="1350" dirty="0"/>
           </a:p>
           <a:p>
-            <a:pPr indent="0" marL="0">
+            <a:pPr marL="0" indent="0">
               <a:lnSpc>
                 <a:spcPct val="115000"/>
               </a:lnSpc>
@@ -7536,7 +7549,7 @@
             <a:endParaRPr lang="en-US" sz="1350" dirty="0"/>
           </a:p>
           <a:p>
-            <a:pPr indent="0" marL="0">
+            <a:pPr marL="0" indent="0">
               <a:lnSpc>
                 <a:spcPct val="115000"/>
               </a:lnSpc>
@@ -7556,7 +7569,7 @@
             <a:endParaRPr lang="en-US" sz="1350" dirty="0"/>
           </a:p>
           <a:p>
-            <a:pPr indent="0" marL="0">
+            <a:pPr marL="0" indent="0">
               <a:lnSpc>
                 <a:spcPct val="115000"/>
               </a:lnSpc>
@@ -7576,7 +7589,7 @@
             <a:endParaRPr lang="en-US" sz="1350" dirty="0"/>
           </a:p>
           <a:p>
-            <a:pPr indent="0" marL="0">
+            <a:pPr marL="0" indent="0">
               <a:lnSpc>
                 <a:spcPct val="115000"/>
               </a:lnSpc>
@@ -7596,7 +7609,7 @@
             <a:endParaRPr lang="en-US" sz="1350" dirty="0"/>
           </a:p>
           <a:p>
-            <a:pPr indent="0" marL="0">
+            <a:pPr marL="0" indent="0">
               <a:lnSpc>
                 <a:spcPct val="115000"/>
               </a:lnSpc>
@@ -7605,7 +7618,7 @@
             <a:endParaRPr lang="en-US" sz="1350" dirty="0"/>
           </a:p>
           <a:p>
-            <a:pPr indent="0" marL="0">
+            <a:pPr marL="0" indent="0">
               <a:lnSpc>
                 <a:spcPct val="115000"/>
               </a:lnSpc>
@@ -7625,7 +7638,7 @@
             <a:endParaRPr lang="en-US" sz="1350" dirty="0"/>
           </a:p>
           <a:p>
-            <a:pPr indent="0" marL="0">
+            <a:pPr marL="0" indent="0">
               <a:lnSpc>
                 <a:spcPct val="115000"/>
               </a:lnSpc>
@@ -7645,7 +7658,7 @@
             <a:endParaRPr lang="en-US" sz="1350" dirty="0"/>
           </a:p>
           <a:p>
-            <a:pPr indent="0" marL="0">
+            <a:pPr marL="0" indent="0">
               <a:lnSpc>
                 <a:spcPct val="115000"/>
               </a:lnSpc>
@@ -7665,7 +7678,7 @@
             <a:endParaRPr lang="en-US" sz="1350" dirty="0"/>
           </a:p>
           <a:p>
-            <a:pPr indent="0" marL="0">
+            <a:pPr marL="0" indent="0">
               <a:lnSpc>
                 <a:spcPct val="115000"/>
               </a:lnSpc>
@@ -7674,7 +7687,7 @@
             <a:endParaRPr lang="en-US" sz="1350" dirty="0"/>
           </a:p>
           <a:p>
-            <a:pPr indent="0" marL="0">
+            <a:pPr marL="0" indent="0">
               <a:lnSpc>
                 <a:spcPct val="115000"/>
               </a:lnSpc>
@@ -7694,7 +7707,7 @@
             <a:endParaRPr lang="en-US" sz="1350" dirty="0"/>
           </a:p>
           <a:p>
-            <a:pPr indent="0" marL="0">
+            <a:pPr marL="0" indent="0">
               <a:lnSpc>
                 <a:spcPct val="115000"/>
               </a:lnSpc>
@@ -7714,7 +7727,7 @@
             <a:endParaRPr lang="en-US" sz="1350" dirty="0"/>
           </a:p>
           <a:p>
-            <a:pPr indent="0" marL="0">
+            <a:pPr marL="0" indent="0">
               <a:lnSpc>
                 <a:spcPct val="115000"/>
               </a:lnSpc>
@@ -7761,6 +7774,13 @@
             <a:prstDash val="solid"/>
           </a:ln>
         </p:spPr>
+        <p:txBody>
+          <a:bodyPr/>
+          <a:lstStyle/>
+          <a:p>
+            <a:endParaRPr lang="es-AR"/>
+          </a:p>
+        </p:txBody>
       </p:sp>
       <p:sp>
         <p:nvSpPr>
@@ -7783,7 +7803,7 @@
           <a:bodyPr wrap="square" lIns="0" tIns="0" rIns="0" bIns="0" rtlCol="0" anchor="ctr"/>
           <a:lstStyle/>
           <a:p>
-            <a:pPr indent="0" marL="0">
+            <a:pPr marL="0" indent="0">
               <a:buNone/>
             </a:pPr>
             <a:r>
@@ -7822,7 +7842,7 @@
           <a:bodyPr wrap="square" lIns="0" tIns="0" rIns="0" bIns="0" rtlCol="0" anchor="t"/>
           <a:lstStyle/>
           <a:p>
-            <a:pPr indent="0" marL="0">
+            <a:pPr marL="0" indent="0">
               <a:lnSpc>
                 <a:spcPct val="120000"/>
               </a:lnSpc>
@@ -7839,12 +7859,6 @@
               </a:rPr>
               <a:t>Dominio: </a:t>
             </a:r>
-            <a:pPr indent="0" marL="0">
-              <a:lnSpc>
-                <a:spcPct val="120000"/>
-              </a:lnSpc>
-              <a:buNone/>
-            </a:pPr>
             <a:r>
               <a:rPr lang="en-US" sz="1250" dirty="0">
                 <a:solidFill>
@@ -7859,7 +7873,7 @@
             <a:endParaRPr lang="en-US" sz="1250" dirty="0"/>
           </a:p>
           <a:p>
-            <a:pPr indent="0" marL="0">
+            <a:pPr marL="0" indent="0">
               <a:lnSpc>
                 <a:spcPct val="120000"/>
               </a:lnSpc>
@@ -7868,7 +7882,7 @@
             <a:endParaRPr lang="en-US" sz="1250" dirty="0"/>
           </a:p>
           <a:p>
-            <a:pPr indent="0" marL="0">
+            <a:pPr marL="0" indent="0">
               <a:lnSpc>
                 <a:spcPct val="120000"/>
               </a:lnSpc>
@@ -7885,12 +7899,6 @@
               </a:rPr>
               <a:t>claves(d): </a:t>
             </a:r>
-            <a:pPr indent="0" marL="0">
-              <a:lnSpc>
-                <a:spcPct val="120000"/>
-              </a:lnSpc>
-              <a:buNone/>
-            </a:pPr>
             <a:r>
               <a:rPr lang="en-US" sz="1250" dirty="0">
                 <a:solidFill>
@@ -7905,7 +7913,7 @@
             <a:endParaRPr lang="en-US" sz="1250" dirty="0"/>
           </a:p>
           <a:p>
-            <a:pPr indent="0" marL="0">
+            <a:pPr marL="0" indent="0">
               <a:lnSpc>
                 <a:spcPct val="120000"/>
               </a:lnSpc>
@@ -7914,7 +7922,7 @@
             <a:endParaRPr lang="en-US" sz="1250" dirty="0"/>
           </a:p>
           <a:p>
-            <a:pPr indent="0" marL="0">
+            <a:pPr marL="0" indent="0">
               <a:lnSpc>
                 <a:spcPct val="120000"/>
               </a:lnSpc>
@@ -7931,12 +7939,6 @@
               </a:rPr>
               <a:t>Ya la usaron: </a:t>
             </a:r>
-            <a:pPr indent="0" marL="0">
-              <a:lnSpc>
-                <a:spcPct val="120000"/>
-              </a:lnSpc>
-              <a:buNone/>
-            </a:pPr>
             <a:r>
               <a:rPr lang="en-US" sz="1250" dirty="0">
                 <a:solidFill>
@@ -7951,7 +7953,7 @@
             <a:endParaRPr lang="en-US" sz="1250" dirty="0"/>
           </a:p>
           <a:p>
-            <a:pPr indent="0" marL="0">
+            <a:pPr marL="0" indent="0">
               <a:lnSpc>
                 <a:spcPct val="120000"/>
               </a:lnSpc>
@@ -7982,7 +7984,7 @@
           <a:bodyPr wrap="square" lIns="0" tIns="0" rIns="0" bIns="0" rtlCol="0" anchor="ctr"/>
           <a:lstStyle/>
           <a:p>
-            <a:pPr algn="l" indent="0" marL="0">
+            <a:pPr marL="0" indent="0" algn="l">
               <a:buNone/>
             </a:pPr>
             <a:r>
@@ -8021,7 +8023,7 @@
           <a:bodyPr wrap="square" lIns="0" tIns="0" rIns="0" bIns="0" rtlCol="0" anchor="ctr"/>
           <a:lstStyle/>
           <a:p>
-            <a:pPr algn="r" indent="0" marL="0">
+            <a:pPr marL="0" indent="0" algn="r">
               <a:buNone/>
             </a:pPr>
             <a:r>
@@ -8055,6 +8057,7 @@
         <a:solidFill>
           <a:srgbClr val="1E2761"/>
         </a:solidFill>
+        <a:effectLst/>
       </p:bgPr>
     </p:bg>
     <p:spTree>
@@ -8090,6 +8093,13 @@
           </a:solidFill>
           <a:ln/>
         </p:spPr>
+        <p:txBody>
+          <a:bodyPr/>
+          <a:lstStyle/>
+          <a:p>
+            <a:endParaRPr lang="es-AR"/>
+          </a:p>
+        </p:txBody>
       </p:sp>
       <p:sp>
         <p:nvSpPr>
@@ -8112,11 +8122,11 @@
           <a:bodyPr wrap="square" lIns="0" tIns="0" rIns="0" bIns="0" rtlCol="0" anchor="ctr"/>
           <a:lstStyle/>
           <a:p>
-            <a:pPr indent="0" marL="0">
-              <a:buNone/>
-            </a:pPr>
-            <a:r>
-              <a:rPr lang="en-US" sz="1400" b="1" spc="200" kern="0" dirty="0">
+            <a:pPr marL="0" indent="0">
+              <a:buNone/>
+            </a:pPr>
+            <a:r>
+              <a:rPr lang="en-US" sz="1400" b="1" kern="0" spc="200" dirty="0">
                 <a:solidFill>
                   <a:srgbClr val="E8A33D"/>
                 </a:solidFill>
@@ -8151,7 +8161,7 @@
           <a:bodyPr wrap="square" lIns="0" tIns="0" rIns="0" bIns="0" rtlCol="0" anchor="ctr"/>
           <a:lstStyle/>
           <a:p>
-            <a:pPr indent="0" marL="0">
+            <a:pPr marL="0" indent="0">
               <a:buNone/>
             </a:pPr>
             <a:r>
@@ -8190,7 +8200,7 @@
           <a:bodyPr wrap="square" lIns="0" tIns="0" rIns="0" bIns="0" rtlCol="0" anchor="ctr"/>
           <a:lstStyle/>
           <a:p>
-            <a:pPr algn="l" indent="0" marL="0">
+            <a:pPr marL="0" indent="0" algn="l">
               <a:buNone/>
             </a:pPr>
             <a:r>
@@ -8229,7 +8239,7 @@
           <a:bodyPr wrap="square" lIns="0" tIns="0" rIns="0" bIns="0" rtlCol="0" anchor="ctr"/>
           <a:lstStyle/>
           <a:p>
-            <a:pPr algn="r" indent="0" marL="0">
+            <a:pPr marL="0" indent="0" algn="r">
               <a:buNone/>
             </a:pPr>
             <a:r>
@@ -8263,6 +8273,7 @@
         <a:solidFill>
           <a:srgbClr val="FFFFFF"/>
         </a:solidFill>
+        <a:effectLst/>
       </p:bgPr>
     </p:bg>
     <p:spTree>
@@ -8300,11 +8311,11 @@
           <a:bodyPr wrap="square" lIns="0" tIns="0" rIns="0" bIns="0" rtlCol="0" anchor="ctr"/>
           <a:lstStyle/>
           <a:p>
-            <a:pPr algn="l" indent="0" marL="0">
-              <a:buNone/>
-            </a:pPr>
-            <a:r>
-              <a:rPr lang="en-US" sz="1300" b="1" spc="200" kern="0" dirty="0">
+            <a:pPr marL="0" indent="0" algn="l">
+              <a:buNone/>
+            </a:pPr>
+            <a:r>
+              <a:rPr lang="en-US" sz="1300" b="1" kern="0" spc="200" dirty="0">
                 <a:solidFill>
                   <a:srgbClr val="E8A33D"/>
                 </a:solidFill>
@@ -8339,7 +8350,7 @@
           <a:bodyPr wrap="square" lIns="0" tIns="0" rIns="0" bIns="0" rtlCol="0" anchor="ctr"/>
           <a:lstStyle/>
           <a:p>
-            <a:pPr algn="l" indent="0" marL="0">
+            <a:pPr marL="0" indent="0" algn="l">
               <a:buNone/>
             </a:pPr>
             <a:r>
@@ -8376,6 +8387,13 @@
           </a:solidFill>
           <a:ln/>
         </p:spPr>
+        <p:txBody>
+          <a:bodyPr/>
+          <a:lstStyle/>
+          <a:p>
+            <a:endParaRPr lang="es-AR"/>
+          </a:p>
+        </p:txBody>
       </p:sp>
       <p:sp>
         <p:nvSpPr>
@@ -8398,7 +8416,7 @@
           <a:bodyPr wrap="square" lIns="0" tIns="0" rIns="0" bIns="0" rtlCol="0" anchor="ctr"/>
           <a:lstStyle/>
           <a:p>
-            <a:pPr algn="ctr" indent="0" marL="0">
+            <a:pPr marL="0" indent="0" algn="ctr">
               <a:buNone/>
             </a:pPr>
             <a:r>
@@ -8437,7 +8455,7 @@
           <a:bodyPr wrap="square" lIns="0" tIns="0" rIns="0" bIns="0" rtlCol="0" anchor="ctr"/>
           <a:lstStyle/>
           <a:p>
-            <a:pPr indent="0" marL="0">
+            <a:pPr marL="0" indent="0">
               <a:buNone/>
             </a:pPr>
             <a:r>
@@ -8464,7 +8482,7 @@
         <p:spPr>
           <a:xfrm>
             <a:off x="1325880" y="1965960"/>
-            <a:ext cx="9875520" cy="807720"/>
+            <a:ext cx="3707593" cy="807720"/>
           </a:xfrm>
           <a:prstGeom prst="rect">
             <a:avLst/>
@@ -8476,7 +8494,7 @@
           <a:bodyPr wrap="square" lIns="0" tIns="0" rIns="0" bIns="0" rtlCol="0" anchor="t"/>
           <a:lstStyle/>
           <a:p>
-            <a:pPr indent="0" marL="0">
+            <a:pPr marL="0" indent="0">
               <a:buNone/>
             </a:pPr>
             <a:r>
@@ -8513,6 +8531,13 @@
           </a:solidFill>
           <a:ln/>
         </p:spPr>
+        <p:txBody>
+          <a:bodyPr/>
+          <a:lstStyle/>
+          <a:p>
+            <a:endParaRPr lang="es-AR"/>
+          </a:p>
+        </p:txBody>
       </p:sp>
       <p:sp>
         <p:nvSpPr>
@@ -8535,7 +8560,7 @@
           <a:bodyPr wrap="square" lIns="0" tIns="0" rIns="0" bIns="0" rtlCol="0" anchor="ctr"/>
           <a:lstStyle/>
           <a:p>
-            <a:pPr algn="ctr" indent="0" marL="0">
+            <a:pPr marL="0" indent="0" algn="ctr">
               <a:buNone/>
             </a:pPr>
             <a:r>
@@ -8574,7 +8599,7 @@
           <a:bodyPr wrap="square" lIns="0" tIns="0" rIns="0" bIns="0" rtlCol="0" anchor="ctr"/>
           <a:lstStyle/>
           <a:p>
-            <a:pPr indent="0" marL="0">
+            <a:pPr marL="0" indent="0">
               <a:buNone/>
             </a:pPr>
             <a:r>
@@ -8601,7 +8626,7 @@
         <p:spPr>
           <a:xfrm>
             <a:off x="1325880" y="3139440"/>
-            <a:ext cx="9875520" cy="807720"/>
+            <a:ext cx="3391399" cy="807720"/>
           </a:xfrm>
           <a:prstGeom prst="rect">
             <a:avLst/>
@@ -8613,7 +8638,7 @@
           <a:bodyPr wrap="square" lIns="0" tIns="0" rIns="0" bIns="0" rtlCol="0" anchor="t"/>
           <a:lstStyle/>
           <a:p>
-            <a:pPr indent="0" marL="0">
+            <a:pPr marL="0" indent="0">
               <a:buNone/>
             </a:pPr>
             <a:r>
@@ -8650,6 +8675,13 @@
           </a:solidFill>
           <a:ln/>
         </p:spPr>
+        <p:txBody>
+          <a:bodyPr/>
+          <a:lstStyle/>
+          <a:p>
+            <a:endParaRPr lang="es-AR"/>
+          </a:p>
+        </p:txBody>
       </p:sp>
       <p:sp>
         <p:nvSpPr>
@@ -8672,7 +8704,7 @@
           <a:bodyPr wrap="square" lIns="0" tIns="0" rIns="0" bIns="0" rtlCol="0" anchor="ctr"/>
           <a:lstStyle/>
           <a:p>
-            <a:pPr algn="ctr" indent="0" marL="0">
+            <a:pPr marL="0" indent="0" algn="ctr">
               <a:buNone/>
             </a:pPr>
             <a:r>
@@ -8711,7 +8743,7 @@
           <a:bodyPr wrap="square" lIns="0" tIns="0" rIns="0" bIns="0" rtlCol="0" anchor="ctr"/>
           <a:lstStyle/>
           <a:p>
-            <a:pPr indent="0" marL="0">
+            <a:pPr marL="0" indent="0">
               <a:buNone/>
             </a:pPr>
             <a:r>
@@ -8738,7 +8770,7 @@
         <p:spPr>
           <a:xfrm>
             <a:off x="1325880" y="4312920"/>
-            <a:ext cx="9875520" cy="807720"/>
+            <a:ext cx="4297253" cy="807720"/>
           </a:xfrm>
           <a:prstGeom prst="rect">
             <a:avLst/>
@@ -8750,7 +8782,7 @@
           <a:bodyPr wrap="square" lIns="0" tIns="0" rIns="0" bIns="0" rtlCol="0" anchor="t"/>
           <a:lstStyle/>
           <a:p>
-            <a:pPr indent="0" marL="0">
+            <a:pPr marL="0" indent="0">
               <a:buNone/>
             </a:pPr>
             <a:r>
@@ -8789,6 +8821,13 @@
           </a:solidFill>
           <a:ln/>
         </p:spPr>
+        <p:txBody>
+          <a:bodyPr/>
+          <a:lstStyle/>
+          <a:p>
+            <a:endParaRPr lang="es-AR"/>
+          </a:p>
+        </p:txBody>
       </p:sp>
       <p:sp>
         <p:nvSpPr>
@@ -8811,7 +8850,7 @@
           <a:bodyPr wrap="square" lIns="0" tIns="0" rIns="0" bIns="0" rtlCol="0" anchor="ctr"/>
           <a:lstStyle/>
           <a:p>
-            <a:pPr indent="0" marL="0">
+            <a:pPr marL="0" indent="0">
               <a:buNone/>
             </a:pPr>
             <a:r>
@@ -8850,7 +8889,7 @@
           <a:bodyPr wrap="square" lIns="0" tIns="0" rIns="0" bIns="0" rtlCol="0" anchor="ctr"/>
           <a:lstStyle/>
           <a:p>
-            <a:pPr algn="l" indent="0" marL="0">
+            <a:pPr marL="0" indent="0" algn="l">
               <a:buNone/>
             </a:pPr>
             <a:r>
@@ -8889,7 +8928,7 @@
           <a:bodyPr wrap="square" lIns="0" tIns="0" rIns="0" bIns="0" rtlCol="0" anchor="ctr"/>
           <a:lstStyle/>
           <a:p>
-            <a:pPr algn="r" indent="0" marL="0">
+            <a:pPr marL="0" indent="0" algn="r">
               <a:buNone/>
             </a:pPr>
             <a:r>
@@ -8907,6 +8946,36 @@
           </a:p>
         </p:txBody>
       </p:sp>
+      <p:pic>
+        <p:nvPicPr>
+          <p:cNvPr id="22" name="Imagen 21">
+            <a:extLst>
+              <a:ext uri="{FF2B5EF4-FFF2-40B4-BE49-F238E27FC236}">
+                <a16:creationId xmlns:a16="http://schemas.microsoft.com/office/drawing/2014/main" id="{112F9C7D-2CF9-D496-0617-298C4F08D995}"/>
+              </a:ext>
+            </a:extLst>
+          </p:cNvPr>
+          <p:cNvPicPr>
+            <a:picLocks noChangeAspect="1"/>
+          </p:cNvPicPr>
+          <p:nvPr/>
+        </p:nvPicPr>
+        <p:blipFill>
+          <a:blip r:embed="rId3"/>
+          <a:stretch>
+            <a:fillRect/>
+          </a:stretch>
+        </p:blipFill>
+        <p:spPr>
+          <a:xfrm>
+            <a:off x="6275648" y="1330808"/>
+            <a:ext cx="5337232" cy="3554680"/>
+          </a:xfrm>
+          <a:prstGeom prst="rect">
+            <a:avLst/>
+          </a:prstGeom>
+        </p:spPr>
+      </p:pic>
     </p:spTree>
   </p:cSld>
   <p:clrMapOvr>
@@ -8923,6 +8992,7 @@
         <a:solidFill>
           <a:srgbClr val="FFFFFF"/>
         </a:solidFill>
+        <a:effectLst/>
       </p:bgPr>
     </p:bg>
     <p:spTree>
@@ -8960,11 +9030,11 @@
           <a:bodyPr wrap="square" lIns="0" tIns="0" rIns="0" bIns="0" rtlCol="0" anchor="ctr"/>
           <a:lstStyle/>
           <a:p>
-            <a:pPr algn="l" indent="0" marL="0">
-              <a:buNone/>
-            </a:pPr>
-            <a:r>
-              <a:rPr lang="en-US" sz="1300" b="1" spc="200" kern="0" dirty="0">
+            <a:pPr marL="0" indent="0" algn="l">
+              <a:buNone/>
+            </a:pPr>
+            <a:r>
+              <a:rPr lang="en-US" sz="1300" b="1" kern="0" spc="200" dirty="0">
                 <a:solidFill>
                   <a:srgbClr val="E8A33D"/>
                 </a:solidFill>
@@ -8999,7 +9069,7 @@
           <a:bodyPr wrap="square" lIns="0" tIns="0" rIns="0" bIns="0" rtlCol="0" anchor="ctr"/>
           <a:lstStyle/>
           <a:p>
-            <a:pPr algn="l" indent="0" marL="0">
+            <a:pPr marL="0" indent="0" algn="l">
               <a:buNone/>
             </a:pPr>
             <a:r>
@@ -9043,6 +9113,13 @@
             <a:prstDash val="solid"/>
           </a:ln>
         </p:spPr>
+        <p:txBody>
+          <a:bodyPr/>
+          <a:lstStyle/>
+          <a:p>
+            <a:endParaRPr lang="es-AR"/>
+          </a:p>
+        </p:txBody>
       </p:sp>
       <p:sp>
         <p:nvSpPr>
@@ -9065,7 +9142,7 @@
           <a:bodyPr wrap="square" lIns="0" tIns="0" rIns="0" bIns="0" rtlCol="0" anchor="t"/>
           <a:lstStyle/>
           <a:p>
-            <a:pPr indent="0" marL="0">
+            <a:pPr marL="0" indent="0">
               <a:lnSpc>
                 <a:spcPct val="112000"/>
               </a:lnSpc>
@@ -9085,7 +9162,7 @@
             <a:endParaRPr lang="en-US" sz="1350" dirty="0"/>
           </a:p>
           <a:p>
-            <a:pPr indent="0" marL="0">
+            <a:pPr marL="0" indent="0">
               <a:lnSpc>
                 <a:spcPct val="112000"/>
               </a:lnSpc>
@@ -9105,7 +9182,7 @@
             <a:endParaRPr lang="en-US" sz="1350" dirty="0"/>
           </a:p>
           <a:p>
-            <a:pPr indent="0" marL="0">
+            <a:pPr marL="0" indent="0">
               <a:lnSpc>
                 <a:spcPct val="112000"/>
               </a:lnSpc>
@@ -9125,7 +9202,7 @@
             <a:endParaRPr lang="en-US" sz="1350" dirty="0"/>
           </a:p>
           <a:p>
-            <a:pPr indent="0" marL="0">
+            <a:pPr marL="0" indent="0">
               <a:lnSpc>
                 <a:spcPct val="112000"/>
               </a:lnSpc>
@@ -9145,7 +9222,7 @@
             <a:endParaRPr lang="en-US" sz="1350" dirty="0"/>
           </a:p>
           <a:p>
-            <a:pPr indent="0" marL="0">
+            <a:pPr marL="0" indent="0">
               <a:lnSpc>
                 <a:spcPct val="112000"/>
               </a:lnSpc>
@@ -9154,7 +9231,7 @@
             <a:endParaRPr lang="en-US" sz="1350" dirty="0"/>
           </a:p>
           <a:p>
-            <a:pPr indent="0" marL="0">
+            <a:pPr marL="0" indent="0">
               <a:lnSpc>
                 <a:spcPct val="112000"/>
               </a:lnSpc>
@@ -9174,7 +9251,7 @@
             <a:endParaRPr lang="en-US" sz="1350" dirty="0"/>
           </a:p>
           <a:p>
-            <a:pPr indent="0" marL="0">
+            <a:pPr marL="0" indent="0">
               <a:lnSpc>
                 <a:spcPct val="112000"/>
               </a:lnSpc>
@@ -9194,7 +9271,7 @@
             <a:endParaRPr lang="en-US" sz="1350" dirty="0"/>
           </a:p>
           <a:p>
-            <a:pPr indent="0" marL="0">
+            <a:pPr marL="0" indent="0">
               <a:lnSpc>
                 <a:spcPct val="112000"/>
               </a:lnSpc>
@@ -9214,7 +9291,7 @@
             <a:endParaRPr lang="en-US" sz="1350" dirty="0"/>
           </a:p>
           <a:p>
-            <a:pPr indent="0" marL="0">
+            <a:pPr marL="0" indent="0">
               <a:lnSpc>
                 <a:spcPct val="112000"/>
               </a:lnSpc>
@@ -9234,7 +9311,7 @@
             <a:endParaRPr lang="en-US" sz="1350" dirty="0"/>
           </a:p>
           <a:p>
-            <a:pPr indent="0" marL="0">
+            <a:pPr marL="0" indent="0">
               <a:lnSpc>
                 <a:spcPct val="112000"/>
               </a:lnSpc>
@@ -9254,7 +9331,7 @@
             <a:endParaRPr lang="en-US" sz="1350" dirty="0"/>
           </a:p>
           <a:p>
-            <a:pPr indent="0" marL="0">
+            <a:pPr marL="0" indent="0">
               <a:lnSpc>
                 <a:spcPct val="112000"/>
               </a:lnSpc>
@@ -9296,6 +9373,13 @@
           </a:solidFill>
           <a:ln/>
         </p:spPr>
+        <p:txBody>
+          <a:bodyPr/>
+          <a:lstStyle/>
+          <a:p>
+            <a:endParaRPr lang="es-AR"/>
+          </a:p>
+        </p:txBody>
       </p:sp>
       <p:sp>
         <p:nvSpPr>
@@ -9318,7 +9402,7 @@
           <a:bodyPr wrap="square" lIns="0" tIns="0" rIns="0" bIns="0" rtlCol="0" anchor="ctr"/>
           <a:lstStyle/>
           <a:p>
-            <a:pPr indent="0" marL="0">
+            <a:pPr marL="0" indent="0">
               <a:buNone/>
             </a:pPr>
             <a:r>
@@ -9357,7 +9441,7 @@
           <a:bodyPr wrap="square" lIns="0" tIns="0" rIns="0" bIns="0" rtlCol="0" anchor="ctr"/>
           <a:lstStyle/>
           <a:p>
-            <a:pPr algn="l" indent="0" marL="0">
+            <a:pPr marL="0" indent="0" algn="l">
               <a:buNone/>
             </a:pPr>
             <a:r>
@@ -9396,7 +9480,7 @@
           <a:bodyPr wrap="square" lIns="0" tIns="0" rIns="0" bIns="0" rtlCol="0" anchor="ctr"/>
           <a:lstStyle/>
           <a:p>
-            <a:pPr algn="r" indent="0" marL="0">
+            <a:pPr marL="0" indent="0" algn="r">
               <a:buNone/>
             </a:pPr>
             <a:r>
@@ -9430,6 +9514,7 @@
         <a:solidFill>
           <a:srgbClr val="FFFFFF"/>
         </a:solidFill>
+        <a:effectLst/>
       </p:bgPr>
     </p:bg>
     <p:spTree>
@@ -9467,11 +9552,11 @@
           <a:bodyPr wrap="square" lIns="0" tIns="0" rIns="0" bIns="0" rtlCol="0" anchor="ctr"/>
           <a:lstStyle/>
           <a:p>
-            <a:pPr algn="l" indent="0" marL="0">
-              <a:buNone/>
-            </a:pPr>
-            <a:r>
-              <a:rPr lang="en-US" sz="1300" b="1" spc="200" kern="0" dirty="0">
+            <a:pPr marL="0" indent="0" algn="l">
+              <a:buNone/>
+            </a:pPr>
+            <a:r>
+              <a:rPr lang="en-US" sz="1300" b="1" kern="0" spc="200" dirty="0">
                 <a:solidFill>
                   <a:srgbClr val="E8A33D"/>
                 </a:solidFill>
@@ -9506,7 +9591,7 @@
           <a:bodyPr wrap="square" lIns="0" tIns="0" rIns="0" bIns="0" rtlCol="0" anchor="ctr"/>
           <a:lstStyle/>
           <a:p>
-            <a:pPr algn="l" indent="0" marL="0">
+            <a:pPr marL="0" indent="0" algn="l">
               <a:buNone/>
             </a:pPr>
             <a:r>
@@ -9545,6 +9630,13 @@
           </a:solidFill>
           <a:ln/>
         </p:spPr>
+        <p:txBody>
+          <a:bodyPr/>
+          <a:lstStyle/>
+          <a:p>
+            <a:endParaRPr lang="es-AR"/>
+          </a:p>
+        </p:txBody>
       </p:sp>
       <p:sp>
         <p:nvSpPr>
@@ -9567,7 +9659,7 @@
           <a:bodyPr wrap="square" lIns="0" tIns="0" rIns="0" bIns="0" rtlCol="0" anchor="ctr"/>
           <a:lstStyle/>
           <a:p>
-            <a:pPr algn="ctr" indent="0" marL="0">
+            <a:pPr marL="0" indent="0" algn="ctr">
               <a:buNone/>
             </a:pPr>
             <a:r>
@@ -9606,7 +9698,7 @@
           <a:bodyPr wrap="square" lIns="0" tIns="0" rIns="0" bIns="0" rtlCol="0" anchor="ctr"/>
           <a:lstStyle/>
           <a:p>
-            <a:pPr indent="0" marL="0">
+            <a:pPr marL="0" indent="0">
               <a:buNone/>
             </a:pPr>
             <a:r>
@@ -9645,7 +9737,7 @@
           <a:bodyPr wrap="square" lIns="0" tIns="0" rIns="0" bIns="0" rtlCol="0" anchor="ctr"/>
           <a:lstStyle/>
           <a:p>
-            <a:pPr algn="r" indent="0" marL="0">
+            <a:pPr marL="0" indent="0" algn="r">
               <a:buNone/>
             </a:pPr>
             <a:r>
@@ -9684,6 +9776,13 @@
           </a:solidFill>
           <a:ln/>
         </p:spPr>
+        <p:txBody>
+          <a:bodyPr/>
+          <a:lstStyle/>
+          <a:p>
+            <a:endParaRPr lang="es-AR"/>
+          </a:p>
+        </p:txBody>
       </p:sp>
       <p:sp>
         <p:nvSpPr>
@@ -9706,7 +9805,7 @@
           <a:bodyPr wrap="square" lIns="0" tIns="0" rIns="0" bIns="0" rtlCol="0" anchor="ctr"/>
           <a:lstStyle/>
           <a:p>
-            <a:pPr algn="ctr" indent="0" marL="0">
+            <a:pPr marL="0" indent="0" algn="ctr">
               <a:buNone/>
             </a:pPr>
             <a:r>
@@ -9745,7 +9844,7 @@
           <a:bodyPr wrap="square" lIns="0" tIns="0" rIns="0" bIns="0" rtlCol="0" anchor="ctr"/>
           <a:lstStyle/>
           <a:p>
-            <a:pPr indent="0" marL="0">
+            <a:pPr marL="0" indent="0">
               <a:buNone/>
             </a:pPr>
             <a:r>
@@ -9784,7 +9883,7 @@
           <a:bodyPr wrap="square" lIns="0" tIns="0" rIns="0" bIns="0" rtlCol="0" anchor="ctr"/>
           <a:lstStyle/>
           <a:p>
-            <a:pPr algn="r" indent="0" marL="0">
+            <a:pPr marL="0" indent="0" algn="r">
               <a:buNone/>
             </a:pPr>
             <a:r>
@@ -9823,6 +9922,13 @@
           </a:solidFill>
           <a:ln/>
         </p:spPr>
+        <p:txBody>
+          <a:bodyPr/>
+          <a:lstStyle/>
+          <a:p>
+            <a:endParaRPr lang="es-AR"/>
+          </a:p>
+        </p:txBody>
       </p:sp>
       <p:sp>
         <p:nvSpPr>
@@ -9845,7 +9951,7 @@
           <a:bodyPr wrap="square" lIns="0" tIns="0" rIns="0" bIns="0" rtlCol="0" anchor="ctr"/>
           <a:lstStyle/>
           <a:p>
-            <a:pPr algn="ctr" indent="0" marL="0">
+            <a:pPr marL="0" indent="0" algn="ctr">
               <a:buNone/>
             </a:pPr>
             <a:r>
@@ -9884,7 +9990,7 @@
           <a:bodyPr wrap="square" lIns="0" tIns="0" rIns="0" bIns="0" rtlCol="0" anchor="ctr"/>
           <a:lstStyle/>
           <a:p>
-            <a:pPr indent="0" marL="0">
+            <a:pPr marL="0" indent="0">
               <a:buNone/>
             </a:pPr>
             <a:r>
@@ -9923,7 +10029,7 @@
           <a:bodyPr wrap="square" lIns="0" tIns="0" rIns="0" bIns="0" rtlCol="0" anchor="ctr"/>
           <a:lstStyle/>
           <a:p>
-            <a:pPr algn="r" indent="0" marL="0">
+            <a:pPr marL="0" indent="0" algn="r">
               <a:buNone/>
             </a:pPr>
             <a:r>
@@ -9962,6 +10068,13 @@
           </a:solidFill>
           <a:ln/>
         </p:spPr>
+        <p:txBody>
+          <a:bodyPr/>
+          <a:lstStyle/>
+          <a:p>
+            <a:endParaRPr lang="es-AR"/>
+          </a:p>
+        </p:txBody>
       </p:sp>
       <p:sp>
         <p:nvSpPr>
@@ -9984,7 +10097,7 @@
           <a:bodyPr wrap="square" lIns="0" tIns="0" rIns="0" bIns="0" rtlCol="0" anchor="ctr"/>
           <a:lstStyle/>
           <a:p>
-            <a:pPr algn="ctr" indent="0" marL="0">
+            <a:pPr marL="0" indent="0" algn="ctr">
               <a:buNone/>
             </a:pPr>
             <a:r>
@@ -10023,7 +10136,7 @@
           <a:bodyPr wrap="square" lIns="0" tIns="0" rIns="0" bIns="0" rtlCol="0" anchor="ctr"/>
           <a:lstStyle/>
           <a:p>
-            <a:pPr indent="0" marL="0">
+            <a:pPr marL="0" indent="0">
               <a:buNone/>
             </a:pPr>
             <a:r>
@@ -10062,7 +10175,7 @@
           <a:bodyPr wrap="square" lIns="0" tIns="0" rIns="0" bIns="0" rtlCol="0" anchor="ctr"/>
           <a:lstStyle/>
           <a:p>
-            <a:pPr algn="r" indent="0" marL="0">
+            <a:pPr marL="0" indent="0" algn="r">
               <a:buNone/>
             </a:pPr>
             <a:r>
@@ -10101,6 +10214,13 @@
           </a:solidFill>
           <a:ln/>
         </p:spPr>
+        <p:txBody>
+          <a:bodyPr/>
+          <a:lstStyle/>
+          <a:p>
+            <a:endParaRPr lang="es-AR"/>
+          </a:p>
+        </p:txBody>
       </p:sp>
       <p:sp>
         <p:nvSpPr>
@@ -10123,7 +10243,7 @@
           <a:bodyPr wrap="square" lIns="0" tIns="0" rIns="0" bIns="0" rtlCol="0" anchor="ctr"/>
           <a:lstStyle/>
           <a:p>
-            <a:pPr algn="ctr" indent="0" marL="0">
+            <a:pPr marL="0" indent="0" algn="ctr">
               <a:buNone/>
             </a:pPr>
             <a:r>
@@ -10162,7 +10282,7 @@
           <a:bodyPr wrap="square" lIns="0" tIns="0" rIns="0" bIns="0" rtlCol="0" anchor="ctr"/>
           <a:lstStyle/>
           <a:p>
-            <a:pPr indent="0" marL="0">
+            <a:pPr marL="0" indent="0">
               <a:buNone/>
             </a:pPr>
             <a:r>
@@ -10201,7 +10321,7 @@
           <a:bodyPr wrap="square" lIns="0" tIns="0" rIns="0" bIns="0" rtlCol="0" anchor="ctr"/>
           <a:lstStyle/>
           <a:p>
-            <a:pPr algn="r" indent="0" marL="0">
+            <a:pPr marL="0" indent="0" algn="r">
               <a:buNone/>
             </a:pPr>
             <a:r>
@@ -10240,6 +10360,13 @@
           </a:solidFill>
           <a:ln/>
         </p:spPr>
+        <p:txBody>
+          <a:bodyPr/>
+          <a:lstStyle/>
+          <a:p>
+            <a:endParaRPr lang="es-AR"/>
+          </a:p>
+        </p:txBody>
       </p:sp>
       <p:sp>
         <p:nvSpPr>
@@ -10262,7 +10389,7 @@
           <a:bodyPr wrap="square" lIns="0" tIns="0" rIns="0" bIns="0" rtlCol="0" anchor="ctr"/>
           <a:lstStyle/>
           <a:p>
-            <a:pPr algn="ctr" indent="0" marL="0">
+            <a:pPr marL="0" indent="0" algn="ctr">
               <a:buNone/>
             </a:pPr>
             <a:r>
@@ -10301,7 +10428,7 @@
           <a:bodyPr wrap="square" lIns="0" tIns="0" rIns="0" bIns="0" rtlCol="0" anchor="ctr"/>
           <a:lstStyle/>
           <a:p>
-            <a:pPr indent="0" marL="0">
+            <a:pPr marL="0" indent="0">
               <a:buNone/>
             </a:pPr>
             <a:r>
@@ -10340,7 +10467,7 @@
           <a:bodyPr wrap="square" lIns="0" tIns="0" rIns="0" bIns="0" rtlCol="0" anchor="ctr"/>
           <a:lstStyle/>
           <a:p>
-            <a:pPr algn="r" indent="0" marL="0">
+            <a:pPr marL="0" indent="0" algn="r">
               <a:buNone/>
             </a:pPr>
             <a:r>
@@ -10379,6 +10506,13 @@
           </a:solidFill>
           <a:ln/>
         </p:spPr>
+        <p:txBody>
+          <a:bodyPr/>
+          <a:lstStyle/>
+          <a:p>
+            <a:endParaRPr lang="es-AR"/>
+          </a:p>
+        </p:txBody>
       </p:sp>
       <p:sp>
         <p:nvSpPr>
@@ -10401,7 +10535,7 @@
           <a:bodyPr wrap="square" lIns="0" tIns="0" rIns="0" bIns="0" rtlCol="0" anchor="ctr"/>
           <a:lstStyle/>
           <a:p>
-            <a:pPr algn="ctr" indent="0" marL="0">
+            <a:pPr marL="0" indent="0" algn="ctr">
               <a:buNone/>
             </a:pPr>
             <a:r>
@@ -10440,7 +10574,7 @@
           <a:bodyPr wrap="square" lIns="0" tIns="0" rIns="0" bIns="0" rtlCol="0" anchor="ctr"/>
           <a:lstStyle/>
           <a:p>
-            <a:pPr indent="0" marL="0">
+            <a:pPr marL="0" indent="0">
               <a:buNone/>
             </a:pPr>
             <a:r>
@@ -10479,7 +10613,7 @@
           <a:bodyPr wrap="square" lIns="0" tIns="0" rIns="0" bIns="0" rtlCol="0" anchor="ctr"/>
           <a:lstStyle/>
           <a:p>
-            <a:pPr algn="r" indent="0" marL="0">
+            <a:pPr marL="0" indent="0" algn="r">
               <a:buNone/>
             </a:pPr>
             <a:r>
@@ -10518,6 +10652,13 @@
           </a:solidFill>
           <a:ln/>
         </p:spPr>
+        <p:txBody>
+          <a:bodyPr/>
+          <a:lstStyle/>
+          <a:p>
+            <a:endParaRPr lang="es-AR"/>
+          </a:p>
+        </p:txBody>
       </p:sp>
       <p:sp>
         <p:nvSpPr>
@@ -10540,7 +10681,7 @@
           <a:bodyPr wrap="square" lIns="0" tIns="0" rIns="0" bIns="0" rtlCol="0" anchor="ctr"/>
           <a:lstStyle/>
           <a:p>
-            <a:pPr algn="ctr" indent="0" marL="0">
+            <a:pPr marL="0" indent="0" algn="ctr">
               <a:buNone/>
             </a:pPr>
             <a:r>
@@ -10579,7 +10720,7 @@
           <a:bodyPr wrap="square" lIns="0" tIns="0" rIns="0" bIns="0" rtlCol="0" anchor="ctr"/>
           <a:lstStyle/>
           <a:p>
-            <a:pPr indent="0" marL="0">
+            <a:pPr marL="0" indent="0">
               <a:buNone/>
             </a:pPr>
             <a:r>
@@ -10618,7 +10759,7 @@
           <a:bodyPr wrap="square" lIns="0" tIns="0" rIns="0" bIns="0" rtlCol="0" anchor="ctr"/>
           <a:lstStyle/>
           <a:p>
-            <a:pPr algn="r" indent="0" marL="0">
+            <a:pPr marL="0" indent="0" algn="r">
               <a:buNone/>
             </a:pPr>
             <a:r>
@@ -10657,6 +10798,13 @@
           </a:solidFill>
           <a:ln/>
         </p:spPr>
+        <p:txBody>
+          <a:bodyPr/>
+          <a:lstStyle/>
+          <a:p>
+            <a:endParaRPr lang="es-AR"/>
+          </a:p>
+        </p:txBody>
       </p:sp>
       <p:sp>
         <p:nvSpPr>
@@ -10679,7 +10827,7 @@
           <a:bodyPr wrap="square" lIns="0" tIns="0" rIns="0" bIns="0" rtlCol="0" anchor="ctr"/>
           <a:lstStyle/>
           <a:p>
-            <a:pPr algn="ctr" indent="0" marL="0">
+            <a:pPr marL="0" indent="0" algn="ctr">
               <a:buNone/>
             </a:pPr>
             <a:r>
@@ -10718,7 +10866,7 @@
           <a:bodyPr wrap="square" lIns="0" tIns="0" rIns="0" bIns="0" rtlCol="0" anchor="ctr"/>
           <a:lstStyle/>
           <a:p>
-            <a:pPr indent="0" marL="0">
+            <a:pPr marL="0" indent="0">
               <a:buNone/>
             </a:pPr>
             <a:r>
@@ -10757,7 +10905,7 @@
           <a:bodyPr wrap="square" lIns="0" tIns="0" rIns="0" bIns="0" rtlCol="0" anchor="ctr"/>
           <a:lstStyle/>
           <a:p>
-            <a:pPr algn="r" indent="0" marL="0">
+            <a:pPr marL="0" indent="0" algn="r">
               <a:buNone/>
             </a:pPr>
             <a:r>
@@ -10796,6 +10944,13 @@
           </a:solidFill>
           <a:ln/>
         </p:spPr>
+        <p:txBody>
+          <a:bodyPr/>
+          <a:lstStyle/>
+          <a:p>
+            <a:endParaRPr lang="es-AR"/>
+          </a:p>
+        </p:txBody>
       </p:sp>
       <p:sp>
         <p:nvSpPr>
@@ -10818,7 +10973,7 @@
           <a:bodyPr wrap="square" lIns="0" tIns="0" rIns="0" bIns="0" rtlCol="0" anchor="ctr"/>
           <a:lstStyle/>
           <a:p>
-            <a:pPr algn="ctr" indent="0" marL="0">
+            <a:pPr marL="0" indent="0" algn="ctr">
               <a:buNone/>
             </a:pPr>
             <a:r>
@@ -10857,7 +11012,7 @@
           <a:bodyPr wrap="square" lIns="0" tIns="0" rIns="0" bIns="0" rtlCol="0" anchor="ctr"/>
           <a:lstStyle/>
           <a:p>
-            <a:pPr indent="0" marL="0">
+            <a:pPr marL="0" indent="0">
               <a:buNone/>
             </a:pPr>
             <a:r>
@@ -10896,7 +11051,7 @@
           <a:bodyPr wrap="square" lIns="0" tIns="0" rIns="0" bIns="0" rtlCol="0" anchor="ctr"/>
           <a:lstStyle/>
           <a:p>
-            <a:pPr algn="r" indent="0" marL="0">
+            <a:pPr marL="0" indent="0" algn="r">
               <a:buNone/>
             </a:pPr>
             <a:r>
@@ -10935,6 +11090,13 @@
           </a:solidFill>
           <a:ln/>
         </p:spPr>
+        <p:txBody>
+          <a:bodyPr/>
+          <a:lstStyle/>
+          <a:p>
+            <a:endParaRPr lang="es-AR"/>
+          </a:p>
+        </p:txBody>
       </p:sp>
       <p:sp>
         <p:nvSpPr>
@@ -10957,7 +11119,7 @@
           <a:bodyPr wrap="square" lIns="0" tIns="0" rIns="0" bIns="0" rtlCol="0" anchor="ctr"/>
           <a:lstStyle/>
           <a:p>
-            <a:pPr algn="ctr" indent="0" marL="0">
+            <a:pPr marL="0" indent="0" algn="ctr">
               <a:buNone/>
             </a:pPr>
             <a:r>
@@ -10996,7 +11158,7 @@
           <a:bodyPr wrap="square" lIns="0" tIns="0" rIns="0" bIns="0" rtlCol="0" anchor="ctr"/>
           <a:lstStyle/>
           <a:p>
-            <a:pPr indent="0" marL="0">
+            <a:pPr marL="0" indent="0">
               <a:buNone/>
             </a:pPr>
             <a:r>
@@ -11035,7 +11197,7 @@
           <a:bodyPr wrap="square" lIns="0" tIns="0" rIns="0" bIns="0" rtlCol="0" anchor="ctr"/>
           <a:lstStyle/>
           <a:p>
-            <a:pPr algn="r" indent="0" marL="0">
+            <a:pPr marL="0" indent="0" algn="r">
               <a:buNone/>
             </a:pPr>
             <a:r>
@@ -11074,7 +11236,7 @@
           <a:bodyPr wrap="square" lIns="0" tIns="0" rIns="0" bIns="0" rtlCol="0" anchor="ctr"/>
           <a:lstStyle/>
           <a:p>
-            <a:pPr algn="l" indent="0" marL="0">
+            <a:pPr marL="0" indent="0" algn="l">
               <a:buNone/>
             </a:pPr>
             <a:r>
@@ -11113,7 +11275,7 @@
           <a:bodyPr wrap="square" lIns="0" tIns="0" rIns="0" bIns="0" rtlCol="0" anchor="ctr"/>
           <a:lstStyle/>
           <a:p>
-            <a:pPr algn="r" indent="0" marL="0">
+            <a:pPr marL="0" indent="0" algn="r">
               <a:buNone/>
             </a:pPr>
             <a:r>
@@ -11147,6 +11309,7 @@
         <a:solidFill>
           <a:srgbClr val="FFFFFF"/>
         </a:solidFill>
+        <a:effectLst/>
       </p:bgPr>
     </p:bg>
     <p:spTree>
@@ -11184,11 +11347,11 @@
           <a:bodyPr wrap="square" lIns="0" tIns="0" rIns="0" bIns="0" rtlCol="0" anchor="ctr"/>
           <a:lstStyle/>
           <a:p>
-            <a:pPr algn="l" indent="0" marL="0">
-              <a:buNone/>
-            </a:pPr>
-            <a:r>
-              <a:rPr lang="en-US" sz="1300" b="1" spc="200" kern="0" dirty="0">
+            <a:pPr marL="0" indent="0" algn="l">
+              <a:buNone/>
+            </a:pPr>
+            <a:r>
+              <a:rPr lang="en-US" sz="1300" b="1" kern="0" spc="200" dirty="0">
                 <a:solidFill>
                   <a:srgbClr val="E8A33D"/>
                 </a:solidFill>
@@ -11223,7 +11386,7 @@
           <a:bodyPr wrap="square" lIns="0" tIns="0" rIns="0" bIns="0" rtlCol="0" anchor="ctr"/>
           <a:lstStyle/>
           <a:p>
-            <a:pPr algn="l" indent="0" marL="0">
+            <a:pPr marL="0" indent="0" algn="l">
               <a:buNone/>
             </a:pPr>
             <a:r>
@@ -11267,6 +11430,13 @@
             <a:prstDash val="solid"/>
           </a:ln>
         </p:spPr>
+        <p:txBody>
+          <a:bodyPr/>
+          <a:lstStyle/>
+          <a:p>
+            <a:endParaRPr lang="es-AR"/>
+          </a:p>
+        </p:txBody>
       </p:sp>
       <p:sp>
         <p:nvSpPr>
@@ -11289,7 +11459,7 @@
           <a:bodyPr wrap="square" lIns="0" tIns="0" rIns="0" bIns="0" rtlCol="0" anchor="t"/>
           <a:lstStyle/>
           <a:p>
-            <a:pPr indent="0" marL="0">
+            <a:pPr marL="0" indent="0">
               <a:lnSpc>
                 <a:spcPct val="112000"/>
               </a:lnSpc>
@@ -11309,7 +11479,7 @@
             <a:endParaRPr lang="en-US" sz="1350" dirty="0"/>
           </a:p>
           <a:p>
-            <a:pPr indent="0" marL="0">
+            <a:pPr marL="0" indent="0">
               <a:lnSpc>
                 <a:spcPct val="112000"/>
               </a:lnSpc>
@@ -11329,7 +11499,7 @@
             <a:endParaRPr lang="en-US" sz="1350" dirty="0"/>
           </a:p>
           <a:p>
-            <a:pPr indent="0" marL="0">
+            <a:pPr marL="0" indent="0">
               <a:lnSpc>
                 <a:spcPct val="112000"/>
               </a:lnSpc>
@@ -11349,7 +11519,7 @@
             <a:endParaRPr lang="en-US" sz="1350" dirty="0"/>
           </a:p>
           <a:p>
-            <a:pPr indent="0" marL="0">
+            <a:pPr marL="0" indent="0">
               <a:lnSpc>
                 <a:spcPct val="112000"/>
               </a:lnSpc>
@@ -11358,7 +11528,7 @@
             <a:endParaRPr lang="en-US" sz="1350" dirty="0"/>
           </a:p>
           <a:p>
-            <a:pPr indent="0" marL="0">
+            <a:pPr marL="0" indent="0">
               <a:lnSpc>
                 <a:spcPct val="112000"/>
               </a:lnSpc>
@@ -11378,7 +11548,7 @@
             <a:endParaRPr lang="en-US" sz="1350" dirty="0"/>
           </a:p>
           <a:p>
-            <a:pPr indent="0" marL="0">
+            <a:pPr marL="0" indent="0">
               <a:lnSpc>
                 <a:spcPct val="112000"/>
               </a:lnSpc>
@@ -11398,7 +11568,7 @@
             <a:endParaRPr lang="en-US" sz="1350" dirty="0"/>
           </a:p>
           <a:p>
-            <a:pPr indent="0" marL="0">
+            <a:pPr marL="0" indent="0">
               <a:lnSpc>
                 <a:spcPct val="112000"/>
               </a:lnSpc>
@@ -11418,7 +11588,7 @@
             <a:endParaRPr lang="en-US" sz="1350" dirty="0"/>
           </a:p>
           <a:p>
-            <a:pPr indent="0" marL="0">
+            <a:pPr marL="0" indent="0">
               <a:lnSpc>
                 <a:spcPct val="112000"/>
               </a:lnSpc>
@@ -11438,7 +11608,7 @@
             <a:endParaRPr lang="en-US" sz="1350" dirty="0"/>
           </a:p>
           <a:p>
-            <a:pPr indent="0" marL="0">
+            <a:pPr marL="0" indent="0">
               <a:lnSpc>
                 <a:spcPct val="112000"/>
               </a:lnSpc>
@@ -11480,6 +11650,13 @@
           </a:solidFill>
           <a:ln/>
         </p:spPr>
+        <p:txBody>
+          <a:bodyPr/>
+          <a:lstStyle/>
+          <a:p>
+            <a:endParaRPr lang="es-AR"/>
+          </a:p>
+        </p:txBody>
       </p:sp>
       <p:sp>
         <p:nvSpPr>
@@ -11502,7 +11679,7 @@
           <a:bodyPr wrap="square" lIns="0" tIns="0" rIns="0" bIns="0" rtlCol="0" anchor="ctr"/>
           <a:lstStyle/>
           <a:p>
-            <a:pPr indent="0" marL="0">
+            <a:pPr marL="0" indent="0">
               <a:buNone/>
             </a:pPr>
             <a:r>
@@ -11541,7 +11718,7 @@
           <a:bodyPr wrap="square" lIns="0" tIns="0" rIns="0" bIns="0" rtlCol="0" anchor="ctr"/>
           <a:lstStyle/>
           <a:p>
-            <a:pPr algn="l" indent="0" marL="0">
+            <a:pPr marL="0" indent="0" algn="l">
               <a:buNone/>
             </a:pPr>
             <a:r>
@@ -11580,7 +11757,7 @@
           <a:bodyPr wrap="square" lIns="0" tIns="0" rIns="0" bIns="0" rtlCol="0" anchor="ctr"/>
           <a:lstStyle/>
           <a:p>
-            <a:pPr algn="r" indent="0" marL="0">
+            <a:pPr marL="0" indent="0" algn="r">
               <a:buNone/>
             </a:pPr>
             <a:r>
@@ -11614,6 +11791,7 @@
         <a:solidFill>
           <a:srgbClr val="FFFFFF"/>
         </a:solidFill>
+        <a:effectLst/>
       </p:bgPr>
     </p:bg>
     <p:spTree>
@@ -11651,11 +11829,11 @@
           <a:bodyPr wrap="square" lIns="0" tIns="0" rIns="0" bIns="0" rtlCol="0" anchor="ctr"/>
           <a:lstStyle/>
           <a:p>
-            <a:pPr algn="l" indent="0" marL="0">
-              <a:buNone/>
-            </a:pPr>
-            <a:r>
-              <a:rPr lang="en-US" sz="1300" b="1" spc="200" kern="0" dirty="0">
+            <a:pPr marL="0" indent="0" algn="l">
+              <a:buNone/>
+            </a:pPr>
+            <a:r>
+              <a:rPr lang="en-US" sz="1300" b="1" kern="0" spc="200" dirty="0">
                 <a:solidFill>
                   <a:srgbClr val="E8A33D"/>
                 </a:solidFill>
@@ -11690,7 +11868,7 @@
           <a:bodyPr wrap="square" lIns="0" tIns="0" rIns="0" bIns="0" rtlCol="0" anchor="ctr"/>
           <a:lstStyle/>
           <a:p>
-            <a:pPr algn="l" indent="0" marL="0">
+            <a:pPr marL="0" indent="0" algn="l">
               <a:buNone/>
             </a:pPr>
             <a:r>
@@ -11734,6 +11912,13 @@
             <a:prstDash val="solid"/>
           </a:ln>
         </p:spPr>
+        <p:txBody>
+          <a:bodyPr/>
+          <a:lstStyle/>
+          <a:p>
+            <a:endParaRPr lang="es-AR"/>
+          </a:p>
+        </p:txBody>
       </p:sp>
       <p:sp>
         <p:nvSpPr>
@@ -11756,7 +11941,7 @@
           <a:bodyPr wrap="square" lIns="0" tIns="0" rIns="0" bIns="0" rtlCol="0" anchor="t"/>
           <a:lstStyle/>
           <a:p>
-            <a:pPr indent="0" marL="0">
+            <a:pPr marL="0" indent="0">
               <a:lnSpc>
                 <a:spcPct val="112000"/>
               </a:lnSpc>
@@ -11776,7 +11961,7 @@
             <a:endParaRPr lang="en-US" sz="1350" dirty="0"/>
           </a:p>
           <a:p>
-            <a:pPr indent="0" marL="0">
+            <a:pPr marL="0" indent="0">
               <a:lnSpc>
                 <a:spcPct val="112000"/>
               </a:lnSpc>
@@ -11796,7 +11981,7 @@
             <a:endParaRPr lang="en-US" sz="1350" dirty="0"/>
           </a:p>
           <a:p>
-            <a:pPr indent="0" marL="0">
+            <a:pPr marL="0" indent="0">
               <a:lnSpc>
                 <a:spcPct val="112000"/>
               </a:lnSpc>
@@ -11816,7 +12001,7 @@
             <a:endParaRPr lang="en-US" sz="1350" dirty="0"/>
           </a:p>
           <a:p>
-            <a:pPr indent="0" marL="0">
+            <a:pPr marL="0" indent="0">
               <a:lnSpc>
                 <a:spcPct val="112000"/>
               </a:lnSpc>
@@ -11836,7 +12021,7 @@
             <a:endParaRPr lang="en-US" sz="1350" dirty="0"/>
           </a:p>
           <a:p>
-            <a:pPr indent="0" marL="0">
+            <a:pPr marL="0" indent="0">
               <a:lnSpc>
                 <a:spcPct val="112000"/>
               </a:lnSpc>
@@ -11856,7 +12041,7 @@
             <a:endParaRPr lang="en-US" sz="1350" dirty="0"/>
           </a:p>
           <a:p>
-            <a:pPr indent="0" marL="0">
+            <a:pPr marL="0" indent="0">
               <a:lnSpc>
                 <a:spcPct val="112000"/>
               </a:lnSpc>
@@ -11876,7 +12061,7 @@
             <a:endParaRPr lang="en-US" sz="1350" dirty="0"/>
           </a:p>
           <a:p>
-            <a:pPr indent="0" marL="0">
+            <a:pPr marL="0" indent="0">
               <a:lnSpc>
                 <a:spcPct val="112000"/>
               </a:lnSpc>
@@ -11896,7 +12081,7 @@
             <a:endParaRPr lang="en-US" sz="1350" dirty="0"/>
           </a:p>
           <a:p>
-            <a:pPr indent="0" marL="0">
+            <a:pPr marL="0" indent="0">
               <a:lnSpc>
                 <a:spcPct val="112000"/>
               </a:lnSpc>
@@ -11916,7 +12101,7 @@
             <a:endParaRPr lang="en-US" sz="1350" dirty="0"/>
           </a:p>
           <a:p>
-            <a:pPr indent="0" marL="0">
+            <a:pPr marL="0" indent="0">
               <a:lnSpc>
                 <a:spcPct val="112000"/>
               </a:lnSpc>
@@ -11936,7 +12121,7 @@
             <a:endParaRPr lang="en-US" sz="1350" dirty="0"/>
           </a:p>
           <a:p>
-            <a:pPr indent="0" marL="0">
+            <a:pPr marL="0" indent="0">
               <a:lnSpc>
                 <a:spcPct val="112000"/>
               </a:lnSpc>
@@ -11978,6 +12163,13 @@
           </a:solidFill>
           <a:ln/>
         </p:spPr>
+        <p:txBody>
+          <a:bodyPr/>
+          <a:lstStyle/>
+          <a:p>
+            <a:endParaRPr lang="es-AR"/>
+          </a:p>
+        </p:txBody>
       </p:sp>
       <p:sp>
         <p:nvSpPr>
@@ -12000,7 +12192,7 @@
           <a:bodyPr wrap="square" lIns="0" tIns="0" rIns="0" bIns="0" rtlCol="0" anchor="ctr"/>
           <a:lstStyle/>
           <a:p>
-            <a:pPr indent="0" marL="0">
+            <a:pPr marL="0" indent="0">
               <a:buNone/>
             </a:pPr>
             <a:r>
@@ -12039,7 +12231,7 @@
           <a:bodyPr wrap="square" lIns="0" tIns="0" rIns="0" bIns="0" rtlCol="0" anchor="ctr"/>
           <a:lstStyle/>
           <a:p>
-            <a:pPr algn="l" indent="0" marL="0">
+            <a:pPr marL="0" indent="0" algn="l">
               <a:buNone/>
             </a:pPr>
             <a:r>
@@ -12078,7 +12270,7 @@
           <a:bodyPr wrap="square" lIns="0" tIns="0" rIns="0" bIns="0" rtlCol="0" anchor="ctr"/>
           <a:lstStyle/>
           <a:p>
-            <a:pPr algn="r" indent="0" marL="0">
+            <a:pPr marL="0" indent="0" algn="r">
               <a:buNone/>
             </a:pPr>
             <a:r>
@@ -12112,6 +12304,7 @@
         <a:solidFill>
           <a:srgbClr val="FFFFFF"/>
         </a:solidFill>
+        <a:effectLst/>
       </p:bgPr>
     </p:bg>
     <p:spTree>
@@ -12149,11 +12342,11 @@
           <a:bodyPr wrap="square" lIns="0" tIns="0" rIns="0" bIns="0" rtlCol="0" anchor="ctr"/>
           <a:lstStyle/>
           <a:p>
-            <a:pPr algn="l" indent="0" marL="0">
-              <a:buNone/>
-            </a:pPr>
-            <a:r>
-              <a:rPr lang="en-US" sz="1300" b="1" spc="200" kern="0" dirty="0">
+            <a:pPr marL="0" indent="0" algn="l">
+              <a:buNone/>
+            </a:pPr>
+            <a:r>
+              <a:rPr lang="en-US" sz="1300" b="1" kern="0" spc="200" dirty="0">
                 <a:solidFill>
                   <a:srgbClr val="E8A33D"/>
                 </a:solidFill>
@@ -12188,7 +12381,7 @@
           <a:bodyPr wrap="square" lIns="0" tIns="0" rIns="0" bIns="0" rtlCol="0" anchor="ctr"/>
           <a:lstStyle/>
           <a:p>
-            <a:pPr algn="l" indent="0" marL="0">
+            <a:pPr marL="0" indent="0" algn="l">
               <a:buNone/>
             </a:pPr>
             <a:r>
@@ -12232,6 +12425,13 @@
             <a:prstDash val="solid"/>
           </a:ln>
         </p:spPr>
+        <p:txBody>
+          <a:bodyPr/>
+          <a:lstStyle/>
+          <a:p>
+            <a:endParaRPr lang="es-AR"/>
+          </a:p>
+        </p:txBody>
       </p:sp>
       <p:sp>
         <p:nvSpPr>
@@ -12254,7 +12454,7 @@
           <a:bodyPr wrap="square" lIns="0" tIns="0" rIns="0" bIns="0" rtlCol="0" anchor="t"/>
           <a:lstStyle/>
           <a:p>
-            <a:pPr indent="0" marL="0">
+            <a:pPr marL="0" indent="0">
               <a:lnSpc>
                 <a:spcPct val="112000"/>
               </a:lnSpc>
@@ -12274,7 +12474,7 @@
             <a:endParaRPr lang="en-US" sz="1350" dirty="0"/>
           </a:p>
           <a:p>
-            <a:pPr indent="0" marL="0">
+            <a:pPr marL="0" indent="0">
               <a:lnSpc>
                 <a:spcPct val="112000"/>
               </a:lnSpc>
@@ -12294,7 +12494,7 @@
             <a:endParaRPr lang="en-US" sz="1350" dirty="0"/>
           </a:p>
           <a:p>
-            <a:pPr indent="0" marL="0">
+            <a:pPr marL="0" indent="0">
               <a:lnSpc>
                 <a:spcPct val="112000"/>
               </a:lnSpc>
@@ -12314,7 +12514,7 @@
             <a:endParaRPr lang="en-US" sz="1350" dirty="0"/>
           </a:p>
           <a:p>
-            <a:pPr indent="0" marL="0">
+            <a:pPr marL="0" indent="0">
               <a:lnSpc>
                 <a:spcPct val="112000"/>
               </a:lnSpc>
@@ -12323,7 +12523,7 @@
             <a:endParaRPr lang="en-US" sz="1350" dirty="0"/>
           </a:p>
           <a:p>
-            <a:pPr indent="0" marL="0">
+            <a:pPr marL="0" indent="0">
               <a:lnSpc>
                 <a:spcPct val="112000"/>
               </a:lnSpc>
@@ -12343,7 +12543,7 @@
             <a:endParaRPr lang="en-US" sz="1350" dirty="0"/>
           </a:p>
           <a:p>
-            <a:pPr indent="0" marL="0">
+            <a:pPr marL="0" indent="0">
               <a:lnSpc>
                 <a:spcPct val="112000"/>
               </a:lnSpc>
@@ -12363,7 +12563,7 @@
             <a:endParaRPr lang="en-US" sz="1350" dirty="0"/>
           </a:p>
           <a:p>
-            <a:pPr indent="0" marL="0">
+            <a:pPr marL="0" indent="0">
               <a:lnSpc>
                 <a:spcPct val="112000"/>
               </a:lnSpc>
@@ -12383,7 +12583,7 @@
             <a:endParaRPr lang="en-US" sz="1350" dirty="0"/>
           </a:p>
           <a:p>
-            <a:pPr indent="0" marL="0">
+            <a:pPr marL="0" indent="0">
               <a:lnSpc>
                 <a:spcPct val="112000"/>
               </a:lnSpc>
@@ -12403,7 +12603,7 @@
             <a:endParaRPr lang="en-US" sz="1350" dirty="0"/>
           </a:p>
           <a:p>
-            <a:pPr indent="0" marL="0">
+            <a:pPr marL="0" indent="0">
               <a:lnSpc>
                 <a:spcPct val="112000"/>
               </a:lnSpc>
@@ -12423,7 +12623,7 @@
             <a:endParaRPr lang="en-US" sz="1350" dirty="0"/>
           </a:p>
           <a:p>
-            <a:pPr indent="0" marL="0">
+            <a:pPr marL="0" indent="0">
               <a:lnSpc>
                 <a:spcPct val="112000"/>
               </a:lnSpc>
@@ -12443,7 +12643,7 @@
             <a:endParaRPr lang="en-US" sz="1350" dirty="0"/>
           </a:p>
           <a:p>
-            <a:pPr indent="0" marL="0">
+            <a:pPr marL="0" indent="0">
               <a:lnSpc>
                 <a:spcPct val="112000"/>
               </a:lnSpc>
@@ -12463,7 +12663,7 @@
             <a:endParaRPr lang="en-US" sz="1350" dirty="0"/>
           </a:p>
           <a:p>
-            <a:pPr indent="0" marL="0">
+            <a:pPr marL="0" indent="0">
               <a:lnSpc>
                 <a:spcPct val="112000"/>
               </a:lnSpc>
@@ -12483,7 +12683,7 @@
             <a:endParaRPr lang="en-US" sz="1350" dirty="0"/>
           </a:p>
           <a:p>
-            <a:pPr indent="0" marL="0">
+            <a:pPr marL="0" indent="0">
               <a:lnSpc>
                 <a:spcPct val="112000"/>
               </a:lnSpc>
@@ -12503,7 +12703,7 @@
             <a:endParaRPr lang="en-US" sz="1350" dirty="0"/>
           </a:p>
           <a:p>
-            <a:pPr indent="0" marL="0">
+            <a:pPr marL="0" indent="0">
               <a:lnSpc>
                 <a:spcPct val="112000"/>
               </a:lnSpc>
@@ -12523,7 +12723,7 @@
             <a:endParaRPr lang="en-US" sz="1350" dirty="0"/>
           </a:p>
           <a:p>
-            <a:pPr indent="0" marL="0">
+            <a:pPr marL="0" indent="0">
               <a:lnSpc>
                 <a:spcPct val="112000"/>
               </a:lnSpc>
@@ -12565,6 +12765,13 @@
           </a:solidFill>
           <a:ln/>
         </p:spPr>
+        <p:txBody>
+          <a:bodyPr/>
+          <a:lstStyle/>
+          <a:p>
+            <a:endParaRPr lang="es-AR"/>
+          </a:p>
+        </p:txBody>
       </p:sp>
       <p:sp>
         <p:nvSpPr>
@@ -12587,7 +12794,7 @@
           <a:bodyPr wrap="square" lIns="0" tIns="0" rIns="0" bIns="0" rtlCol="0" anchor="ctr"/>
           <a:lstStyle/>
           <a:p>
-            <a:pPr indent="0" marL="0">
+            <a:pPr marL="0" indent="0">
               <a:buNone/>
             </a:pPr>
             <a:r>
@@ -12626,7 +12833,7 @@
           <a:bodyPr wrap="square" lIns="0" tIns="0" rIns="0" bIns="0" rtlCol="0" anchor="ctr"/>
           <a:lstStyle/>
           <a:p>
-            <a:pPr algn="l" indent="0" marL="0">
+            <a:pPr marL="0" indent="0" algn="l">
               <a:buNone/>
             </a:pPr>
             <a:r>
@@ -12665,7 +12872,7 @@
           <a:bodyPr wrap="square" lIns="0" tIns="0" rIns="0" bIns="0" rtlCol="0" anchor="ctr"/>
           <a:lstStyle/>
           <a:p>
-            <a:pPr algn="r" indent="0" marL="0">
+            <a:pPr marL="0" indent="0" algn="r">
               <a:buNone/>
             </a:pPr>
             <a:r>
@@ -12699,6 +12906,7 @@
         <a:solidFill>
           <a:srgbClr val="FFFFFF"/>
         </a:solidFill>
+        <a:effectLst/>
       </p:bgPr>
     </p:bg>
     <p:spTree>
@@ -12736,11 +12944,11 @@
           <a:bodyPr wrap="square" lIns="0" tIns="0" rIns="0" bIns="0" rtlCol="0" anchor="ctr"/>
           <a:lstStyle/>
           <a:p>
-            <a:pPr algn="l" indent="0" marL="0">
-              <a:buNone/>
-            </a:pPr>
-            <a:r>
-              <a:rPr lang="en-US" sz="1300" b="1" spc="200" kern="0" dirty="0">
+            <a:pPr marL="0" indent="0" algn="l">
+              <a:buNone/>
+            </a:pPr>
+            <a:r>
+              <a:rPr lang="en-US" sz="1300" b="1" kern="0" spc="200" dirty="0">
                 <a:solidFill>
                   <a:srgbClr val="E8A33D"/>
                 </a:solidFill>
@@ -12775,7 +12983,7 @@
           <a:bodyPr wrap="square" lIns="0" tIns="0" rIns="0" bIns="0" rtlCol="0" anchor="ctr"/>
           <a:lstStyle/>
           <a:p>
-            <a:pPr algn="l" indent="0" marL="0">
+            <a:pPr marL="0" indent="0" algn="l">
               <a:buNone/>
             </a:pPr>
             <a:r>
@@ -12819,6 +13027,13 @@
             <a:prstDash val="solid"/>
           </a:ln>
         </p:spPr>
+        <p:txBody>
+          <a:bodyPr/>
+          <a:lstStyle/>
+          <a:p>
+            <a:endParaRPr lang="es-AR"/>
+          </a:p>
+        </p:txBody>
       </p:sp>
       <p:sp>
         <p:nvSpPr>
@@ -12841,7 +13056,7 @@
           <a:bodyPr wrap="square" lIns="0" tIns="0" rIns="0" bIns="0" rtlCol="0" anchor="t"/>
           <a:lstStyle/>
           <a:p>
-            <a:pPr indent="0" marL="0">
+            <a:pPr marL="0" indent="0">
               <a:lnSpc>
                 <a:spcPct val="112000"/>
               </a:lnSpc>
@@ -12861,7 +13076,7 @@
             <a:endParaRPr lang="en-US" sz="1350" dirty="0"/>
           </a:p>
           <a:p>
-            <a:pPr indent="0" marL="0">
+            <a:pPr marL="0" indent="0">
               <a:lnSpc>
                 <a:spcPct val="112000"/>
               </a:lnSpc>
@@ -12881,7 +13096,7 @@
             <a:endParaRPr lang="en-US" sz="1350" dirty="0"/>
           </a:p>
           <a:p>
-            <a:pPr indent="0" marL="0">
+            <a:pPr marL="0" indent="0">
               <a:lnSpc>
                 <a:spcPct val="112000"/>
               </a:lnSpc>
@@ -12901,7 +13116,7 @@
             <a:endParaRPr lang="en-US" sz="1350" dirty="0"/>
           </a:p>
           <a:p>
-            <a:pPr indent="0" marL="0">
+            <a:pPr marL="0" indent="0">
               <a:lnSpc>
                 <a:spcPct val="112000"/>
               </a:lnSpc>
@@ -12921,7 +13136,7 @@
             <a:endParaRPr lang="en-US" sz="1350" dirty="0"/>
           </a:p>
           <a:p>
-            <a:pPr indent="0" marL="0">
+            <a:pPr marL="0" indent="0">
               <a:lnSpc>
                 <a:spcPct val="112000"/>
               </a:lnSpc>
@@ -12941,7 +13156,7 @@
             <a:endParaRPr lang="en-US" sz="1350" dirty="0"/>
           </a:p>
           <a:p>
-            <a:pPr indent="0" marL="0">
+            <a:pPr marL="0" indent="0">
               <a:lnSpc>
                 <a:spcPct val="112000"/>
               </a:lnSpc>
@@ -12961,7 +13176,7 @@
             <a:endParaRPr lang="en-US" sz="1350" dirty="0"/>
           </a:p>
           <a:p>
-            <a:pPr indent="0" marL="0">
+            <a:pPr marL="0" indent="0">
               <a:lnSpc>
                 <a:spcPct val="112000"/>
               </a:lnSpc>
@@ -12981,7 +13196,7 @@
             <a:endParaRPr lang="en-US" sz="1350" dirty="0"/>
           </a:p>
           <a:p>
-            <a:pPr indent="0" marL="0">
+            <a:pPr marL="0" indent="0">
               <a:lnSpc>
                 <a:spcPct val="112000"/>
               </a:lnSpc>
@@ -13023,6 +13238,13 @@
           </a:solidFill>
           <a:ln/>
         </p:spPr>
+        <p:txBody>
+          <a:bodyPr/>
+          <a:lstStyle/>
+          <a:p>
+            <a:endParaRPr lang="es-AR"/>
+          </a:p>
+        </p:txBody>
       </p:sp>
       <p:sp>
         <p:nvSpPr>
@@ -13045,7 +13267,7 @@
           <a:bodyPr wrap="square" lIns="0" tIns="0" rIns="0" bIns="0" rtlCol="0" anchor="ctr"/>
           <a:lstStyle/>
           <a:p>
-            <a:pPr indent="0" marL="0">
+            <a:pPr marL="0" indent="0">
               <a:buNone/>
             </a:pPr>
             <a:r>
@@ -13084,7 +13306,7 @@
           <a:bodyPr wrap="square" lIns="0" tIns="0" rIns="0" bIns="0" rtlCol="0" anchor="ctr"/>
           <a:lstStyle/>
           <a:p>
-            <a:pPr algn="l" indent="0" marL="0">
+            <a:pPr marL="0" indent="0" algn="l">
               <a:buNone/>
             </a:pPr>
             <a:r>
@@ -13123,7 +13345,7 @@
           <a:bodyPr wrap="square" lIns="0" tIns="0" rIns="0" bIns="0" rtlCol="0" anchor="ctr"/>
           <a:lstStyle/>
           <a:p>
-            <a:pPr algn="r" indent="0" marL="0">
+            <a:pPr marL="0" indent="0" algn="r">
               <a:buNone/>
             </a:pPr>
             <a:r>
@@ -13157,6 +13379,7 @@
         <a:solidFill>
           <a:srgbClr val="FFFFFF"/>
         </a:solidFill>
+        <a:effectLst/>
       </p:bgPr>
     </p:bg>
     <p:spTree>
@@ -13194,11 +13417,11 @@
           <a:bodyPr wrap="square" lIns="0" tIns="0" rIns="0" bIns="0" rtlCol="0" anchor="ctr"/>
           <a:lstStyle/>
           <a:p>
-            <a:pPr algn="l" indent="0" marL="0">
-              <a:buNone/>
-            </a:pPr>
-            <a:r>
-              <a:rPr lang="en-US" sz="1300" b="1" spc="200" kern="0" dirty="0">
+            <a:pPr marL="0" indent="0" algn="l">
+              <a:buNone/>
+            </a:pPr>
+            <a:r>
+              <a:rPr lang="en-US" sz="1300" b="1" kern="0" spc="200" dirty="0">
                 <a:solidFill>
                   <a:srgbClr val="E8A33D"/>
                 </a:solidFill>
@@ -13233,7 +13456,7 @@
           <a:bodyPr wrap="square" lIns="0" tIns="0" rIns="0" bIns="0" rtlCol="0" anchor="ctr"/>
           <a:lstStyle/>
           <a:p>
-            <a:pPr algn="l" indent="0" marL="0">
+            <a:pPr marL="0" indent="0" algn="l">
               <a:buNone/>
             </a:pPr>
             <a:r>
@@ -13277,6 +13500,13 @@
             <a:prstDash val="solid"/>
           </a:ln>
         </p:spPr>
+        <p:txBody>
+          <a:bodyPr/>
+          <a:lstStyle/>
+          <a:p>
+            <a:endParaRPr lang="es-AR"/>
+          </a:p>
+        </p:txBody>
       </p:sp>
       <p:sp>
         <p:nvSpPr>
@@ -13299,7 +13529,7 @@
           <a:bodyPr wrap="square" lIns="0" tIns="0" rIns="0" bIns="0" rtlCol="0" anchor="t"/>
           <a:lstStyle/>
           <a:p>
-            <a:pPr indent="0" marL="0">
+            <a:pPr marL="0" indent="0">
               <a:lnSpc>
                 <a:spcPct val="112000"/>
               </a:lnSpc>
@@ -13319,7 +13549,7 @@
             <a:endParaRPr lang="en-US" sz="1350" dirty="0"/>
           </a:p>
           <a:p>
-            <a:pPr indent="0" marL="0">
+            <a:pPr marL="0" indent="0">
               <a:lnSpc>
                 <a:spcPct val="112000"/>
               </a:lnSpc>
@@ -13339,7 +13569,7 @@
             <a:endParaRPr lang="en-US" sz="1350" dirty="0"/>
           </a:p>
           <a:p>
-            <a:pPr indent="0" marL="0">
+            <a:pPr marL="0" indent="0">
               <a:lnSpc>
                 <a:spcPct val="112000"/>
               </a:lnSpc>
@@ -13359,7 +13589,7 @@
             <a:endParaRPr lang="en-US" sz="1350" dirty="0"/>
           </a:p>
           <a:p>
-            <a:pPr indent="0" marL="0">
+            <a:pPr marL="0" indent="0">
               <a:lnSpc>
                 <a:spcPct val="112000"/>
               </a:lnSpc>
@@ -13379,7 +13609,7 @@
             <a:endParaRPr lang="en-US" sz="1350" dirty="0"/>
           </a:p>
           <a:p>
-            <a:pPr indent="0" marL="0">
+            <a:pPr marL="0" indent="0">
               <a:lnSpc>
                 <a:spcPct val="112000"/>
               </a:lnSpc>
@@ -13399,7 +13629,7 @@
             <a:endParaRPr lang="en-US" sz="1350" dirty="0"/>
           </a:p>
           <a:p>
-            <a:pPr indent="0" marL="0">
+            <a:pPr marL="0" indent="0">
               <a:lnSpc>
                 <a:spcPct val="112000"/>
               </a:lnSpc>
@@ -13419,7 +13649,7 @@
             <a:endParaRPr lang="en-US" sz="1350" dirty="0"/>
           </a:p>
           <a:p>
-            <a:pPr indent="0" marL="0">
+            <a:pPr marL="0" indent="0">
               <a:lnSpc>
                 <a:spcPct val="112000"/>
               </a:lnSpc>
@@ -13439,7 +13669,7 @@
             <a:endParaRPr lang="en-US" sz="1350" dirty="0"/>
           </a:p>
           <a:p>
-            <a:pPr indent="0" marL="0">
+            <a:pPr marL="0" indent="0">
               <a:lnSpc>
                 <a:spcPct val="112000"/>
               </a:lnSpc>
@@ -13459,7 +13689,7 @@
             <a:endParaRPr lang="en-US" sz="1350" dirty="0"/>
           </a:p>
           <a:p>
-            <a:pPr indent="0" marL="0">
+            <a:pPr marL="0" indent="0">
               <a:lnSpc>
                 <a:spcPct val="112000"/>
               </a:lnSpc>
@@ -13479,7 +13709,7 @@
             <a:endParaRPr lang="en-US" sz="1350" dirty="0"/>
           </a:p>
           <a:p>
-            <a:pPr indent="0" marL="0">
+            <a:pPr marL="0" indent="0">
               <a:lnSpc>
                 <a:spcPct val="112000"/>
               </a:lnSpc>
@@ -13499,7 +13729,7 @@
             <a:endParaRPr lang="en-US" sz="1350" dirty="0"/>
           </a:p>
           <a:p>
-            <a:pPr indent="0" marL="0">
+            <a:pPr marL="0" indent="0">
               <a:lnSpc>
                 <a:spcPct val="112000"/>
               </a:lnSpc>
@@ -13519,7 +13749,7 @@
             <a:endParaRPr lang="en-US" sz="1350" dirty="0"/>
           </a:p>
           <a:p>
-            <a:pPr indent="0" marL="0">
+            <a:pPr marL="0" indent="0">
               <a:lnSpc>
                 <a:spcPct val="112000"/>
               </a:lnSpc>
@@ -13539,7 +13769,7 @@
             <a:endParaRPr lang="en-US" sz="1350" dirty="0"/>
           </a:p>
           <a:p>
-            <a:pPr indent="0" marL="0">
+            <a:pPr marL="0" indent="0">
               <a:lnSpc>
                 <a:spcPct val="112000"/>
               </a:lnSpc>
@@ -13559,7 +13789,7 @@
             <a:endParaRPr lang="en-US" sz="1350" dirty="0"/>
           </a:p>
           <a:p>
-            <a:pPr indent="0" marL="0">
+            <a:pPr marL="0" indent="0">
               <a:lnSpc>
                 <a:spcPct val="112000"/>
               </a:lnSpc>
@@ -13601,6 +13831,13 @@
           </a:solidFill>
           <a:ln/>
         </p:spPr>
+        <p:txBody>
+          <a:bodyPr/>
+          <a:lstStyle/>
+          <a:p>
+            <a:endParaRPr lang="es-AR"/>
+          </a:p>
+        </p:txBody>
       </p:sp>
       <p:sp>
         <p:nvSpPr>
@@ -13623,7 +13860,7 @@
           <a:bodyPr wrap="square" lIns="0" tIns="0" rIns="0" bIns="0" rtlCol="0" anchor="ctr"/>
           <a:lstStyle/>
           <a:p>
-            <a:pPr indent="0" marL="0">
+            <a:pPr marL="0" indent="0">
               <a:buNone/>
             </a:pPr>
             <a:r>
@@ -13662,7 +13899,7 @@
           <a:bodyPr wrap="square" lIns="0" tIns="0" rIns="0" bIns="0" rtlCol="0" anchor="ctr"/>
           <a:lstStyle/>
           <a:p>
-            <a:pPr algn="l" indent="0" marL="0">
+            <a:pPr marL="0" indent="0" algn="l">
               <a:buNone/>
             </a:pPr>
             <a:r>
@@ -13701,7 +13938,7 @@
           <a:bodyPr wrap="square" lIns="0" tIns="0" rIns="0" bIns="0" rtlCol="0" anchor="ctr"/>
           <a:lstStyle/>
           <a:p>
-            <a:pPr algn="r" indent="0" marL="0">
+            <a:pPr marL="0" indent="0" algn="r">
               <a:buNone/>
             </a:pPr>
             <a:r>
@@ -13735,6 +13972,7 @@
         <a:solidFill>
           <a:srgbClr val="FFFFFF"/>
         </a:solidFill>
+        <a:effectLst/>
       </p:bgPr>
     </p:bg>
     <p:spTree>
@@ -13772,11 +14010,11 @@
           <a:bodyPr wrap="square" lIns="0" tIns="0" rIns="0" bIns="0" rtlCol="0" anchor="ctr"/>
           <a:lstStyle/>
           <a:p>
-            <a:pPr algn="l" indent="0" marL="0">
-              <a:buNone/>
-            </a:pPr>
-            <a:r>
-              <a:rPr lang="en-US" sz="1300" b="1" spc="200" kern="0" dirty="0">
+            <a:pPr marL="0" indent="0" algn="l">
+              <a:buNone/>
+            </a:pPr>
+            <a:r>
+              <a:rPr lang="en-US" sz="1300" b="1" kern="0" spc="200" dirty="0">
                 <a:solidFill>
                   <a:srgbClr val="E8A33D"/>
                 </a:solidFill>
@@ -13811,7 +14049,7 @@
           <a:bodyPr wrap="square" lIns="0" tIns="0" rIns="0" bIns="0" rtlCol="0" anchor="ctr"/>
           <a:lstStyle/>
           <a:p>
-            <a:pPr algn="l" indent="0" marL="0">
+            <a:pPr marL="0" indent="0" algn="l">
               <a:buNone/>
             </a:pPr>
             <a:r>
@@ -13855,6 +14093,13 @@
             <a:prstDash val="solid"/>
           </a:ln>
         </p:spPr>
+        <p:txBody>
+          <a:bodyPr/>
+          <a:lstStyle/>
+          <a:p>
+            <a:endParaRPr lang="es-AR"/>
+          </a:p>
+        </p:txBody>
       </p:sp>
       <p:sp>
         <p:nvSpPr>
@@ -13877,7 +14122,7 @@
           <a:bodyPr wrap="square" lIns="0" tIns="0" rIns="0" bIns="0" rtlCol="0" anchor="t"/>
           <a:lstStyle/>
           <a:p>
-            <a:pPr indent="0" marL="0">
+            <a:pPr marL="0" indent="0">
               <a:lnSpc>
                 <a:spcPct val="112000"/>
               </a:lnSpc>
@@ -13897,7 +14142,7 @@
             <a:endParaRPr lang="en-US" sz="1350" dirty="0"/>
           </a:p>
           <a:p>
-            <a:pPr indent="0" marL="0">
+            <a:pPr marL="0" indent="0">
               <a:lnSpc>
                 <a:spcPct val="112000"/>
               </a:lnSpc>
@@ -13906,7 +14151,7 @@
             <a:endParaRPr lang="en-US" sz="1350" dirty="0"/>
           </a:p>
           <a:p>
-            <a:pPr indent="0" marL="0">
+            <a:pPr marL="0" indent="0">
               <a:lnSpc>
                 <a:spcPct val="112000"/>
               </a:lnSpc>
@@ -13926,7 +14171,7 @@
             <a:endParaRPr lang="en-US" sz="1350" dirty="0"/>
           </a:p>
           <a:p>
-            <a:pPr indent="0" marL="0">
+            <a:pPr marL="0" indent="0">
               <a:lnSpc>
                 <a:spcPct val="112000"/>
               </a:lnSpc>
@@ -13935,7 +14180,7 @@
             <a:endParaRPr lang="en-US" sz="1350" dirty="0"/>
           </a:p>
           <a:p>
-            <a:pPr indent="0" marL="0">
+            <a:pPr marL="0" indent="0">
               <a:lnSpc>
                 <a:spcPct val="112000"/>
               </a:lnSpc>
@@ -13955,7 +14200,7 @@
             <a:endParaRPr lang="en-US" sz="1350" dirty="0"/>
           </a:p>
           <a:p>
-            <a:pPr indent="0" marL="0">
+            <a:pPr marL="0" indent="0">
               <a:lnSpc>
                 <a:spcPct val="112000"/>
               </a:lnSpc>
@@ -13975,7 +14220,7 @@
             <a:endParaRPr lang="en-US" sz="1350" dirty="0"/>
           </a:p>
           <a:p>
-            <a:pPr indent="0" marL="0">
+            <a:pPr marL="0" indent="0">
               <a:lnSpc>
                 <a:spcPct val="112000"/>
               </a:lnSpc>
@@ -13995,7 +14240,7 @@
             <a:endParaRPr lang="en-US" sz="1350" dirty="0"/>
           </a:p>
           <a:p>
-            <a:pPr indent="0" marL="0">
+            <a:pPr marL="0" indent="0">
               <a:lnSpc>
                 <a:spcPct val="112000"/>
               </a:lnSpc>
@@ -14015,7 +14260,7 @@
             <a:endParaRPr lang="en-US" sz="1350" dirty="0"/>
           </a:p>
           <a:p>
-            <a:pPr indent="0" marL="0">
+            <a:pPr marL="0" indent="0">
               <a:lnSpc>
                 <a:spcPct val="112000"/>
               </a:lnSpc>
@@ -14035,7 +14280,7 @@
             <a:endParaRPr lang="en-US" sz="1350" dirty="0"/>
           </a:p>
           <a:p>
-            <a:pPr indent="0" marL="0">
+            <a:pPr marL="0" indent="0">
               <a:lnSpc>
                 <a:spcPct val="112000"/>
               </a:lnSpc>
@@ -14055,7 +14300,7 @@
             <a:endParaRPr lang="en-US" sz="1350" dirty="0"/>
           </a:p>
           <a:p>
-            <a:pPr indent="0" marL="0">
+            <a:pPr marL="0" indent="0">
               <a:lnSpc>
                 <a:spcPct val="112000"/>
               </a:lnSpc>
@@ -14075,7 +14320,7 @@
             <a:endParaRPr lang="en-US" sz="1350" dirty="0"/>
           </a:p>
           <a:p>
-            <a:pPr indent="0" marL="0">
+            <a:pPr marL="0" indent="0">
               <a:lnSpc>
                 <a:spcPct val="112000"/>
               </a:lnSpc>
@@ -14095,7 +14340,7 @@
             <a:endParaRPr lang="en-US" sz="1350" dirty="0"/>
           </a:p>
           <a:p>
-            <a:pPr indent="0" marL="0">
+            <a:pPr marL="0" indent="0">
               <a:lnSpc>
                 <a:spcPct val="112000"/>
               </a:lnSpc>
@@ -14115,7 +14360,7 @@
             <a:endParaRPr lang="en-US" sz="1350" dirty="0"/>
           </a:p>
           <a:p>
-            <a:pPr indent="0" marL="0">
+            <a:pPr marL="0" indent="0">
               <a:lnSpc>
                 <a:spcPct val="112000"/>
               </a:lnSpc>
@@ -14157,6 +14402,13 @@
           </a:solidFill>
           <a:ln/>
         </p:spPr>
+        <p:txBody>
+          <a:bodyPr/>
+          <a:lstStyle/>
+          <a:p>
+            <a:endParaRPr lang="es-AR"/>
+          </a:p>
+        </p:txBody>
       </p:sp>
       <p:sp>
         <p:nvSpPr>
@@ -14179,7 +14431,7 @@
           <a:bodyPr wrap="square" lIns="0" tIns="0" rIns="0" bIns="0" rtlCol="0" anchor="ctr"/>
           <a:lstStyle/>
           <a:p>
-            <a:pPr indent="0" marL="0">
+            <a:pPr marL="0" indent="0">
               <a:buNone/>
             </a:pPr>
             <a:r>
@@ -14218,7 +14470,7 @@
           <a:bodyPr wrap="square" lIns="0" tIns="0" rIns="0" bIns="0" rtlCol="0" anchor="ctr"/>
           <a:lstStyle/>
           <a:p>
-            <a:pPr algn="l" indent="0" marL="0">
+            <a:pPr marL="0" indent="0" algn="l">
               <a:buNone/>
             </a:pPr>
             <a:r>
@@ -14257,7 +14509,7 @@
           <a:bodyPr wrap="square" lIns="0" tIns="0" rIns="0" bIns="0" rtlCol="0" anchor="ctr"/>
           <a:lstStyle/>
           <a:p>
-            <a:pPr algn="r" indent="0" marL="0">
+            <a:pPr marL="0" indent="0" algn="r">
               <a:buNone/>
             </a:pPr>
             <a:r>
@@ -14291,6 +14543,7 @@
         <a:solidFill>
           <a:srgbClr val="FFFFFF"/>
         </a:solidFill>
+        <a:effectLst/>
       </p:bgPr>
     </p:bg>
     <p:spTree>
@@ -14328,11 +14581,11 @@
           <a:bodyPr wrap="square" lIns="0" tIns="0" rIns="0" bIns="0" rtlCol="0" anchor="ctr"/>
           <a:lstStyle/>
           <a:p>
-            <a:pPr algn="l" indent="0" marL="0">
-              <a:buNone/>
-            </a:pPr>
-            <a:r>
-              <a:rPr lang="en-US" sz="1300" b="1" spc="200" kern="0" dirty="0">
+            <a:pPr marL="0" indent="0" algn="l">
+              <a:buNone/>
+            </a:pPr>
+            <a:r>
+              <a:rPr lang="en-US" sz="1300" b="1" kern="0" spc="200" dirty="0">
                 <a:solidFill>
                   <a:srgbClr val="E8A33D"/>
                 </a:solidFill>
@@ -14367,7 +14620,7 @@
           <a:bodyPr wrap="square" lIns="0" tIns="0" rIns="0" bIns="0" rtlCol="0" anchor="ctr"/>
           <a:lstStyle/>
           <a:p>
-            <a:pPr algn="l" indent="0" marL="0">
+            <a:pPr marL="0" indent="0" algn="l">
               <a:buNone/>
             </a:pPr>
             <a:r>
@@ -14411,6 +14664,13 @@
             <a:prstDash val="solid"/>
           </a:ln>
         </p:spPr>
+        <p:txBody>
+          <a:bodyPr/>
+          <a:lstStyle/>
+          <a:p>
+            <a:endParaRPr lang="es-AR"/>
+          </a:p>
+        </p:txBody>
       </p:sp>
       <p:sp>
         <p:nvSpPr>
@@ -14433,7 +14693,7 @@
           <a:bodyPr wrap="square" lIns="0" tIns="0" rIns="0" bIns="0" rtlCol="0" anchor="t"/>
           <a:lstStyle/>
           <a:p>
-            <a:pPr indent="0" marL="0">
+            <a:pPr marL="0" indent="0">
               <a:lnSpc>
                 <a:spcPct val="112000"/>
               </a:lnSpc>
@@ -14453,7 +14713,7 @@
             <a:endParaRPr lang="en-US" sz="1350" dirty="0"/>
           </a:p>
           <a:p>
-            <a:pPr indent="0" marL="0">
+            <a:pPr marL="0" indent="0">
               <a:lnSpc>
                 <a:spcPct val="112000"/>
               </a:lnSpc>
@@ -14473,7 +14733,7 @@
             <a:endParaRPr lang="en-US" sz="1350" dirty="0"/>
           </a:p>
           <a:p>
-            <a:pPr indent="0" marL="0">
+            <a:pPr marL="0" indent="0">
               <a:lnSpc>
                 <a:spcPct val="112000"/>
               </a:lnSpc>
@@ -14482,7 +14742,7 @@
             <a:endParaRPr lang="en-US" sz="1350" dirty="0"/>
           </a:p>
           <a:p>
-            <a:pPr indent="0" marL="0">
+            <a:pPr marL="0" indent="0">
               <a:lnSpc>
                 <a:spcPct val="112000"/>
               </a:lnSpc>
@@ -14502,7 +14762,7 @@
             <a:endParaRPr lang="en-US" sz="1350" dirty="0"/>
           </a:p>
           <a:p>
-            <a:pPr indent="0" marL="0">
+            <a:pPr marL="0" indent="0">
               <a:lnSpc>
                 <a:spcPct val="112000"/>
               </a:lnSpc>
@@ -14522,7 +14782,7 @@
             <a:endParaRPr lang="en-US" sz="1350" dirty="0"/>
           </a:p>
           <a:p>
-            <a:pPr indent="0" marL="0">
+            <a:pPr marL="0" indent="0">
               <a:lnSpc>
                 <a:spcPct val="112000"/>
               </a:lnSpc>
@@ -14542,7 +14802,7 @@
             <a:endParaRPr lang="en-US" sz="1350" dirty="0"/>
           </a:p>
           <a:p>
-            <a:pPr indent="0" marL="0">
+            <a:pPr marL="0" indent="0">
               <a:lnSpc>
                 <a:spcPct val="112000"/>
               </a:lnSpc>
@@ -14562,7 +14822,7 @@
             <a:endParaRPr lang="en-US" sz="1350" dirty="0"/>
           </a:p>
           <a:p>
-            <a:pPr indent="0" marL="0">
+            <a:pPr marL="0" indent="0">
               <a:lnSpc>
                 <a:spcPct val="112000"/>
               </a:lnSpc>
@@ -14582,7 +14842,7 @@
             <a:endParaRPr lang="en-US" sz="1350" dirty="0"/>
           </a:p>
           <a:p>
-            <a:pPr indent="0" marL="0">
+            <a:pPr marL="0" indent="0">
               <a:lnSpc>
                 <a:spcPct val="112000"/>
               </a:lnSpc>
@@ -14602,7 +14862,7 @@
             <a:endParaRPr lang="en-US" sz="1350" dirty="0"/>
           </a:p>
           <a:p>
-            <a:pPr indent="0" marL="0">
+            <a:pPr marL="0" indent="0">
               <a:lnSpc>
                 <a:spcPct val="112000"/>
               </a:lnSpc>
@@ -14622,7 +14882,7 @@
             <a:endParaRPr lang="en-US" sz="1350" dirty="0"/>
           </a:p>
           <a:p>
-            <a:pPr indent="0" marL="0">
+            <a:pPr marL="0" indent="0">
               <a:lnSpc>
                 <a:spcPct val="112000"/>
               </a:lnSpc>
@@ -14642,7 +14902,7 @@
             <a:endParaRPr lang="en-US" sz="1350" dirty="0"/>
           </a:p>
           <a:p>
-            <a:pPr indent="0" marL="0">
+            <a:pPr marL="0" indent="0">
               <a:lnSpc>
                 <a:spcPct val="112000"/>
               </a:lnSpc>
@@ -14684,6 +14944,13 @@
           </a:solidFill>
           <a:ln/>
         </p:spPr>
+        <p:txBody>
+          <a:bodyPr/>
+          <a:lstStyle/>
+          <a:p>
+            <a:endParaRPr lang="es-AR"/>
+          </a:p>
+        </p:txBody>
       </p:sp>
       <p:sp>
         <p:nvSpPr>
@@ -14706,7 +14973,7 @@
           <a:bodyPr wrap="square" lIns="0" tIns="0" rIns="0" bIns="0" rtlCol="0" anchor="ctr"/>
           <a:lstStyle/>
           <a:p>
-            <a:pPr indent="0" marL="0">
+            <a:pPr marL="0" indent="0">
               <a:buNone/>
             </a:pPr>
             <a:r>
@@ -14745,7 +15012,7 @@
           <a:bodyPr wrap="square" lIns="0" tIns="0" rIns="0" bIns="0" rtlCol="0" anchor="ctr"/>
           <a:lstStyle/>
           <a:p>
-            <a:pPr algn="l" indent="0" marL="0">
+            <a:pPr marL="0" indent="0" algn="l">
               <a:buNone/>
             </a:pPr>
             <a:r>
@@ -14784,7 +15051,7 @@
           <a:bodyPr wrap="square" lIns="0" tIns="0" rIns="0" bIns="0" rtlCol="0" anchor="ctr"/>
           <a:lstStyle/>
           <a:p>
-            <a:pPr algn="r" indent="0" marL="0">
+            <a:pPr marL="0" indent="0" algn="r">
               <a:buNone/>
             </a:pPr>
             <a:r>
@@ -14818,6 +15085,7 @@
         <a:solidFill>
           <a:srgbClr val="1E2761"/>
         </a:solidFill>
+        <a:effectLst/>
       </p:bgPr>
     </p:bg>
     <p:spTree>
@@ -14853,6 +15121,13 @@
           </a:solidFill>
           <a:ln/>
         </p:spPr>
+        <p:txBody>
+          <a:bodyPr/>
+          <a:lstStyle/>
+          <a:p>
+            <a:endParaRPr lang="es-AR"/>
+          </a:p>
+        </p:txBody>
       </p:sp>
       <p:sp>
         <p:nvSpPr>
@@ -14875,11 +15150,11 @@
           <a:bodyPr wrap="square" lIns="0" tIns="0" rIns="0" bIns="0" rtlCol="0" anchor="ctr"/>
           <a:lstStyle/>
           <a:p>
-            <a:pPr indent="0" marL="0">
-              <a:buNone/>
-            </a:pPr>
-            <a:r>
-              <a:rPr lang="en-US" sz="1400" b="1" spc="200" kern="0" dirty="0">
+            <a:pPr marL="0" indent="0">
+              <a:buNone/>
+            </a:pPr>
+            <a:r>
+              <a:rPr lang="en-US" sz="1400" b="1" kern="0" spc="200" dirty="0">
                 <a:solidFill>
                   <a:srgbClr val="E8A33D"/>
                 </a:solidFill>
@@ -14914,7 +15189,7 @@
           <a:bodyPr wrap="square" lIns="0" tIns="0" rIns="0" bIns="0" rtlCol="0" anchor="ctr"/>
           <a:lstStyle/>
           <a:p>
-            <a:pPr indent="0" marL="0">
+            <a:pPr marL="0" indent="0">
               <a:buNone/>
             </a:pPr>
             <a:r>
@@ -14953,7 +15228,7 @@
           <a:bodyPr wrap="square" lIns="0" tIns="0" rIns="0" bIns="0" rtlCol="0" anchor="ctr"/>
           <a:lstStyle/>
           <a:p>
-            <a:pPr algn="l" indent="0" marL="0">
+            <a:pPr marL="0" indent="0" algn="l">
               <a:buNone/>
             </a:pPr>
             <a:r>
@@ -14992,7 +15267,7 @@
           <a:bodyPr wrap="square" lIns="0" tIns="0" rIns="0" bIns="0" rtlCol="0" anchor="ctr"/>
           <a:lstStyle/>
           <a:p>
-            <a:pPr algn="r" indent="0" marL="0">
+            <a:pPr marL="0" indent="0" algn="r">
               <a:buNone/>
             </a:pPr>
             <a:r>
@@ -15026,6 +15301,7 @@
         <a:solidFill>
           <a:srgbClr val="FFFFFF"/>
         </a:solidFill>
+        <a:effectLst/>
       </p:bgPr>
     </p:bg>
     <p:spTree>
@@ -15061,6 +15337,13 @@
           </a:solidFill>
           <a:ln/>
         </p:spPr>
+        <p:txBody>
+          <a:bodyPr/>
+          <a:lstStyle/>
+          <a:p>
+            <a:endParaRPr lang="es-AR"/>
+          </a:p>
+        </p:txBody>
       </p:sp>
       <p:sp>
         <p:nvSpPr>
@@ -15083,7 +15366,7 @@
           <a:bodyPr wrap="square" lIns="0" tIns="0" rIns="0" bIns="0" rtlCol="0" anchor="ctr"/>
           <a:lstStyle/>
           <a:p>
-            <a:pPr indent="0" marL="0">
+            <a:pPr marL="0" indent="0">
               <a:buNone/>
             </a:pPr>
             <a:r>
@@ -15122,7 +15405,7 @@
           <a:bodyPr wrap="square" lIns="0" tIns="0" rIns="0" bIns="0" rtlCol="0" anchor="ctr"/>
           <a:lstStyle/>
           <a:p>
-            <a:pPr indent="0" marL="0">
+            <a:pPr marL="0" indent="0">
               <a:buNone/>
             </a:pPr>
             <a:r>
@@ -15161,6 +15444,13 @@
           </a:solidFill>
           <a:ln/>
         </p:spPr>
+        <p:txBody>
+          <a:bodyPr/>
+          <a:lstStyle/>
+          <a:p>
+            <a:endParaRPr lang="es-AR"/>
+          </a:p>
+        </p:txBody>
       </p:sp>
       <p:sp>
         <p:nvSpPr>
@@ -15183,7 +15473,7 @@
           <a:bodyPr wrap="square" lIns="0" tIns="0" rIns="0" bIns="0" rtlCol="0" anchor="ctr"/>
           <a:lstStyle/>
           <a:p>
-            <a:pPr algn="ctr" indent="0" marL="0">
+            <a:pPr marL="0" indent="0" algn="ctr">
               <a:buNone/>
             </a:pPr>
             <a:r>
@@ -15227,6 +15517,13 @@
             <a:prstDash val="solid"/>
           </a:ln>
         </p:spPr>
+        <p:txBody>
+          <a:bodyPr/>
+          <a:lstStyle/>
+          <a:p>
+            <a:endParaRPr lang="es-AR"/>
+          </a:p>
+        </p:txBody>
       </p:sp>
       <p:sp>
         <p:nvSpPr>
@@ -15249,7 +15546,7 @@
           <a:bodyPr wrap="square" lIns="0" tIns="0" rIns="0" bIns="0" rtlCol="0" anchor="ctr"/>
           <a:lstStyle/>
           <a:p>
-            <a:pPr indent="0" marL="0">
+            <a:pPr marL="0" indent="0">
               <a:buNone/>
             </a:pPr>
             <a:r>
@@ -15286,6 +15583,13 @@
           </a:solidFill>
           <a:ln/>
         </p:spPr>
+        <p:txBody>
+          <a:bodyPr/>
+          <a:lstStyle/>
+          <a:p>
+            <a:endParaRPr lang="es-AR"/>
+          </a:p>
+        </p:txBody>
       </p:sp>
       <p:sp>
         <p:nvSpPr>
@@ -15308,7 +15612,7 @@
           <a:bodyPr wrap="square" lIns="0" tIns="0" rIns="0" bIns="0" rtlCol="0" anchor="t"/>
           <a:lstStyle/>
           <a:p>
-            <a:pPr indent="0" marL="0">
+            <a:pPr marL="0" indent="0">
               <a:buNone/>
             </a:pPr>
             <a:r>
@@ -15345,6 +15649,13 @@
           </a:solidFill>
           <a:ln/>
         </p:spPr>
+        <p:txBody>
+          <a:bodyPr/>
+          <a:lstStyle/>
+          <a:p>
+            <a:endParaRPr lang="es-AR"/>
+          </a:p>
+        </p:txBody>
       </p:sp>
       <p:sp>
         <p:nvSpPr>
@@ -15367,7 +15678,7 @@
           <a:bodyPr wrap="square" lIns="0" tIns="0" rIns="0" bIns="0" rtlCol="0" anchor="t"/>
           <a:lstStyle/>
           <a:p>
-            <a:pPr indent="0" marL="0">
+            <a:pPr marL="0" indent="0">
               <a:buNone/>
             </a:pPr>
             <a:r>
@@ -15404,6 +15715,13 @@
           </a:solidFill>
           <a:ln/>
         </p:spPr>
+        <p:txBody>
+          <a:bodyPr/>
+          <a:lstStyle/>
+          <a:p>
+            <a:endParaRPr lang="es-AR"/>
+          </a:p>
+        </p:txBody>
       </p:sp>
       <p:sp>
         <p:nvSpPr>
@@ -15426,7 +15744,7 @@
           <a:bodyPr wrap="square" lIns="0" tIns="0" rIns="0" bIns="0" rtlCol="0" anchor="t"/>
           <a:lstStyle/>
           <a:p>
-            <a:pPr indent="0" marL="0">
+            <a:pPr marL="0" indent="0">
               <a:buNone/>
             </a:pPr>
             <a:r>
@@ -15463,6 +15781,13 @@
           </a:solidFill>
           <a:ln/>
         </p:spPr>
+        <p:txBody>
+          <a:bodyPr/>
+          <a:lstStyle/>
+          <a:p>
+            <a:endParaRPr lang="es-AR"/>
+          </a:p>
+        </p:txBody>
       </p:sp>
       <p:sp>
         <p:nvSpPr>
@@ -15485,7 +15810,7 @@
           <a:bodyPr wrap="square" lIns="0" tIns="0" rIns="0" bIns="0" rtlCol="0" anchor="t"/>
           <a:lstStyle/>
           <a:p>
-            <a:pPr indent="0" marL="0">
+            <a:pPr marL="0" indent="0">
               <a:buNone/>
             </a:pPr>
             <a:r>
@@ -15524,6 +15849,13 @@
           </a:solidFill>
           <a:ln/>
         </p:spPr>
+        <p:txBody>
+          <a:bodyPr/>
+          <a:lstStyle/>
+          <a:p>
+            <a:endParaRPr lang="es-AR"/>
+          </a:p>
+        </p:txBody>
       </p:sp>
       <p:sp>
         <p:nvSpPr>
@@ -15546,7 +15878,7 @@
           <a:bodyPr wrap="square" lIns="0" tIns="0" rIns="0" bIns="0" rtlCol="0" anchor="ctr"/>
           <a:lstStyle/>
           <a:p>
-            <a:pPr indent="0" marL="0">
+            <a:pPr marL="0" indent="0">
               <a:buNone/>
             </a:pPr>
             <a:r>
@@ -15585,7 +15917,7 @@
           <a:bodyPr wrap="square" lIns="0" tIns="0" rIns="0" bIns="0" rtlCol="0" anchor="ctr"/>
           <a:lstStyle/>
           <a:p>
-            <a:pPr algn="l" indent="0" marL="0">
+            <a:pPr marL="0" indent="0" algn="l">
               <a:buNone/>
             </a:pPr>
             <a:r>
@@ -15624,7 +15956,7 @@
           <a:bodyPr wrap="square" lIns="0" tIns="0" rIns="0" bIns="0" rtlCol="0" anchor="ctr"/>
           <a:lstStyle/>
           <a:p>
-            <a:pPr algn="r" indent="0" marL="0">
+            <a:pPr marL="0" indent="0" algn="r">
               <a:buNone/>
             </a:pPr>
             <a:r>
@@ -15658,6 +15990,7 @@
         <a:solidFill>
           <a:srgbClr val="FFFFFF"/>
         </a:solidFill>
+        <a:effectLst/>
       </p:bgPr>
     </p:bg>
     <p:spTree>
@@ -15695,11 +16028,11 @@
           <a:bodyPr wrap="square" lIns="0" tIns="0" rIns="0" bIns="0" rtlCol="0" anchor="ctr"/>
           <a:lstStyle/>
           <a:p>
-            <a:pPr algn="l" indent="0" marL="0">
-              <a:buNone/>
-            </a:pPr>
-            <a:r>
-              <a:rPr lang="en-US" sz="1300" b="1" spc="200" kern="0" dirty="0">
+            <a:pPr marL="0" indent="0" algn="l">
+              <a:buNone/>
+            </a:pPr>
+            <a:r>
+              <a:rPr lang="en-US" sz="1300" b="1" kern="0" spc="200" dirty="0">
                 <a:solidFill>
                   <a:srgbClr val="E8A33D"/>
                 </a:solidFill>
@@ -15734,7 +16067,7 @@
           <a:bodyPr wrap="square" lIns="0" tIns="0" rIns="0" bIns="0" rtlCol="0" anchor="ctr"/>
           <a:lstStyle/>
           <a:p>
-            <a:pPr algn="l" indent="0" marL="0">
+            <a:pPr marL="0" indent="0" algn="l">
               <a:buNone/>
             </a:pPr>
             <a:r>
@@ -15778,6 +16111,13 @@
             <a:prstDash val="solid"/>
           </a:ln>
         </p:spPr>
+        <p:txBody>
+          <a:bodyPr/>
+          <a:lstStyle/>
+          <a:p>
+            <a:endParaRPr lang="es-AR"/>
+          </a:p>
+        </p:txBody>
       </p:sp>
       <p:sp>
         <p:nvSpPr>
@@ -15800,7 +16140,7 @@
           <a:bodyPr wrap="square" lIns="0" tIns="0" rIns="0" bIns="0" rtlCol="0" anchor="t"/>
           <a:lstStyle/>
           <a:p>
-            <a:pPr indent="0" marL="0">
+            <a:pPr marL="0" indent="0">
               <a:lnSpc>
                 <a:spcPct val="112000"/>
               </a:lnSpc>
@@ -15820,7 +16160,7 @@
             <a:endParaRPr lang="en-US" sz="1350" dirty="0"/>
           </a:p>
           <a:p>
-            <a:pPr indent="0" marL="0">
+            <a:pPr marL="0" indent="0">
               <a:lnSpc>
                 <a:spcPct val="112000"/>
               </a:lnSpc>
@@ -15840,7 +16180,7 @@
             <a:endParaRPr lang="en-US" sz="1350" dirty="0"/>
           </a:p>
           <a:p>
-            <a:pPr indent="0" marL="0">
+            <a:pPr marL="0" indent="0">
               <a:lnSpc>
                 <a:spcPct val="112000"/>
               </a:lnSpc>
@@ -15860,7 +16200,7 @@
             <a:endParaRPr lang="en-US" sz="1350" dirty="0"/>
           </a:p>
           <a:p>
-            <a:pPr indent="0" marL="0">
+            <a:pPr marL="0" indent="0">
               <a:lnSpc>
                 <a:spcPct val="112000"/>
               </a:lnSpc>
@@ -15880,7 +16220,7 @@
             <a:endParaRPr lang="en-US" sz="1350" dirty="0"/>
           </a:p>
           <a:p>
-            <a:pPr indent="0" marL="0">
+            <a:pPr marL="0" indent="0">
               <a:lnSpc>
                 <a:spcPct val="112000"/>
               </a:lnSpc>
@@ -15900,7 +16240,7 @@
             <a:endParaRPr lang="en-US" sz="1350" dirty="0"/>
           </a:p>
           <a:p>
-            <a:pPr indent="0" marL="0">
+            <a:pPr marL="0" indent="0">
               <a:lnSpc>
                 <a:spcPct val="112000"/>
               </a:lnSpc>
@@ -15920,7 +16260,7 @@
             <a:endParaRPr lang="en-US" sz="1350" dirty="0"/>
           </a:p>
           <a:p>
-            <a:pPr indent="0" marL="0">
+            <a:pPr marL="0" indent="0">
               <a:lnSpc>
                 <a:spcPct val="112000"/>
               </a:lnSpc>
@@ -15940,7 +16280,7 @@
             <a:endParaRPr lang="en-US" sz="1350" dirty="0"/>
           </a:p>
           <a:p>
-            <a:pPr indent="0" marL="0">
+            <a:pPr marL="0" indent="0">
               <a:lnSpc>
                 <a:spcPct val="112000"/>
               </a:lnSpc>
@@ -15960,7 +16300,7 @@
             <a:endParaRPr lang="en-US" sz="1350" dirty="0"/>
           </a:p>
           <a:p>
-            <a:pPr indent="0" marL="0">
+            <a:pPr marL="0" indent="0">
               <a:lnSpc>
                 <a:spcPct val="112000"/>
               </a:lnSpc>
@@ -15980,7 +16320,7 @@
             <a:endParaRPr lang="en-US" sz="1350" dirty="0"/>
           </a:p>
           <a:p>
-            <a:pPr indent="0" marL="0">
+            <a:pPr marL="0" indent="0">
               <a:lnSpc>
                 <a:spcPct val="112000"/>
               </a:lnSpc>
@@ -16000,7 +16340,7 @@
             <a:endParaRPr lang="en-US" sz="1350" dirty="0"/>
           </a:p>
           <a:p>
-            <a:pPr indent="0" marL="0">
+            <a:pPr marL="0" indent="0">
               <a:lnSpc>
                 <a:spcPct val="112000"/>
               </a:lnSpc>
@@ -16020,7 +16360,7 @@
             <a:endParaRPr lang="en-US" sz="1350" dirty="0"/>
           </a:p>
           <a:p>
-            <a:pPr indent="0" marL="0">
+            <a:pPr marL="0" indent="0">
               <a:lnSpc>
                 <a:spcPct val="112000"/>
               </a:lnSpc>
@@ -16040,7 +16380,7 @@
             <a:endParaRPr lang="en-US" sz="1350" dirty="0"/>
           </a:p>
           <a:p>
-            <a:pPr indent="0" marL="0">
+            <a:pPr marL="0" indent="0">
               <a:lnSpc>
                 <a:spcPct val="112000"/>
               </a:lnSpc>
@@ -16060,7 +16400,7 @@
             <a:endParaRPr lang="en-US" sz="1350" dirty="0"/>
           </a:p>
           <a:p>
-            <a:pPr indent="0" marL="0">
+            <a:pPr marL="0" indent="0">
               <a:lnSpc>
                 <a:spcPct val="112000"/>
               </a:lnSpc>
@@ -16102,6 +16442,13 @@
           </a:solidFill>
           <a:ln/>
         </p:spPr>
+        <p:txBody>
+          <a:bodyPr/>
+          <a:lstStyle/>
+          <a:p>
+            <a:endParaRPr lang="es-AR"/>
+          </a:p>
+        </p:txBody>
       </p:sp>
       <p:sp>
         <p:nvSpPr>
@@ -16124,7 +16471,7 @@
           <a:bodyPr wrap="square" lIns="0" tIns="0" rIns="0" bIns="0" rtlCol="0" anchor="ctr"/>
           <a:lstStyle/>
           <a:p>
-            <a:pPr indent="0" marL="0">
+            <a:pPr marL="0" indent="0">
               <a:buNone/>
             </a:pPr>
             <a:r>
@@ -16163,7 +16510,7 @@
           <a:bodyPr wrap="square" lIns="0" tIns="0" rIns="0" bIns="0" rtlCol="0" anchor="ctr"/>
           <a:lstStyle/>
           <a:p>
-            <a:pPr algn="l" indent="0" marL="0">
+            <a:pPr marL="0" indent="0" algn="l">
               <a:buNone/>
             </a:pPr>
             <a:r>
@@ -16202,7 +16549,7 @@
           <a:bodyPr wrap="square" lIns="0" tIns="0" rIns="0" bIns="0" rtlCol="0" anchor="ctr"/>
           <a:lstStyle/>
           <a:p>
-            <a:pPr algn="r" indent="0" marL="0">
+            <a:pPr marL="0" indent="0" algn="r">
               <a:buNone/>
             </a:pPr>
             <a:r>
@@ -16236,6 +16583,7 @@
         <a:solidFill>
           <a:srgbClr val="1E2761"/>
         </a:solidFill>
+        <a:effectLst/>
       </p:bgPr>
     </p:bg>
     <p:spTree>
@@ -16271,6 +16619,13 @@
           </a:solidFill>
           <a:ln/>
         </p:spPr>
+        <p:txBody>
+          <a:bodyPr/>
+          <a:lstStyle/>
+          <a:p>
+            <a:endParaRPr lang="es-AR"/>
+          </a:p>
+        </p:txBody>
       </p:sp>
       <p:sp>
         <p:nvSpPr>
@@ -16293,11 +16648,11 @@
           <a:bodyPr wrap="square" lIns="0" tIns="0" rIns="0" bIns="0" rtlCol="0" anchor="ctr"/>
           <a:lstStyle/>
           <a:p>
-            <a:pPr indent="0" marL="0">
-              <a:buNone/>
-            </a:pPr>
-            <a:r>
-              <a:rPr lang="en-US" sz="1400" b="1" spc="200" kern="0" dirty="0">
+            <a:pPr marL="0" indent="0">
+              <a:buNone/>
+            </a:pPr>
+            <a:r>
+              <a:rPr lang="en-US" sz="1400" b="1" kern="0" spc="200" dirty="0">
                 <a:solidFill>
                   <a:srgbClr val="E8A33D"/>
                 </a:solidFill>
@@ -16332,7 +16687,7 @@
           <a:bodyPr wrap="square" lIns="0" tIns="0" rIns="0" bIns="0" rtlCol="0" anchor="ctr"/>
           <a:lstStyle/>
           <a:p>
-            <a:pPr indent="0" marL="0">
+            <a:pPr marL="0" indent="0">
               <a:buNone/>
             </a:pPr>
             <a:r>
@@ -16371,7 +16726,7 @@
           <a:bodyPr wrap="square" lIns="0" tIns="0" rIns="0" bIns="0" rtlCol="0" anchor="ctr"/>
           <a:lstStyle/>
           <a:p>
-            <a:pPr algn="l" indent="0" marL="0">
+            <a:pPr marL="0" indent="0" algn="l">
               <a:buNone/>
             </a:pPr>
             <a:r>
@@ -16410,7 +16765,7 @@
           <a:bodyPr wrap="square" lIns="0" tIns="0" rIns="0" bIns="0" rtlCol="0" anchor="ctr"/>
           <a:lstStyle/>
           <a:p>
-            <a:pPr algn="r" indent="0" marL="0">
+            <a:pPr marL="0" indent="0" algn="r">
               <a:buNone/>
             </a:pPr>
             <a:r>
@@ -16444,6 +16799,7 @@
         <a:solidFill>
           <a:srgbClr val="FFFFFF"/>
         </a:solidFill>
+        <a:effectLst/>
       </p:bgPr>
     </p:bg>
     <p:spTree>
@@ -16479,6 +16835,13 @@
           </a:solidFill>
           <a:ln/>
         </p:spPr>
+        <p:txBody>
+          <a:bodyPr/>
+          <a:lstStyle/>
+          <a:p>
+            <a:endParaRPr lang="es-AR"/>
+          </a:p>
+        </p:txBody>
       </p:sp>
       <p:sp>
         <p:nvSpPr>
@@ -16501,7 +16864,7 @@
           <a:bodyPr wrap="square" lIns="0" tIns="0" rIns="0" bIns="0" rtlCol="0" anchor="ctr"/>
           <a:lstStyle/>
           <a:p>
-            <a:pPr indent="0" marL="0">
+            <a:pPr marL="0" indent="0">
               <a:buNone/>
             </a:pPr>
             <a:r>
@@ -16540,7 +16903,7 @@
           <a:bodyPr wrap="square" lIns="0" tIns="0" rIns="0" bIns="0" rtlCol="0" anchor="ctr"/>
           <a:lstStyle/>
           <a:p>
-            <a:pPr indent="0" marL="0">
+            <a:pPr marL="0" indent="0">
               <a:buNone/>
             </a:pPr>
             <a:r>
@@ -16579,6 +16942,13 @@
           </a:solidFill>
           <a:ln/>
         </p:spPr>
+        <p:txBody>
+          <a:bodyPr/>
+          <a:lstStyle/>
+          <a:p>
+            <a:endParaRPr lang="es-AR"/>
+          </a:p>
+        </p:txBody>
       </p:sp>
       <p:sp>
         <p:nvSpPr>
@@ -16601,7 +16971,7 @@
           <a:bodyPr wrap="square" lIns="0" tIns="0" rIns="0" bIns="0" rtlCol="0" anchor="ctr"/>
           <a:lstStyle/>
           <a:p>
-            <a:pPr algn="ctr" indent="0" marL="0">
+            <a:pPr marL="0" indent="0" algn="ctr">
               <a:buNone/>
             </a:pPr>
             <a:r>
@@ -16645,6 +17015,13 @@
             <a:prstDash val="solid"/>
           </a:ln>
         </p:spPr>
+        <p:txBody>
+          <a:bodyPr/>
+          <a:lstStyle/>
+          <a:p>
+            <a:endParaRPr lang="es-AR"/>
+          </a:p>
+        </p:txBody>
       </p:sp>
       <p:sp>
         <p:nvSpPr>
@@ -16667,7 +17044,7 @@
           <a:bodyPr wrap="square" lIns="0" tIns="0" rIns="0" bIns="0" rtlCol="0" anchor="ctr"/>
           <a:lstStyle/>
           <a:p>
-            <a:pPr indent="0" marL="0">
+            <a:pPr marL="0" indent="0">
               <a:buNone/>
             </a:pPr>
             <a:r>
@@ -16704,6 +17081,13 @@
           </a:solidFill>
           <a:ln/>
         </p:spPr>
+        <p:txBody>
+          <a:bodyPr/>
+          <a:lstStyle/>
+          <a:p>
+            <a:endParaRPr lang="es-AR"/>
+          </a:p>
+        </p:txBody>
       </p:sp>
       <p:sp>
         <p:nvSpPr>
@@ -16726,7 +17110,7 @@
           <a:bodyPr wrap="square" lIns="0" tIns="0" rIns="0" bIns="0" rtlCol="0" anchor="t"/>
           <a:lstStyle/>
           <a:p>
-            <a:pPr indent="0" marL="0">
+            <a:pPr marL="0" indent="0">
               <a:buNone/>
             </a:pPr>
             <a:r>
@@ -16763,6 +17147,13 @@
           </a:solidFill>
           <a:ln/>
         </p:spPr>
+        <p:txBody>
+          <a:bodyPr/>
+          <a:lstStyle/>
+          <a:p>
+            <a:endParaRPr lang="es-AR"/>
+          </a:p>
+        </p:txBody>
       </p:sp>
       <p:sp>
         <p:nvSpPr>
@@ -16785,7 +17176,7 @@
           <a:bodyPr wrap="square" lIns="0" tIns="0" rIns="0" bIns="0" rtlCol="0" anchor="t"/>
           <a:lstStyle/>
           <a:p>
-            <a:pPr indent="0" marL="0">
+            <a:pPr marL="0" indent="0">
               <a:buNone/>
             </a:pPr>
             <a:r>
@@ -16822,6 +17213,13 @@
           </a:solidFill>
           <a:ln/>
         </p:spPr>
+        <p:txBody>
+          <a:bodyPr/>
+          <a:lstStyle/>
+          <a:p>
+            <a:endParaRPr lang="es-AR"/>
+          </a:p>
+        </p:txBody>
       </p:sp>
       <p:sp>
         <p:nvSpPr>
@@ -16844,7 +17242,7 @@
           <a:bodyPr wrap="square" lIns="0" tIns="0" rIns="0" bIns="0" rtlCol="0" anchor="t"/>
           <a:lstStyle/>
           <a:p>
-            <a:pPr indent="0" marL="0">
+            <a:pPr marL="0" indent="0">
               <a:buNone/>
             </a:pPr>
             <a:r>
@@ -16881,6 +17279,13 @@
           </a:solidFill>
           <a:ln/>
         </p:spPr>
+        <p:txBody>
+          <a:bodyPr/>
+          <a:lstStyle/>
+          <a:p>
+            <a:endParaRPr lang="es-AR"/>
+          </a:p>
+        </p:txBody>
       </p:sp>
       <p:sp>
         <p:nvSpPr>
@@ -16903,7 +17308,7 @@
           <a:bodyPr wrap="square" lIns="0" tIns="0" rIns="0" bIns="0" rtlCol="0" anchor="t"/>
           <a:lstStyle/>
           <a:p>
-            <a:pPr indent="0" marL="0">
+            <a:pPr marL="0" indent="0">
               <a:buNone/>
             </a:pPr>
             <a:r>
@@ -16942,6 +17347,13 @@
           </a:solidFill>
           <a:ln/>
         </p:spPr>
+        <p:txBody>
+          <a:bodyPr/>
+          <a:lstStyle/>
+          <a:p>
+            <a:endParaRPr lang="es-AR"/>
+          </a:p>
+        </p:txBody>
       </p:sp>
       <p:sp>
         <p:nvSpPr>
@@ -16964,7 +17376,7 @@
           <a:bodyPr wrap="square" lIns="0" tIns="0" rIns="0" bIns="0" rtlCol="0" anchor="ctr"/>
           <a:lstStyle/>
           <a:p>
-            <a:pPr indent="0" marL="0">
+            <a:pPr marL="0" indent="0">
               <a:buNone/>
             </a:pPr>
             <a:r>
@@ -17003,7 +17415,7 @@
           <a:bodyPr wrap="square" lIns="0" tIns="0" rIns="0" bIns="0" rtlCol="0" anchor="ctr"/>
           <a:lstStyle/>
           <a:p>
-            <a:pPr algn="l" indent="0" marL="0">
+            <a:pPr marL="0" indent="0" algn="l">
               <a:buNone/>
             </a:pPr>
             <a:r>
@@ -17042,7 +17454,7 @@
           <a:bodyPr wrap="square" lIns="0" tIns="0" rIns="0" bIns="0" rtlCol="0" anchor="ctr"/>
           <a:lstStyle/>
           <a:p>
-            <a:pPr algn="r" indent="0" marL="0">
+            <a:pPr marL="0" indent="0" algn="r">
               <a:buNone/>
             </a:pPr>
             <a:r>
@@ -17076,6 +17488,7 @@
         <a:solidFill>
           <a:srgbClr val="FFFFFF"/>
         </a:solidFill>
+        <a:effectLst/>
       </p:bgPr>
     </p:bg>
     <p:spTree>
@@ -17113,11 +17526,11 @@
           <a:bodyPr wrap="square" lIns="0" tIns="0" rIns="0" bIns="0" rtlCol="0" anchor="ctr"/>
           <a:lstStyle/>
           <a:p>
-            <a:pPr algn="l" indent="0" marL="0">
-              <a:buNone/>
-            </a:pPr>
-            <a:r>
-              <a:rPr lang="en-US" sz="1300" b="1" spc="200" kern="0" dirty="0">
+            <a:pPr marL="0" indent="0" algn="l">
+              <a:buNone/>
+            </a:pPr>
+            <a:r>
+              <a:rPr lang="en-US" sz="1300" b="1" kern="0" spc="200" dirty="0">
                 <a:solidFill>
                   <a:srgbClr val="E8A33D"/>
                 </a:solidFill>
@@ -17152,7 +17565,7 @@
           <a:bodyPr wrap="square" lIns="0" tIns="0" rIns="0" bIns="0" rtlCol="0" anchor="ctr"/>
           <a:lstStyle/>
           <a:p>
-            <a:pPr algn="l" indent="0" marL="0">
+            <a:pPr marL="0" indent="0" algn="l">
               <a:buNone/>
             </a:pPr>
             <a:r>
@@ -17196,6 +17609,13 @@
             <a:prstDash val="solid"/>
           </a:ln>
         </p:spPr>
+        <p:txBody>
+          <a:bodyPr/>
+          <a:lstStyle/>
+          <a:p>
+            <a:endParaRPr lang="es-AR"/>
+          </a:p>
+        </p:txBody>
       </p:sp>
       <p:sp>
         <p:nvSpPr>
@@ -17218,7 +17638,7 @@
           <a:bodyPr wrap="square" lIns="0" tIns="0" rIns="0" bIns="0" rtlCol="0" anchor="t"/>
           <a:lstStyle/>
           <a:p>
-            <a:pPr indent="0" marL="0">
+            <a:pPr marL="0" indent="0">
               <a:lnSpc>
                 <a:spcPct val="112000"/>
               </a:lnSpc>
@@ -17238,7 +17658,7 @@
             <a:endParaRPr lang="en-US" sz="1350" dirty="0"/>
           </a:p>
           <a:p>
-            <a:pPr indent="0" marL="0">
+            <a:pPr marL="0" indent="0">
               <a:lnSpc>
                 <a:spcPct val="112000"/>
               </a:lnSpc>
@@ -17258,7 +17678,7 @@
             <a:endParaRPr lang="en-US" sz="1350" dirty="0"/>
           </a:p>
           <a:p>
-            <a:pPr indent="0" marL="0">
+            <a:pPr marL="0" indent="0">
               <a:lnSpc>
                 <a:spcPct val="112000"/>
               </a:lnSpc>
@@ -17278,7 +17698,7 @@
             <a:endParaRPr lang="en-US" sz="1350" dirty="0"/>
           </a:p>
           <a:p>
-            <a:pPr indent="0" marL="0">
+            <a:pPr marL="0" indent="0">
               <a:lnSpc>
                 <a:spcPct val="112000"/>
               </a:lnSpc>
@@ -17298,7 +17718,7 @@
             <a:endParaRPr lang="en-US" sz="1350" dirty="0"/>
           </a:p>
           <a:p>
-            <a:pPr indent="0" marL="0">
+            <a:pPr marL="0" indent="0">
               <a:lnSpc>
                 <a:spcPct val="112000"/>
               </a:lnSpc>
@@ -17318,7 +17738,7 @@
             <a:endParaRPr lang="en-US" sz="1350" dirty="0"/>
           </a:p>
           <a:p>
-            <a:pPr indent="0" marL="0">
+            <a:pPr marL="0" indent="0">
               <a:lnSpc>
                 <a:spcPct val="112000"/>
               </a:lnSpc>
@@ -17338,7 +17758,7 @@
             <a:endParaRPr lang="en-US" sz="1350" dirty="0"/>
           </a:p>
           <a:p>
-            <a:pPr indent="0" marL="0">
+            <a:pPr marL="0" indent="0">
               <a:lnSpc>
                 <a:spcPct val="112000"/>
               </a:lnSpc>
@@ -17358,7 +17778,7 @@
             <a:endParaRPr lang="en-US" sz="1350" dirty="0"/>
           </a:p>
           <a:p>
-            <a:pPr indent="0" marL="0">
+            <a:pPr marL="0" indent="0">
               <a:lnSpc>
                 <a:spcPct val="112000"/>
               </a:lnSpc>
@@ -17378,7 +17798,7 @@
             <a:endParaRPr lang="en-US" sz="1350" dirty="0"/>
           </a:p>
           <a:p>
-            <a:pPr indent="0" marL="0">
+            <a:pPr marL="0" indent="0">
               <a:lnSpc>
                 <a:spcPct val="112000"/>
               </a:lnSpc>
@@ -17387,7 +17807,7 @@
             <a:endParaRPr lang="en-US" sz="1350" dirty="0"/>
           </a:p>
           <a:p>
-            <a:pPr indent="0" marL="0">
+            <a:pPr marL="0" indent="0">
               <a:lnSpc>
                 <a:spcPct val="112000"/>
               </a:lnSpc>
@@ -17407,7 +17827,7 @@
             <a:endParaRPr lang="en-US" sz="1350" dirty="0"/>
           </a:p>
           <a:p>
-            <a:pPr indent="0" marL="0">
+            <a:pPr marL="0" indent="0">
               <a:lnSpc>
                 <a:spcPct val="112000"/>
               </a:lnSpc>
@@ -17427,7 +17847,7 @@
             <a:endParaRPr lang="en-US" sz="1350" dirty="0"/>
           </a:p>
           <a:p>
-            <a:pPr indent="0" marL="0">
+            <a:pPr marL="0" indent="0">
               <a:lnSpc>
                 <a:spcPct val="112000"/>
               </a:lnSpc>
@@ -17447,7 +17867,7 @@
             <a:endParaRPr lang="en-US" sz="1350" dirty="0"/>
           </a:p>
           <a:p>
-            <a:pPr indent="0" marL="0">
+            <a:pPr marL="0" indent="0">
               <a:lnSpc>
                 <a:spcPct val="112000"/>
               </a:lnSpc>
@@ -17489,6 +17909,13 @@
           </a:solidFill>
           <a:ln/>
         </p:spPr>
+        <p:txBody>
+          <a:bodyPr/>
+          <a:lstStyle/>
+          <a:p>
+            <a:endParaRPr lang="es-AR"/>
+          </a:p>
+        </p:txBody>
       </p:sp>
       <p:sp>
         <p:nvSpPr>
@@ -17511,7 +17938,7 @@
           <a:bodyPr wrap="square" lIns="0" tIns="0" rIns="0" bIns="0" rtlCol="0" anchor="ctr"/>
           <a:lstStyle/>
           <a:p>
-            <a:pPr indent="0" marL="0">
+            <a:pPr marL="0" indent="0">
               <a:buNone/>
             </a:pPr>
             <a:r>
@@ -17550,7 +17977,7 @@
           <a:bodyPr wrap="square" lIns="0" tIns="0" rIns="0" bIns="0" rtlCol="0" anchor="ctr"/>
           <a:lstStyle/>
           <a:p>
-            <a:pPr algn="l" indent="0" marL="0">
+            <a:pPr marL="0" indent="0" algn="l">
               <a:buNone/>
             </a:pPr>
             <a:r>
@@ -17589,7 +18016,7 @@
           <a:bodyPr wrap="square" lIns="0" tIns="0" rIns="0" bIns="0" rtlCol="0" anchor="ctr"/>
           <a:lstStyle/>
           <a:p>
-            <a:pPr algn="r" indent="0" marL="0">
+            <a:pPr marL="0" indent="0" algn="r">
               <a:buNone/>
             </a:pPr>
             <a:r>
@@ -17623,6 +18050,7 @@
         <a:solidFill>
           <a:srgbClr val="FFFFFF"/>
         </a:solidFill>
+        <a:effectLst/>
       </p:bgPr>
     </p:bg>
     <p:spTree>
@@ -17658,6 +18086,13 @@
           </a:solidFill>
           <a:ln/>
         </p:spPr>
+        <p:txBody>
+          <a:bodyPr/>
+          <a:lstStyle/>
+          <a:p>
+            <a:endParaRPr lang="es-AR"/>
+          </a:p>
+        </p:txBody>
       </p:sp>
       <p:sp>
         <p:nvSpPr>
@@ -17680,7 +18115,7 @@
           <a:bodyPr wrap="square" lIns="0" tIns="0" rIns="0" bIns="0" rtlCol="0" anchor="ctr"/>
           <a:lstStyle/>
           <a:p>
-            <a:pPr indent="0" marL="0">
+            <a:pPr marL="0" indent="0">
               <a:buNone/>
             </a:pPr>
             <a:r>
@@ -17719,7 +18154,7 @@
           <a:bodyPr wrap="square" lIns="0" tIns="0" rIns="0" bIns="0" rtlCol="0" anchor="ctr"/>
           <a:lstStyle/>
           <a:p>
-            <a:pPr indent="0" marL="0">
+            <a:pPr marL="0" indent="0">
               <a:buNone/>
             </a:pPr>
             <a:r>
@@ -17758,6 +18193,13 @@
           </a:solidFill>
           <a:ln/>
         </p:spPr>
+        <p:txBody>
+          <a:bodyPr/>
+          <a:lstStyle/>
+          <a:p>
+            <a:endParaRPr lang="es-AR"/>
+          </a:p>
+        </p:txBody>
       </p:sp>
       <p:sp>
         <p:nvSpPr>
@@ -17780,7 +18222,7 @@
           <a:bodyPr wrap="square" lIns="0" tIns="0" rIns="0" bIns="0" rtlCol="0" anchor="ctr"/>
           <a:lstStyle/>
           <a:p>
-            <a:pPr algn="ctr" indent="0" marL="0">
+            <a:pPr marL="0" indent="0" algn="ctr">
               <a:buNone/>
             </a:pPr>
             <a:r>
@@ -17824,6 +18266,13 @@
             <a:prstDash val="solid"/>
           </a:ln>
         </p:spPr>
+        <p:txBody>
+          <a:bodyPr/>
+          <a:lstStyle/>
+          <a:p>
+            <a:endParaRPr lang="es-AR"/>
+          </a:p>
+        </p:txBody>
       </p:sp>
       <p:sp>
         <p:nvSpPr>
@@ -17846,7 +18295,7 @@
           <a:bodyPr wrap="square" lIns="0" tIns="0" rIns="0" bIns="0" rtlCol="0" anchor="ctr"/>
           <a:lstStyle/>
           <a:p>
-            <a:pPr indent="0" marL="0">
+            <a:pPr marL="0" indent="0">
               <a:buNone/>
             </a:pPr>
             <a:r>
@@ -17883,6 +18332,13 @@
           </a:solidFill>
           <a:ln/>
         </p:spPr>
+        <p:txBody>
+          <a:bodyPr/>
+          <a:lstStyle/>
+          <a:p>
+            <a:endParaRPr lang="es-AR"/>
+          </a:p>
+        </p:txBody>
       </p:sp>
       <p:sp>
         <p:nvSpPr>
@@ -17905,7 +18361,7 @@
           <a:bodyPr wrap="square" lIns="0" tIns="0" rIns="0" bIns="0" rtlCol="0" anchor="t"/>
           <a:lstStyle/>
           <a:p>
-            <a:pPr indent="0" marL="0">
+            <a:pPr marL="0" indent="0">
               <a:buNone/>
             </a:pPr>
             <a:r>
@@ -17917,7 +18373,29 @@
                 <a:ea typeface="Calibri" pitchFamily="34" charset="-122"/>
                 <a:cs typeface="Calibri" pitchFamily="34" charset="-120"/>
               </a:rPr>
-              <a:t>¿Qué TDA ya conocido decide QUIÉN se atiende primero según una prioridad?</a:t>
+              <a:t>¿Qué TDA ya conocido decide QUIÉN se atiende primero según una </a:t>
+            </a:r>
+            <a:r>
+              <a:rPr lang="en-US" sz="1350" dirty="0" err="1">
+                <a:solidFill>
+                  <a:srgbClr val="1C1C2A"/>
+                </a:solidFill>
+                <a:latin typeface="Calibri" pitchFamily="34" charset="0"/>
+                <a:ea typeface="Calibri" pitchFamily="34" charset="-122"/>
+                <a:cs typeface="Calibri" pitchFamily="34" charset="-120"/>
+              </a:rPr>
+              <a:t>prioridad</a:t>
+            </a:r>
+            <a:r>
+              <a:rPr lang="en-US" sz="1350" dirty="0">
+                <a:solidFill>
+                  <a:srgbClr val="1C1C2A"/>
+                </a:solidFill>
+                <a:latin typeface="Calibri" pitchFamily="34" charset="0"/>
+                <a:ea typeface="Calibri" pitchFamily="34" charset="-122"/>
+                <a:cs typeface="Calibri" pitchFamily="34" charset="-120"/>
+              </a:rPr>
+              <a:t>?</a:t>
             </a:r>
             <a:endParaRPr lang="en-US" sz="1350" dirty="0"/>
           </a:p>
@@ -17942,6 +18420,13 @@
           </a:solidFill>
           <a:ln/>
         </p:spPr>
+        <p:txBody>
+          <a:bodyPr/>
+          <a:lstStyle/>
+          <a:p>
+            <a:endParaRPr lang="es-AR"/>
+          </a:p>
+        </p:txBody>
       </p:sp>
       <p:sp>
         <p:nvSpPr>
@@ -17964,7 +18449,7 @@
           <a:bodyPr wrap="square" lIns="0" tIns="0" rIns="0" bIns="0" rtlCol="0" anchor="t"/>
           <a:lstStyle/>
           <a:p>
-            <a:pPr indent="0" marL="0">
+            <a:pPr marL="0" indent="0">
               <a:buNone/>
             </a:pPr>
             <a:r>
@@ -18001,6 +18486,13 @@
           </a:solidFill>
           <a:ln/>
         </p:spPr>
+        <p:txBody>
+          <a:bodyPr/>
+          <a:lstStyle/>
+          <a:p>
+            <a:endParaRPr lang="es-AR"/>
+          </a:p>
+        </p:txBody>
       </p:sp>
       <p:sp>
         <p:nvSpPr>
@@ -18023,7 +18515,7 @@
           <a:bodyPr wrap="square" lIns="0" tIns="0" rIns="0" bIns="0" rtlCol="0" anchor="t"/>
           <a:lstStyle/>
           <a:p>
-            <a:pPr indent="0" marL="0">
+            <a:pPr marL="0" indent="0">
               <a:buNone/>
             </a:pPr>
             <a:r>
@@ -18060,6 +18552,13 @@
           </a:solidFill>
           <a:ln/>
         </p:spPr>
+        <p:txBody>
+          <a:bodyPr/>
+          <a:lstStyle/>
+          <a:p>
+            <a:endParaRPr lang="es-AR"/>
+          </a:p>
+        </p:txBody>
       </p:sp>
       <p:sp>
         <p:nvSpPr>
@@ -18082,7 +18581,7 @@
           <a:bodyPr wrap="square" lIns="0" tIns="0" rIns="0" bIns="0" rtlCol="0" anchor="t"/>
           <a:lstStyle/>
           <a:p>
-            <a:pPr indent="0" marL="0">
+            <a:pPr marL="0" indent="0">
               <a:buNone/>
             </a:pPr>
             <a:r>
@@ -18121,6 +18620,13 @@
           </a:solidFill>
           <a:ln/>
         </p:spPr>
+        <p:txBody>
+          <a:bodyPr/>
+          <a:lstStyle/>
+          <a:p>
+            <a:endParaRPr lang="es-AR"/>
+          </a:p>
+        </p:txBody>
       </p:sp>
       <p:sp>
         <p:nvSpPr>
@@ -18143,7 +18649,7 @@
           <a:bodyPr wrap="square" lIns="0" tIns="0" rIns="0" bIns="0" rtlCol="0" anchor="ctr"/>
           <a:lstStyle/>
           <a:p>
-            <a:pPr indent="0" marL="0">
+            <a:pPr marL="0" indent="0">
               <a:buNone/>
             </a:pPr>
             <a:r>
@@ -18182,7 +18688,7 @@
           <a:bodyPr wrap="square" lIns="0" tIns="0" rIns="0" bIns="0" rtlCol="0" anchor="ctr"/>
           <a:lstStyle/>
           <a:p>
-            <a:pPr algn="l" indent="0" marL="0">
+            <a:pPr marL="0" indent="0" algn="l">
               <a:buNone/>
             </a:pPr>
             <a:r>
@@ -18221,7 +18727,7 @@
           <a:bodyPr wrap="square" lIns="0" tIns="0" rIns="0" bIns="0" rtlCol="0" anchor="ctr"/>
           <a:lstStyle/>
           <a:p>
-            <a:pPr algn="r" indent="0" marL="0">
+            <a:pPr marL="0" indent="0" algn="r">
               <a:buNone/>
             </a:pPr>
             <a:r>
@@ -18255,6 +18761,7 @@
         <a:solidFill>
           <a:srgbClr val="FFFFFF"/>
         </a:solidFill>
+        <a:effectLst/>
       </p:bgPr>
     </p:bg>
     <p:spTree>
@@ -18292,11 +18799,11 @@
           <a:bodyPr wrap="square" lIns="0" tIns="0" rIns="0" bIns="0" rtlCol="0" anchor="ctr"/>
           <a:lstStyle/>
           <a:p>
-            <a:pPr algn="l" indent="0" marL="0">
-              <a:buNone/>
-            </a:pPr>
-            <a:r>
-              <a:rPr lang="en-US" sz="1300" b="1" spc="200" kern="0" dirty="0">
+            <a:pPr marL="0" indent="0" algn="l">
+              <a:buNone/>
+            </a:pPr>
+            <a:r>
+              <a:rPr lang="en-US" sz="1300" b="1" kern="0" spc="200" dirty="0">
                 <a:solidFill>
                   <a:srgbClr val="E8A33D"/>
                 </a:solidFill>
@@ -18331,7 +18838,7 @@
           <a:bodyPr wrap="square" lIns="0" tIns="0" rIns="0" bIns="0" rtlCol="0" anchor="ctr"/>
           <a:lstStyle/>
           <a:p>
-            <a:pPr algn="l" indent="0" marL="0">
+            <a:pPr marL="0" indent="0" algn="l">
               <a:buNone/>
             </a:pPr>
             <a:r>
@@ -18375,6 +18882,13 @@
             <a:prstDash val="solid"/>
           </a:ln>
         </p:spPr>
+        <p:txBody>
+          <a:bodyPr/>
+          <a:lstStyle/>
+          <a:p>
+            <a:endParaRPr lang="es-AR"/>
+          </a:p>
+        </p:txBody>
       </p:sp>
       <p:sp>
         <p:nvSpPr>
@@ -18397,7 +18911,7 @@
           <a:bodyPr wrap="square" lIns="0" tIns="0" rIns="0" bIns="0" rtlCol="0" anchor="t"/>
           <a:lstStyle/>
           <a:p>
-            <a:pPr indent="0" marL="0">
+            <a:pPr marL="0" indent="0">
               <a:lnSpc>
                 <a:spcPct val="112000"/>
               </a:lnSpc>
@@ -18417,7 +18931,7 @@
             <a:endParaRPr lang="en-US" sz="1350" dirty="0"/>
           </a:p>
           <a:p>
-            <a:pPr indent="0" marL="0">
+            <a:pPr marL="0" indent="0">
               <a:lnSpc>
                 <a:spcPct val="112000"/>
               </a:lnSpc>
@@ -18437,7 +18951,7 @@
             <a:endParaRPr lang="en-US" sz="1350" dirty="0"/>
           </a:p>
           <a:p>
-            <a:pPr indent="0" marL="0">
+            <a:pPr marL="0" indent="0">
               <a:lnSpc>
                 <a:spcPct val="112000"/>
               </a:lnSpc>
@@ -18457,7 +18971,7 @@
             <a:endParaRPr lang="en-US" sz="1350" dirty="0"/>
           </a:p>
           <a:p>
-            <a:pPr indent="0" marL="0">
+            <a:pPr marL="0" indent="0">
               <a:lnSpc>
                 <a:spcPct val="112000"/>
               </a:lnSpc>
@@ -18477,7 +18991,7 @@
             <a:endParaRPr lang="en-US" sz="1350" dirty="0"/>
           </a:p>
           <a:p>
-            <a:pPr indent="0" marL="0">
+            <a:pPr marL="0" indent="0">
               <a:lnSpc>
                 <a:spcPct val="112000"/>
               </a:lnSpc>
@@ -18497,7 +19011,7 @@
             <a:endParaRPr lang="en-US" sz="1350" dirty="0"/>
           </a:p>
           <a:p>
-            <a:pPr indent="0" marL="0">
+            <a:pPr marL="0" indent="0">
               <a:lnSpc>
                 <a:spcPct val="112000"/>
               </a:lnSpc>
@@ -18517,7 +19031,7 @@
             <a:endParaRPr lang="en-US" sz="1350" dirty="0"/>
           </a:p>
           <a:p>
-            <a:pPr indent="0" marL="0">
+            <a:pPr marL="0" indent="0">
               <a:lnSpc>
                 <a:spcPct val="112000"/>
               </a:lnSpc>
@@ -18537,7 +19051,7 @@
             <a:endParaRPr lang="en-US" sz="1350" dirty="0"/>
           </a:p>
           <a:p>
-            <a:pPr indent="0" marL="0">
+            <a:pPr marL="0" indent="0">
               <a:lnSpc>
                 <a:spcPct val="112000"/>
               </a:lnSpc>
@@ -18546,7 +19060,7 @@
             <a:endParaRPr lang="en-US" sz="1350" dirty="0"/>
           </a:p>
           <a:p>
-            <a:pPr indent="0" marL="0">
+            <a:pPr marL="0" indent="0">
               <a:lnSpc>
                 <a:spcPct val="112000"/>
               </a:lnSpc>
@@ -18566,7 +19080,7 @@
             <a:endParaRPr lang="en-US" sz="1350" dirty="0"/>
           </a:p>
           <a:p>
-            <a:pPr indent="0" marL="0">
+            <a:pPr marL="0" indent="0">
               <a:lnSpc>
                 <a:spcPct val="112000"/>
               </a:lnSpc>
@@ -18586,7 +19100,7 @@
             <a:endParaRPr lang="en-US" sz="1350" dirty="0"/>
           </a:p>
           <a:p>
-            <a:pPr indent="0" marL="0">
+            <a:pPr marL="0" indent="0">
               <a:lnSpc>
                 <a:spcPct val="112000"/>
               </a:lnSpc>
@@ -18606,7 +19120,7 @@
             <a:endParaRPr lang="en-US" sz="1350" dirty="0"/>
           </a:p>
           <a:p>
-            <a:pPr indent="0" marL="0">
+            <a:pPr marL="0" indent="0">
               <a:lnSpc>
                 <a:spcPct val="112000"/>
               </a:lnSpc>
@@ -18648,6 +19162,13 @@
           </a:solidFill>
           <a:ln/>
         </p:spPr>
+        <p:txBody>
+          <a:bodyPr/>
+          <a:lstStyle/>
+          <a:p>
+            <a:endParaRPr lang="es-AR"/>
+          </a:p>
+        </p:txBody>
       </p:sp>
       <p:sp>
         <p:nvSpPr>
@@ -18670,7 +19191,7 @@
           <a:bodyPr wrap="square" lIns="0" tIns="0" rIns="0" bIns="0" rtlCol="0" anchor="ctr"/>
           <a:lstStyle/>
           <a:p>
-            <a:pPr indent="0" marL="0">
+            <a:pPr marL="0" indent="0">
               <a:buNone/>
             </a:pPr>
             <a:r>
@@ -18709,7 +19230,7 @@
           <a:bodyPr wrap="square" lIns="0" tIns="0" rIns="0" bIns="0" rtlCol="0" anchor="ctr"/>
           <a:lstStyle/>
           <a:p>
-            <a:pPr algn="l" indent="0" marL="0">
+            <a:pPr marL="0" indent="0" algn="l">
               <a:buNone/>
             </a:pPr>
             <a:r>
@@ -18748,7 +19269,7 @@
           <a:bodyPr wrap="square" lIns="0" tIns="0" rIns="0" bIns="0" rtlCol="0" anchor="ctr"/>
           <a:lstStyle/>
           <a:p>
-            <a:pPr algn="r" indent="0" marL="0">
+            <a:pPr marL="0" indent="0" algn="r">
               <a:buNone/>
             </a:pPr>
             <a:r>
@@ -18782,6 +19303,7 @@
         <a:solidFill>
           <a:srgbClr val="FFFFFF"/>
         </a:solidFill>
+        <a:effectLst/>
       </p:bgPr>
     </p:bg>
     <p:spTree>
@@ -18819,11 +19341,11 @@
           <a:bodyPr wrap="square" lIns="0" tIns="0" rIns="0" bIns="0" rtlCol="0" anchor="ctr"/>
           <a:lstStyle/>
           <a:p>
-            <a:pPr algn="l" indent="0" marL="0">
-              <a:buNone/>
-            </a:pPr>
-            <a:r>
-              <a:rPr lang="en-US" sz="1300" b="1" spc="200" kern="0" dirty="0">
+            <a:pPr marL="0" indent="0" algn="l">
+              <a:buNone/>
+            </a:pPr>
+            <a:r>
+              <a:rPr lang="en-US" sz="1300" b="1" kern="0" spc="200" dirty="0">
                 <a:solidFill>
                   <a:srgbClr val="E8A33D"/>
                 </a:solidFill>
@@ -18858,7 +19380,7 @@
           <a:bodyPr wrap="square" lIns="0" tIns="0" rIns="0" bIns="0" rtlCol="0" anchor="ctr"/>
           <a:lstStyle/>
           <a:p>
-            <a:pPr algn="l" indent="0" marL="0">
+            <a:pPr marL="0" indent="0" algn="l">
               <a:buNone/>
             </a:pPr>
             <a:r>
@@ -18895,6 +19417,13 @@
           </a:solidFill>
           <a:ln/>
         </p:spPr>
+        <p:txBody>
+          <a:bodyPr/>
+          <a:lstStyle/>
+          <a:p>
+            <a:endParaRPr lang="es-AR"/>
+          </a:p>
+        </p:txBody>
       </p:sp>
       <p:sp>
         <p:nvSpPr>
@@ -18917,7 +19446,7 @@
           <a:bodyPr wrap="square" lIns="0" tIns="0" rIns="0" bIns="0" rtlCol="0" anchor="ctr"/>
           <a:lstStyle/>
           <a:p>
-            <a:pPr algn="ctr" indent="0" marL="0">
+            <a:pPr marL="0" indent="0" algn="ctr">
               <a:buNone/>
             </a:pPr>
             <a:r>
@@ -18956,7 +19485,7 @@
           <a:bodyPr wrap="square" lIns="0" tIns="0" rIns="0" bIns="0" rtlCol="0" anchor="ctr"/>
           <a:lstStyle/>
           <a:p>
-            <a:pPr indent="0" marL="0">
+            <a:pPr marL="0" indent="0">
               <a:buNone/>
             </a:pPr>
             <a:r>
@@ -18993,6 +19522,13 @@
           </a:solidFill>
           <a:ln/>
         </p:spPr>
+        <p:txBody>
+          <a:bodyPr/>
+          <a:lstStyle/>
+          <a:p>
+            <a:endParaRPr lang="es-AR"/>
+          </a:p>
+        </p:txBody>
       </p:sp>
       <p:sp>
         <p:nvSpPr>
@@ -19015,7 +19551,7 @@
           <a:bodyPr wrap="square" lIns="0" tIns="0" rIns="0" bIns="0" rtlCol="0" anchor="ctr"/>
           <a:lstStyle/>
           <a:p>
-            <a:pPr algn="ctr" indent="0" marL="0">
+            <a:pPr marL="0" indent="0" algn="ctr">
               <a:buNone/>
             </a:pPr>
             <a:r>
@@ -19054,7 +19590,7 @@
           <a:bodyPr wrap="square" lIns="0" tIns="0" rIns="0" bIns="0" rtlCol="0" anchor="ctr"/>
           <a:lstStyle/>
           <a:p>
-            <a:pPr indent="0" marL="0">
+            <a:pPr marL="0" indent="0">
               <a:buNone/>
             </a:pPr>
             <a:r>
@@ -19091,6 +19627,13 @@
           </a:solidFill>
           <a:ln/>
         </p:spPr>
+        <p:txBody>
+          <a:bodyPr/>
+          <a:lstStyle/>
+          <a:p>
+            <a:endParaRPr lang="es-AR"/>
+          </a:p>
+        </p:txBody>
       </p:sp>
       <p:sp>
         <p:nvSpPr>
@@ -19113,7 +19656,7 @@
           <a:bodyPr wrap="square" lIns="0" tIns="0" rIns="0" bIns="0" rtlCol="0" anchor="ctr"/>
           <a:lstStyle/>
           <a:p>
-            <a:pPr algn="ctr" indent="0" marL="0">
+            <a:pPr marL="0" indent="0" algn="ctr">
               <a:buNone/>
             </a:pPr>
             <a:r>
@@ -19152,7 +19695,7 @@
           <a:bodyPr wrap="square" lIns="0" tIns="0" rIns="0" bIns="0" rtlCol="0" anchor="ctr"/>
           <a:lstStyle/>
           <a:p>
-            <a:pPr indent="0" marL="0">
+            <a:pPr marL="0" indent="0">
               <a:buNone/>
             </a:pPr>
             <a:r>
@@ -19189,6 +19732,13 @@
           </a:solidFill>
           <a:ln/>
         </p:spPr>
+        <p:txBody>
+          <a:bodyPr/>
+          <a:lstStyle/>
+          <a:p>
+            <a:endParaRPr lang="es-AR"/>
+          </a:p>
+        </p:txBody>
       </p:sp>
       <p:sp>
         <p:nvSpPr>
@@ -19211,7 +19761,7 @@
           <a:bodyPr wrap="square" lIns="0" tIns="0" rIns="0" bIns="0" rtlCol="0" anchor="ctr"/>
           <a:lstStyle/>
           <a:p>
-            <a:pPr algn="ctr" indent="0" marL="0">
+            <a:pPr marL="0" indent="0" algn="ctr">
               <a:buNone/>
             </a:pPr>
             <a:r>
@@ -19250,7 +19800,7 @@
           <a:bodyPr wrap="square" lIns="0" tIns="0" rIns="0" bIns="0" rtlCol="0" anchor="ctr"/>
           <a:lstStyle/>
           <a:p>
-            <a:pPr indent="0" marL="0">
+            <a:pPr marL="0" indent="0">
               <a:buNone/>
             </a:pPr>
             <a:r>
@@ -19287,6 +19837,13 @@
           </a:solidFill>
           <a:ln/>
         </p:spPr>
+        <p:txBody>
+          <a:bodyPr/>
+          <a:lstStyle/>
+          <a:p>
+            <a:endParaRPr lang="es-AR"/>
+          </a:p>
+        </p:txBody>
       </p:sp>
       <p:sp>
         <p:nvSpPr>
@@ -19309,7 +19866,7 @@
           <a:bodyPr wrap="square" lIns="0" tIns="0" rIns="0" bIns="0" rtlCol="0" anchor="ctr"/>
           <a:lstStyle/>
           <a:p>
-            <a:pPr algn="ctr" indent="0" marL="0">
+            <a:pPr marL="0" indent="0" algn="ctr">
               <a:buNone/>
             </a:pPr>
             <a:r>
@@ -19348,7 +19905,7 @@
           <a:bodyPr wrap="square" lIns="0" tIns="0" rIns="0" bIns="0" rtlCol="0" anchor="ctr"/>
           <a:lstStyle/>
           <a:p>
-            <a:pPr indent="0" marL="0">
+            <a:pPr marL="0" indent="0">
               <a:buNone/>
             </a:pPr>
             <a:r>
@@ -19387,7 +19944,7 @@
           <a:bodyPr wrap="square" lIns="0" tIns="0" rIns="0" bIns="0" rtlCol="0" anchor="ctr"/>
           <a:lstStyle/>
           <a:p>
-            <a:pPr algn="l" indent="0" marL="0">
+            <a:pPr marL="0" indent="0" algn="l">
               <a:buNone/>
             </a:pPr>
             <a:r>
@@ -19426,7 +19983,7 @@
           <a:bodyPr wrap="square" lIns="0" tIns="0" rIns="0" bIns="0" rtlCol="0" anchor="ctr"/>
           <a:lstStyle/>
           <a:p>
-            <a:pPr algn="r" indent="0" marL="0">
+            <a:pPr marL="0" indent="0" algn="r">
               <a:buNone/>
             </a:pPr>
             <a:r>
@@ -19460,6 +20017,7 @@
         <a:solidFill>
           <a:srgbClr val="1E2761"/>
         </a:solidFill>
+        <a:effectLst/>
       </p:bgPr>
     </p:bg>
     <p:spTree>
@@ -19495,6 +20053,13 @@
           </a:solidFill>
           <a:ln/>
         </p:spPr>
+        <p:txBody>
+          <a:bodyPr/>
+          <a:lstStyle/>
+          <a:p>
+            <a:endParaRPr lang="es-AR"/>
+          </a:p>
+        </p:txBody>
       </p:sp>
       <p:sp>
         <p:nvSpPr>
@@ -19517,11 +20082,11 @@
           <a:bodyPr wrap="square" lIns="0" tIns="0" rIns="0" bIns="0" rtlCol="0" anchor="ctr"/>
           <a:lstStyle/>
           <a:p>
-            <a:pPr indent="0" marL="0">
-              <a:buNone/>
-            </a:pPr>
-            <a:r>
-              <a:rPr lang="en-US" sz="1400" b="1" spc="200" kern="0" dirty="0">
+            <a:pPr marL="0" indent="0">
+              <a:buNone/>
+            </a:pPr>
+            <a:r>
+              <a:rPr lang="en-US" sz="1400" b="1" kern="0" spc="200" dirty="0">
                 <a:solidFill>
                   <a:srgbClr val="E8A33D"/>
                 </a:solidFill>
@@ -19556,7 +20121,7 @@
           <a:bodyPr wrap="square" lIns="0" tIns="0" rIns="0" bIns="0" rtlCol="0" anchor="ctr"/>
           <a:lstStyle/>
           <a:p>
-            <a:pPr indent="0" marL="0">
+            <a:pPr marL="0" indent="0">
               <a:buNone/>
             </a:pPr>
             <a:r>
@@ -19593,6 +20158,13 @@
           </a:solidFill>
           <a:ln/>
         </p:spPr>
+        <p:txBody>
+          <a:bodyPr/>
+          <a:lstStyle/>
+          <a:p>
+            <a:endParaRPr lang="es-AR"/>
+          </a:p>
+        </p:txBody>
       </p:sp>
       <p:sp>
         <p:nvSpPr>
@@ -19615,7 +20187,7 @@
           <a:bodyPr wrap="square" lIns="0" tIns="0" rIns="0" bIns="0" rtlCol="0" anchor="t"/>
           <a:lstStyle/>
           <a:p>
-            <a:pPr indent="0" marL="0">
+            <a:pPr marL="0" indent="0">
               <a:buNone/>
             </a:pPr>
             <a:r>
@@ -19652,6 +20224,13 @@
           </a:solidFill>
           <a:ln/>
         </p:spPr>
+        <p:txBody>
+          <a:bodyPr/>
+          <a:lstStyle/>
+          <a:p>
+            <a:endParaRPr lang="es-AR"/>
+          </a:p>
+        </p:txBody>
       </p:sp>
       <p:sp>
         <p:nvSpPr>
@@ -19674,7 +20253,7 @@
           <a:bodyPr wrap="square" lIns="0" tIns="0" rIns="0" bIns="0" rtlCol="0" anchor="t"/>
           <a:lstStyle/>
           <a:p>
-            <a:pPr indent="0" marL="0">
+            <a:pPr marL="0" indent="0">
               <a:buNone/>
             </a:pPr>
             <a:r>
@@ -19711,6 +20290,13 @@
           </a:solidFill>
           <a:ln/>
         </p:spPr>
+        <p:txBody>
+          <a:bodyPr/>
+          <a:lstStyle/>
+          <a:p>
+            <a:endParaRPr lang="es-AR"/>
+          </a:p>
+        </p:txBody>
       </p:sp>
       <p:sp>
         <p:nvSpPr>
@@ -19733,7 +20319,7 @@
           <a:bodyPr wrap="square" lIns="0" tIns="0" rIns="0" bIns="0" rtlCol="0" anchor="t"/>
           <a:lstStyle/>
           <a:p>
-            <a:pPr indent="0" marL="0">
+            <a:pPr marL="0" indent="0">
               <a:buNone/>
             </a:pPr>
             <a:r>
@@ -19770,6 +20356,13 @@
           </a:solidFill>
           <a:ln/>
         </p:spPr>
+        <p:txBody>
+          <a:bodyPr/>
+          <a:lstStyle/>
+          <a:p>
+            <a:endParaRPr lang="es-AR"/>
+          </a:p>
+        </p:txBody>
       </p:sp>
       <p:sp>
         <p:nvSpPr>
@@ -19792,7 +20385,7 @@
           <a:bodyPr wrap="square" lIns="0" tIns="0" rIns="0" bIns="0" rtlCol="0" anchor="t"/>
           <a:lstStyle/>
           <a:p>
-            <a:pPr indent="0" marL="0">
+            <a:pPr marL="0" indent="0">
               <a:buNone/>
             </a:pPr>
             <a:r>
@@ -19831,7 +20424,7 @@
           <a:bodyPr wrap="square" lIns="0" tIns="0" rIns="0" bIns="0" rtlCol="0" anchor="ctr"/>
           <a:lstStyle/>
           <a:p>
-            <a:pPr indent="0" marL="0">
+            <a:pPr marL="0" indent="0">
               <a:buNone/>
             </a:pPr>
             <a:r>
@@ -19870,7 +20463,7 @@
           <a:bodyPr wrap="square" lIns="0" tIns="0" rIns="0" bIns="0" rtlCol="0" anchor="ctr"/>
           <a:lstStyle/>
           <a:p>
-            <a:pPr algn="l" indent="0" marL="0">
+            <a:pPr marL="0" indent="0" algn="l">
               <a:buNone/>
             </a:pPr>
             <a:r>
@@ -19909,7 +20502,7 @@
           <a:bodyPr wrap="square" lIns="0" tIns="0" rIns="0" bIns="0" rtlCol="0" anchor="ctr"/>
           <a:lstStyle/>
           <a:p>
-            <a:pPr algn="r" indent="0" marL="0">
+            <a:pPr marL="0" indent="0" algn="r">
               <a:buNone/>
             </a:pPr>
             <a:r>
@@ -19943,6 +20536,7 @@
         <a:solidFill>
           <a:srgbClr val="FFFFFF"/>
         </a:solidFill>
+        <a:effectLst/>
       </p:bgPr>
     </p:bg>
     <p:spTree>
@@ -19980,11 +20574,11 @@
           <a:bodyPr wrap="square" lIns="0" tIns="0" rIns="0" bIns="0" rtlCol="0" anchor="ctr"/>
           <a:lstStyle/>
           <a:p>
-            <a:pPr algn="l" indent="0" marL="0">
-              <a:buNone/>
-            </a:pPr>
-            <a:r>
-              <a:rPr lang="en-US" sz="1300" b="1" spc="200" kern="0" dirty="0">
+            <a:pPr marL="0" indent="0" algn="l">
+              <a:buNone/>
+            </a:pPr>
+            <a:r>
+              <a:rPr lang="en-US" sz="1300" b="1" kern="0" spc="200" dirty="0">
                 <a:solidFill>
                   <a:srgbClr val="E8A33D"/>
                 </a:solidFill>
@@ -20019,7 +20613,7 @@
           <a:bodyPr wrap="square" lIns="0" tIns="0" rIns="0" bIns="0" rtlCol="0" anchor="ctr"/>
           <a:lstStyle/>
           <a:p>
-            <a:pPr algn="l" indent="0" marL="0">
+            <a:pPr marL="0" indent="0" algn="l">
               <a:buNone/>
             </a:pPr>
             <a:r>
@@ -20045,8 +20639,8 @@
         </p:nvSpPr>
         <p:spPr>
           <a:xfrm>
-            <a:off x="548640" y="1600200"/>
-            <a:ext cx="11064240" cy="457200"/>
+            <a:off x="548641" y="1600200"/>
+            <a:ext cx="5061552" cy="457200"/>
           </a:xfrm>
           <a:prstGeom prst="rect">
             <a:avLst/>
@@ -20056,6 +20650,13 @@
           </a:solidFill>
           <a:ln/>
         </p:spPr>
+        <p:txBody>
+          <a:bodyPr/>
+          <a:lstStyle/>
+          <a:p>
+            <a:endParaRPr lang="es-AR"/>
+          </a:p>
+        </p:txBody>
       </p:sp>
       <p:sp>
         <p:nvSpPr>
@@ -20078,7 +20679,7 @@
           <a:bodyPr wrap="square" lIns="0" tIns="0" rIns="0" bIns="0" rtlCol="0" anchor="ctr"/>
           <a:lstStyle/>
           <a:p>
-            <a:pPr indent="0" marL="0">
+            <a:pPr marL="0" indent="0">
               <a:buNone/>
             </a:pPr>
             <a:r>
@@ -20104,7 +20705,7 @@
         </p:nvSpPr>
         <p:spPr>
           <a:xfrm>
-            <a:off x="3840480" y="1600200"/>
+            <a:off x="2669705" y="1600200"/>
             <a:ext cx="1463040" cy="457200"/>
           </a:xfrm>
           <a:prstGeom prst="rect">
@@ -20117,7 +20718,7 @@
           <a:bodyPr wrap="square" lIns="0" tIns="0" rIns="0" bIns="0" rtlCol="0" anchor="ctr"/>
           <a:lstStyle/>
           <a:p>
-            <a:pPr indent="0" marL="0">
+            <a:pPr marL="0" indent="0">
               <a:buNone/>
             </a:pPr>
             <a:r>
@@ -20143,8 +20744,8 @@
         </p:nvSpPr>
         <p:spPr>
           <a:xfrm>
-            <a:off x="5303520" y="1600200"/>
-            <a:ext cx="6492240" cy="457200"/>
+            <a:off x="3884917" y="1600200"/>
+            <a:ext cx="1725275" cy="457200"/>
           </a:xfrm>
           <a:prstGeom prst="rect">
             <a:avLst/>
@@ -20156,7 +20757,7 @@
           <a:bodyPr wrap="square" lIns="0" tIns="0" rIns="0" bIns="0" rtlCol="0" anchor="ctr"/>
           <a:lstStyle/>
           <a:p>
-            <a:pPr indent="0" marL="0">
+            <a:pPr marL="0" indent="0">
               <a:buNone/>
             </a:pPr>
             <a:r>
@@ -20182,8 +20783,8 @@
         </p:nvSpPr>
         <p:spPr>
           <a:xfrm>
-            <a:off x="548640" y="2057400"/>
-            <a:ext cx="11064240" cy="777240"/>
+            <a:off x="548641" y="2057400"/>
+            <a:ext cx="5086610" cy="777240"/>
           </a:xfrm>
           <a:prstGeom prst="rect">
             <a:avLst/>
@@ -20193,6 +20794,13 @@
           </a:solidFill>
           <a:ln/>
         </p:spPr>
+        <p:txBody>
+          <a:bodyPr/>
+          <a:lstStyle/>
+          <a:p>
+            <a:endParaRPr lang="es-AR"/>
+          </a:p>
+        </p:txBody>
       </p:sp>
       <p:sp>
         <p:nvSpPr>
@@ -20203,7 +20811,7 @@
         <p:spPr>
           <a:xfrm>
             <a:off x="731520" y="2057400"/>
-            <a:ext cx="3108960" cy="777240"/>
+            <a:ext cx="1533116" cy="777240"/>
           </a:xfrm>
           <a:prstGeom prst="rect">
             <a:avLst/>
@@ -20215,7 +20823,7 @@
           <a:bodyPr wrap="square" lIns="0" tIns="0" rIns="0" bIns="0" rtlCol="0" anchor="ctr"/>
           <a:lstStyle/>
           <a:p>
-            <a:pPr indent="0" marL="0">
+            <a:pPr marL="0" indent="0">
               <a:buNone/>
             </a:pPr>
             <a:r>
@@ -20241,7 +20849,7 @@
         </p:nvSpPr>
         <p:spPr>
           <a:xfrm>
-            <a:off x="3840480" y="2057400"/>
+            <a:off x="2669705" y="2057400"/>
             <a:ext cx="1463040" cy="777240"/>
           </a:xfrm>
           <a:prstGeom prst="rect">
@@ -20254,7 +20862,7 @@
           <a:bodyPr wrap="square" lIns="0" tIns="0" rIns="0" bIns="0" rtlCol="0" anchor="ctr"/>
           <a:lstStyle/>
           <a:p>
-            <a:pPr indent="0" marL="0">
+            <a:pPr marL="0" indent="0">
               <a:buNone/>
             </a:pPr>
             <a:r>
@@ -20280,8 +20888,8 @@
         </p:nvSpPr>
         <p:spPr>
           <a:xfrm>
-            <a:off x="5303520" y="2057400"/>
-            <a:ext cx="6492240" cy="777240"/>
+            <a:off x="3884917" y="2057400"/>
+            <a:ext cx="1997137" cy="777240"/>
           </a:xfrm>
           <a:prstGeom prst="rect">
             <a:avLst/>
@@ -20293,7 +20901,7 @@
           <a:bodyPr wrap="square" lIns="0" tIns="0" rIns="0" bIns="0" rtlCol="0" anchor="ctr"/>
           <a:lstStyle/>
           <a:p>
-            <a:pPr indent="0" marL="0">
+            <a:pPr marL="0" indent="0">
               <a:buNone/>
             </a:pPr>
             <a:r>
@@ -20319,8 +20927,8 @@
         </p:nvSpPr>
         <p:spPr>
           <a:xfrm>
-            <a:off x="548640" y="2834640"/>
-            <a:ext cx="11064240" cy="777240"/>
+            <a:off x="548641" y="2834640"/>
+            <a:ext cx="5086610" cy="777240"/>
           </a:xfrm>
           <a:prstGeom prst="rect">
             <a:avLst/>
@@ -20330,6 +20938,13 @@
           </a:solidFill>
           <a:ln/>
         </p:spPr>
+        <p:txBody>
+          <a:bodyPr/>
+          <a:lstStyle/>
+          <a:p>
+            <a:endParaRPr lang="es-AR"/>
+          </a:p>
+        </p:txBody>
       </p:sp>
       <p:sp>
         <p:nvSpPr>
@@ -20352,7 +20967,7 @@
           <a:bodyPr wrap="square" lIns="0" tIns="0" rIns="0" bIns="0" rtlCol="0" anchor="ctr"/>
           <a:lstStyle/>
           <a:p>
-            <a:pPr indent="0" marL="0">
+            <a:pPr marL="0" indent="0">
               <a:buNone/>
             </a:pPr>
             <a:r>
@@ -20378,7 +20993,7 @@
         </p:nvSpPr>
         <p:spPr>
           <a:xfrm>
-            <a:off x="3840480" y="2834640"/>
+            <a:off x="2669705" y="2834640"/>
             <a:ext cx="1463040" cy="777240"/>
           </a:xfrm>
           <a:prstGeom prst="rect">
@@ -20391,7 +21006,7 @@
           <a:bodyPr wrap="square" lIns="0" tIns="0" rIns="0" bIns="0" rtlCol="0" anchor="ctr"/>
           <a:lstStyle/>
           <a:p>
-            <a:pPr indent="0" marL="0">
+            <a:pPr marL="0" indent="0">
               <a:buNone/>
             </a:pPr>
             <a:r>
@@ -20417,8 +21032,8 @@
         </p:nvSpPr>
         <p:spPr>
           <a:xfrm>
-            <a:off x="5303520" y="2834640"/>
-            <a:ext cx="6492240" cy="777240"/>
+            <a:off x="3884917" y="2834640"/>
+            <a:ext cx="1725275" cy="777240"/>
           </a:xfrm>
           <a:prstGeom prst="rect">
             <a:avLst/>
@@ -20430,7 +21045,7 @@
           <a:bodyPr wrap="square" lIns="0" tIns="0" rIns="0" bIns="0" rtlCol="0" anchor="ctr"/>
           <a:lstStyle/>
           <a:p>
-            <a:pPr indent="0" marL="0">
+            <a:pPr marL="0" indent="0">
               <a:buNone/>
             </a:pPr>
             <a:r>
@@ -20456,8 +21071,8 @@
         </p:nvSpPr>
         <p:spPr>
           <a:xfrm>
-            <a:off x="548640" y="3611880"/>
-            <a:ext cx="11064240" cy="777240"/>
+            <a:off x="548641" y="3611880"/>
+            <a:ext cx="5086610" cy="777240"/>
           </a:xfrm>
           <a:prstGeom prst="rect">
             <a:avLst/>
@@ -20467,6 +21082,13 @@
           </a:solidFill>
           <a:ln/>
         </p:spPr>
+        <p:txBody>
+          <a:bodyPr/>
+          <a:lstStyle/>
+          <a:p>
+            <a:endParaRPr lang="es-AR"/>
+          </a:p>
+        </p:txBody>
       </p:sp>
       <p:sp>
         <p:nvSpPr>
@@ -20489,7 +21111,7 @@
           <a:bodyPr wrap="square" lIns="0" tIns="0" rIns="0" bIns="0" rtlCol="0" anchor="ctr"/>
           <a:lstStyle/>
           <a:p>
-            <a:pPr indent="0" marL="0">
+            <a:pPr marL="0" indent="0">
               <a:buNone/>
             </a:pPr>
             <a:r>
@@ -20501,7 +21123,23 @@
                 <a:ea typeface="Courier New" pitchFamily="34" charset="-122"/>
                 <a:cs typeface="Courier New" pitchFamily="34" charset="-120"/>
               </a:rPr>
-              <a:t>Cola con Prioridad (Clase 3)</a:t>
+              <a:t>Cola con Prioridad</a:t>
+            </a:r>
+          </a:p>
+          <a:p>
+            <a:pPr marL="0" indent="0">
+              <a:buNone/>
+            </a:pPr>
+            <a:r>
+              <a:rPr lang="en-US" sz="1300" dirty="0">
+                <a:solidFill>
+                  <a:srgbClr val="1C1C2A"/>
+                </a:solidFill>
+                <a:latin typeface="Courier New" pitchFamily="34" charset="0"/>
+                <a:ea typeface="Courier New" pitchFamily="34" charset="-122"/>
+                <a:cs typeface="Courier New" pitchFamily="34" charset="-120"/>
+              </a:rPr>
+              <a:t>(Clase 3)</a:t>
             </a:r>
             <a:endParaRPr lang="en-US" sz="1300" dirty="0"/>
           </a:p>
@@ -20515,7 +21153,7 @@
         </p:nvSpPr>
         <p:spPr>
           <a:xfrm>
-            <a:off x="3840480" y="3611880"/>
+            <a:off x="2669705" y="3611880"/>
             <a:ext cx="1463040" cy="777240"/>
           </a:xfrm>
           <a:prstGeom prst="rect">
@@ -20528,7 +21166,7 @@
           <a:bodyPr wrap="square" lIns="0" tIns="0" rIns="0" bIns="0" rtlCol="0" anchor="ctr"/>
           <a:lstStyle/>
           <a:p>
-            <a:pPr indent="0" marL="0">
+            <a:pPr marL="0" indent="0">
               <a:buNone/>
             </a:pPr>
             <a:r>
@@ -20554,8 +21192,8 @@
         </p:nvSpPr>
         <p:spPr>
           <a:xfrm>
-            <a:off x="5303520" y="3611880"/>
-            <a:ext cx="6492240" cy="777240"/>
+            <a:off x="3884917" y="3611880"/>
+            <a:ext cx="1725275" cy="777240"/>
           </a:xfrm>
           <a:prstGeom prst="rect">
             <a:avLst/>
@@ -20567,7 +21205,7 @@
           <a:bodyPr wrap="square" lIns="0" tIns="0" rIns="0" bIns="0" rtlCol="0" anchor="ctr"/>
           <a:lstStyle/>
           <a:p>
-            <a:pPr indent="0" marL="0">
+            <a:pPr marL="0" indent="0">
               <a:buNone/>
             </a:pPr>
             <a:r>
@@ -20594,7 +21232,7 @@
         <p:spPr>
           <a:xfrm>
             <a:off x="548640" y="4389120"/>
-            <a:ext cx="11064240" cy="777240"/>
+            <a:ext cx="7468399" cy="777240"/>
           </a:xfrm>
           <a:prstGeom prst="rect">
             <a:avLst/>
@@ -20604,6 +21242,13 @@
           </a:solidFill>
           <a:ln/>
         </p:spPr>
+        <p:txBody>
+          <a:bodyPr/>
+          <a:lstStyle/>
+          <a:p>
+            <a:endParaRPr lang="es-AR"/>
+          </a:p>
+        </p:txBody>
       </p:sp>
       <p:sp>
         <p:nvSpPr>
@@ -20626,7 +21271,7 @@
           <a:bodyPr wrap="square" lIns="0" tIns="0" rIns="0" bIns="0" rtlCol="0" anchor="ctr"/>
           <a:lstStyle/>
           <a:p>
-            <a:pPr indent="0" marL="0">
+            <a:pPr marL="0" indent="0">
               <a:buNone/>
             </a:pPr>
             <a:r>
@@ -20652,7 +21297,7 @@
         </p:nvSpPr>
         <p:spPr>
           <a:xfrm>
-            <a:off x="3840480" y="4389120"/>
+            <a:off x="2669705" y="4389120"/>
             <a:ext cx="1463040" cy="777240"/>
           </a:xfrm>
           <a:prstGeom prst="rect">
@@ -20665,7 +21310,7 @@
           <a:bodyPr wrap="square" lIns="0" tIns="0" rIns="0" bIns="0" rtlCol="0" anchor="ctr"/>
           <a:lstStyle/>
           <a:p>
-            <a:pPr indent="0" marL="0">
+            <a:pPr marL="0" indent="0">
               <a:buNone/>
             </a:pPr>
             <a:r>
@@ -20691,8 +21336,8 @@
         </p:nvSpPr>
         <p:spPr>
           <a:xfrm>
-            <a:off x="5303520" y="4389120"/>
-            <a:ext cx="6492240" cy="777240"/>
+            <a:off x="3884917" y="4389120"/>
+            <a:ext cx="1725275" cy="777240"/>
           </a:xfrm>
           <a:prstGeom prst="rect">
             <a:avLst/>
@@ -20704,7 +21349,7 @@
           <a:bodyPr wrap="square" lIns="0" tIns="0" rIns="0" bIns="0" rtlCol="0" anchor="ctr"/>
           <a:lstStyle/>
           <a:p>
-            <a:pPr indent="0" marL="0">
+            <a:pPr marL="0" indent="0">
               <a:buNone/>
             </a:pPr>
             <a:r>
@@ -20730,8 +21375,8 @@
         </p:nvSpPr>
         <p:spPr>
           <a:xfrm>
-            <a:off x="548640" y="5303520"/>
-            <a:ext cx="11064240" cy="457200"/>
+            <a:off x="548640" y="5303519"/>
+            <a:ext cx="7134029" cy="1140009"/>
           </a:xfrm>
           <a:prstGeom prst="rect">
             <a:avLst/>
@@ -20743,7 +21388,7 @@
           <a:bodyPr wrap="square" lIns="0" tIns="0" rIns="0" bIns="0" rtlCol="0" anchor="ctr"/>
           <a:lstStyle/>
           <a:p>
-            <a:pPr indent="0" marL="0">
+            <a:pPr marL="0" indent="0">
               <a:buNone/>
             </a:pPr>
             <a:r>
@@ -20782,7 +21427,7 @@
           <a:bodyPr wrap="square" lIns="0" tIns="0" rIns="0" bIns="0" rtlCol="0" anchor="ctr"/>
           <a:lstStyle/>
           <a:p>
-            <a:pPr algn="l" indent="0" marL="0">
+            <a:pPr marL="0" indent="0" algn="l">
               <a:buNone/>
             </a:pPr>
             <a:r>
@@ -20821,7 +21466,7 @@
           <a:bodyPr wrap="square" lIns="0" tIns="0" rIns="0" bIns="0" rtlCol="0" anchor="ctr"/>
           <a:lstStyle/>
           <a:p>
-            <a:pPr algn="r" indent="0" marL="0">
+            <a:pPr marL="0" indent="0" algn="r">
               <a:buNone/>
             </a:pPr>
             <a:r>
@@ -20839,6 +21484,36 @@
           </a:p>
         </p:txBody>
       </p:sp>
+      <p:pic>
+        <p:nvPicPr>
+          <p:cNvPr id="28" name="Imagen 27">
+            <a:extLst>
+              <a:ext uri="{FF2B5EF4-FFF2-40B4-BE49-F238E27FC236}">
+                <a16:creationId xmlns:a16="http://schemas.microsoft.com/office/drawing/2014/main" id="{A25C908F-5C03-7BF4-5C6E-13D4D0834FBF}"/>
+              </a:ext>
+            </a:extLst>
+          </p:cNvPr>
+          <p:cNvPicPr>
+            <a:picLocks noChangeAspect="1"/>
+          </p:cNvPicPr>
+          <p:nvPr/>
+        </p:nvPicPr>
+        <p:blipFill>
+          <a:blip r:embed="rId3"/>
+          <a:stretch>
+            <a:fillRect/>
+          </a:stretch>
+        </p:blipFill>
+        <p:spPr>
+          <a:xfrm>
+            <a:off x="5876501" y="1602867"/>
+            <a:ext cx="5620598" cy="3743406"/>
+          </a:xfrm>
+          <a:prstGeom prst="rect">
+            <a:avLst/>
+          </a:prstGeom>
+        </p:spPr>
+      </p:pic>
     </p:spTree>
   </p:cSld>
   <p:clrMapOvr>
@@ -20855,6 +21530,7 @@
         <a:solidFill>
           <a:srgbClr val="FFFFFF"/>
         </a:solidFill>
+        <a:effectLst/>
       </p:bgPr>
     </p:bg>
     <p:spTree>
@@ -20892,11 +21568,11 @@
           <a:bodyPr wrap="square" lIns="0" tIns="0" rIns="0" bIns="0" rtlCol="0" anchor="ctr"/>
           <a:lstStyle/>
           <a:p>
-            <a:pPr algn="l" indent="0" marL="0">
-              <a:buNone/>
-            </a:pPr>
-            <a:r>
-              <a:rPr lang="en-US" sz="1300" b="1" spc="200" kern="0" dirty="0">
+            <a:pPr marL="0" indent="0" algn="l">
+              <a:buNone/>
+            </a:pPr>
+            <a:r>
+              <a:rPr lang="en-US" sz="1300" b="1" kern="0" spc="200" dirty="0">
                 <a:solidFill>
                   <a:srgbClr val="E8A33D"/>
                 </a:solidFill>
@@ -20931,7 +21607,7 @@
           <a:bodyPr wrap="square" lIns="0" tIns="0" rIns="0" bIns="0" rtlCol="0" anchor="ctr"/>
           <a:lstStyle/>
           <a:p>
-            <a:pPr algn="l" indent="0" marL="0">
+            <a:pPr marL="0" indent="0" algn="l">
               <a:buNone/>
             </a:pPr>
             <a:r>
@@ -20975,6 +21651,13 @@
             <a:prstDash val="solid"/>
           </a:ln>
         </p:spPr>
+        <p:txBody>
+          <a:bodyPr/>
+          <a:lstStyle/>
+          <a:p>
+            <a:endParaRPr lang="es-AR"/>
+          </a:p>
+        </p:txBody>
       </p:sp>
       <p:sp>
         <p:nvSpPr>
@@ -20997,7 +21680,7 @@
           <a:bodyPr wrap="square" lIns="0" tIns="0" rIns="0" bIns="0" rtlCol="0" anchor="t"/>
           <a:lstStyle/>
           <a:p>
-            <a:pPr indent="0" marL="0">
+            <a:pPr marL="0" indent="0">
               <a:lnSpc>
                 <a:spcPct val="115000"/>
               </a:lnSpc>
@@ -21017,7 +21700,7 @@
             <a:endParaRPr lang="en-US" sz="1350" dirty="0"/>
           </a:p>
           <a:p>
-            <a:pPr indent="0" marL="0">
+            <a:pPr marL="0" indent="0">
               <a:lnSpc>
                 <a:spcPct val="115000"/>
               </a:lnSpc>
@@ -21037,7 +21720,7 @@
             <a:endParaRPr lang="en-US" sz="1350" dirty="0"/>
           </a:p>
           <a:p>
-            <a:pPr indent="0" marL="0">
+            <a:pPr marL="0" indent="0">
               <a:lnSpc>
                 <a:spcPct val="115000"/>
               </a:lnSpc>
@@ -21057,7 +21740,7 @@
             <a:endParaRPr lang="en-US" sz="1350" dirty="0"/>
           </a:p>
           <a:p>
-            <a:pPr indent="0" marL="0">
+            <a:pPr marL="0" indent="0">
               <a:lnSpc>
                 <a:spcPct val="115000"/>
               </a:lnSpc>
@@ -21077,7 +21760,7 @@
             <a:endParaRPr lang="en-US" sz="1350" dirty="0"/>
           </a:p>
           <a:p>
-            <a:pPr indent="0" marL="0">
+            <a:pPr marL="0" indent="0">
               <a:lnSpc>
                 <a:spcPct val="115000"/>
               </a:lnSpc>
@@ -21097,7 +21780,7 @@
             <a:endParaRPr lang="en-US" sz="1350" dirty="0"/>
           </a:p>
           <a:p>
-            <a:pPr indent="0" marL="0">
+            <a:pPr marL="0" indent="0">
               <a:lnSpc>
                 <a:spcPct val="115000"/>
               </a:lnSpc>
@@ -21117,7 +21800,7 @@
             <a:endParaRPr lang="en-US" sz="1350" dirty="0"/>
           </a:p>
           <a:p>
-            <a:pPr indent="0" marL="0">
+            <a:pPr marL="0" indent="0">
               <a:lnSpc>
                 <a:spcPct val="115000"/>
               </a:lnSpc>
@@ -21137,7 +21820,7 @@
             <a:endParaRPr lang="en-US" sz="1350" dirty="0"/>
           </a:p>
           <a:p>
-            <a:pPr indent="0" marL="0">
+            <a:pPr marL="0" indent="0">
               <a:lnSpc>
                 <a:spcPct val="115000"/>
               </a:lnSpc>
@@ -21157,7 +21840,7 @@
             <a:endParaRPr lang="en-US" sz="1350" dirty="0"/>
           </a:p>
           <a:p>
-            <a:pPr indent="0" marL="0">
+            <a:pPr marL="0" indent="0">
               <a:lnSpc>
                 <a:spcPct val="115000"/>
               </a:lnSpc>
@@ -21177,7 +21860,7 @@
             <a:endParaRPr lang="en-US" sz="1350" dirty="0"/>
           </a:p>
           <a:p>
-            <a:pPr indent="0" marL="0">
+            <a:pPr marL="0" indent="0">
               <a:lnSpc>
                 <a:spcPct val="115000"/>
               </a:lnSpc>
@@ -21197,7 +21880,7 @@
             <a:endParaRPr lang="en-US" sz="1350" dirty="0"/>
           </a:p>
           <a:p>
-            <a:pPr indent="0" marL="0">
+            <a:pPr marL="0" indent="0">
               <a:lnSpc>
                 <a:spcPct val="115000"/>
               </a:lnSpc>
@@ -21217,7 +21900,7 @@
             <a:endParaRPr lang="en-US" sz="1350" dirty="0"/>
           </a:p>
           <a:p>
-            <a:pPr indent="0" marL="0">
+            <a:pPr marL="0" indent="0">
               <a:lnSpc>
                 <a:spcPct val="115000"/>
               </a:lnSpc>
@@ -21237,7 +21920,7 @@
             <a:endParaRPr lang="en-US" sz="1350" dirty="0"/>
           </a:p>
           <a:p>
-            <a:pPr indent="0" marL="0">
+            <a:pPr marL="0" indent="0">
               <a:lnSpc>
                 <a:spcPct val="115000"/>
               </a:lnSpc>
@@ -21257,7 +21940,7 @@
             <a:endParaRPr lang="en-US" sz="1350" dirty="0"/>
           </a:p>
           <a:p>
-            <a:pPr indent="0" marL="0">
+            <a:pPr marL="0" indent="0">
               <a:lnSpc>
                 <a:spcPct val="115000"/>
               </a:lnSpc>
@@ -21304,6 +21987,13 @@
             <a:prstDash val="solid"/>
           </a:ln>
         </p:spPr>
+        <p:txBody>
+          <a:bodyPr/>
+          <a:lstStyle/>
+          <a:p>
+            <a:endParaRPr lang="es-AR"/>
+          </a:p>
+        </p:txBody>
       </p:sp>
       <p:sp>
         <p:nvSpPr>
@@ -21326,7 +22016,7 @@
           <a:bodyPr wrap="square" lIns="0" tIns="0" rIns="0" bIns="0" rtlCol="0" anchor="ctr"/>
           <a:lstStyle/>
           <a:p>
-            <a:pPr indent="0" marL="0">
+            <a:pPr marL="0" indent="0">
               <a:buNone/>
             </a:pPr>
             <a:r>
@@ -21365,7 +22055,7 @@
           <a:bodyPr wrap="square" lIns="0" tIns="0" rIns="0" bIns="0" rtlCol="0" anchor="t"/>
           <a:lstStyle/>
           <a:p>
-            <a:pPr indent="0" marL="0">
+            <a:pPr marL="0" indent="0">
               <a:lnSpc>
                 <a:spcPct val="120000"/>
               </a:lnSpc>
@@ -21382,12 +22072,6 @@
               </a:rPr>
               <a:t>Orden: </a:t>
             </a:r>
-            <a:pPr indent="0" marL="0">
-              <a:lnSpc>
-                <a:spcPct val="120000"/>
-              </a:lnSpc>
-              <a:buNone/>
-            </a:pPr>
             <a:r>
               <a:rPr lang="en-US" sz="1250" dirty="0">
                 <a:solidFill>
@@ -21402,7 +22086,7 @@
             <a:endParaRPr lang="en-US" sz="1250" dirty="0"/>
           </a:p>
           <a:p>
-            <a:pPr indent="0" marL="0">
+            <a:pPr marL="0" indent="0">
               <a:lnSpc>
                 <a:spcPct val="120000"/>
               </a:lnSpc>
@@ -21411,7 +22095,7 @@
             <a:endParaRPr lang="en-US" sz="1250" dirty="0"/>
           </a:p>
           <a:p>
-            <a:pPr indent="0" marL="0">
+            <a:pPr marL="0" indent="0">
               <a:lnSpc>
                 <a:spcPct val="120000"/>
               </a:lnSpc>
@@ -21428,12 +22112,6 @@
               </a:rPr>
               <a:t>Implementación estática: </a:t>
             </a:r>
-            <a:pPr indent="0" marL="0">
-              <a:lnSpc>
-                <a:spcPct val="120000"/>
-              </a:lnSpc>
-              <a:buNone/>
-            </a:pPr>
             <a:r>
               <a:rPr lang="en-US" sz="1250" dirty="0">
                 <a:solidFill>
@@ -21448,7 +22126,7 @@
             <a:endParaRPr lang="en-US" sz="1250" dirty="0"/>
           </a:p>
           <a:p>
-            <a:pPr indent="0" marL="0">
+            <a:pPr marL="0" indent="0">
               <a:lnSpc>
                 <a:spcPct val="120000"/>
               </a:lnSpc>
@@ -21457,7 +22135,7 @@
             <a:endParaRPr lang="en-US" sz="1250" dirty="0"/>
           </a:p>
           <a:p>
-            <a:pPr indent="0" marL="0">
+            <a:pPr marL="0" indent="0">
               <a:lnSpc>
                 <a:spcPct val="120000"/>
               </a:lnSpc>
@@ -21474,12 +22152,6 @@
               </a:rPr>
               <a:t>Costo: </a:t>
             </a:r>
-            <a:pPr indent="0" marL="0">
-              <a:lnSpc>
-                <a:spcPct val="120000"/>
-              </a:lnSpc>
-              <a:buNone/>
-            </a:pPr>
             <a:r>
               <a:rPr lang="en-US" sz="1250" dirty="0">
                 <a:solidFill>
@@ -21494,7 +22166,7 @@
             <a:endParaRPr lang="en-US" sz="1250" dirty="0"/>
           </a:p>
           <a:p>
-            <a:pPr indent="0" marL="0">
+            <a:pPr marL="0" indent="0">
               <a:lnSpc>
                 <a:spcPct val="120000"/>
               </a:lnSpc>
@@ -21525,7 +22197,7 @@
           <a:bodyPr wrap="square" lIns="0" tIns="0" rIns="0" bIns="0" rtlCol="0" anchor="ctr"/>
           <a:lstStyle/>
           <a:p>
-            <a:pPr algn="l" indent="0" marL="0">
+            <a:pPr marL="0" indent="0" algn="l">
               <a:buNone/>
             </a:pPr>
             <a:r>
@@ -21564,7 +22236,7 @@
           <a:bodyPr wrap="square" lIns="0" tIns="0" rIns="0" bIns="0" rtlCol="0" anchor="ctr"/>
           <a:lstStyle/>
           <a:p>
-            <a:pPr algn="r" indent="0" marL="0">
+            <a:pPr marL="0" indent="0" algn="r">
               <a:buNone/>
             </a:pPr>
             <a:r>
@@ -21598,6 +22270,7 @@
         <a:solidFill>
           <a:srgbClr val="FFFFFF"/>
         </a:solidFill>
+        <a:effectLst/>
       </p:bgPr>
     </p:bg>
     <p:spTree>
@@ -21635,11 +22308,11 @@
           <a:bodyPr wrap="square" lIns="0" tIns="0" rIns="0" bIns="0" rtlCol="0" anchor="ctr"/>
           <a:lstStyle/>
           <a:p>
-            <a:pPr algn="l" indent="0" marL="0">
-              <a:buNone/>
-            </a:pPr>
-            <a:r>
-              <a:rPr lang="en-US" sz="1300" b="1" spc="200" kern="0" dirty="0">
+            <a:pPr marL="0" indent="0" algn="l">
+              <a:buNone/>
+            </a:pPr>
+            <a:r>
+              <a:rPr lang="en-US" sz="1300" b="1" kern="0" spc="200" dirty="0">
                 <a:solidFill>
                   <a:srgbClr val="E8A33D"/>
                 </a:solidFill>
@@ -21674,7 +22347,7 @@
           <a:bodyPr wrap="square" lIns="0" tIns="0" rIns="0" bIns="0" rtlCol="0" anchor="ctr"/>
           <a:lstStyle/>
           <a:p>
-            <a:pPr algn="l" indent="0" marL="0">
+            <a:pPr marL="0" indent="0" algn="l">
               <a:buNone/>
             </a:pPr>
             <a:r>
@@ -21718,6 +22391,13 @@
             <a:prstDash val="solid"/>
           </a:ln>
         </p:spPr>
+        <p:txBody>
+          <a:bodyPr/>
+          <a:lstStyle/>
+          <a:p>
+            <a:endParaRPr lang="es-AR"/>
+          </a:p>
+        </p:txBody>
       </p:sp>
       <p:sp>
         <p:nvSpPr>
@@ -21740,7 +22420,7 @@
           <a:bodyPr wrap="square" lIns="0" tIns="0" rIns="0" bIns="0" rtlCol="0" anchor="t"/>
           <a:lstStyle/>
           <a:p>
-            <a:pPr indent="0" marL="0">
+            <a:pPr marL="0" indent="0">
               <a:lnSpc>
                 <a:spcPct val="112000"/>
               </a:lnSpc>
@@ -21760,7 +22440,7 @@
             <a:endParaRPr lang="en-US" sz="1350" dirty="0"/>
           </a:p>
           <a:p>
-            <a:pPr indent="0" marL="0">
+            <a:pPr marL="0" indent="0">
               <a:lnSpc>
                 <a:spcPct val="112000"/>
               </a:lnSpc>
@@ -21780,7 +22460,7 @@
             <a:endParaRPr lang="en-US" sz="1350" dirty="0"/>
           </a:p>
           <a:p>
-            <a:pPr indent="0" marL="0">
+            <a:pPr marL="0" indent="0">
               <a:lnSpc>
                 <a:spcPct val="112000"/>
               </a:lnSpc>
@@ -21789,7 +22469,7 @@
             <a:endParaRPr lang="en-US" sz="1350" dirty="0"/>
           </a:p>
           <a:p>
-            <a:pPr indent="0" marL="0">
+            <a:pPr marL="0" indent="0">
               <a:lnSpc>
                 <a:spcPct val="112000"/>
               </a:lnSpc>
@@ -21809,7 +22489,7 @@
             <a:endParaRPr lang="en-US" sz="1350" dirty="0"/>
           </a:p>
           <a:p>
-            <a:pPr indent="0" marL="0">
+            <a:pPr marL="0" indent="0">
               <a:lnSpc>
                 <a:spcPct val="112000"/>
               </a:lnSpc>
@@ -21829,7 +22509,7 @@
             <a:endParaRPr lang="en-US" sz="1350" dirty="0"/>
           </a:p>
           <a:p>
-            <a:pPr indent="0" marL="0">
+            <a:pPr marL="0" indent="0">
               <a:lnSpc>
                 <a:spcPct val="112000"/>
               </a:lnSpc>
@@ -21849,7 +22529,7 @@
             <a:endParaRPr lang="en-US" sz="1350" dirty="0"/>
           </a:p>
           <a:p>
-            <a:pPr indent="0" marL="0">
+            <a:pPr marL="0" indent="0">
               <a:lnSpc>
                 <a:spcPct val="112000"/>
               </a:lnSpc>
@@ -21869,7 +22549,7 @@
             <a:endParaRPr lang="en-US" sz="1350" dirty="0"/>
           </a:p>
           <a:p>
-            <a:pPr indent="0" marL="0">
+            <a:pPr marL="0" indent="0">
               <a:lnSpc>
                 <a:spcPct val="112000"/>
               </a:lnSpc>
@@ -21878,7 +22558,7 @@
             <a:endParaRPr lang="en-US" sz="1350" dirty="0"/>
           </a:p>
           <a:p>
-            <a:pPr indent="0" marL="0">
+            <a:pPr marL="0" indent="0">
               <a:lnSpc>
                 <a:spcPct val="112000"/>
               </a:lnSpc>
@@ -21898,7 +22578,7 @@
             <a:endParaRPr lang="en-US" sz="1350" dirty="0"/>
           </a:p>
           <a:p>
-            <a:pPr indent="0" marL="0">
+            <a:pPr marL="0" indent="0">
               <a:lnSpc>
                 <a:spcPct val="112000"/>
               </a:lnSpc>
@@ -21918,7 +22598,7 @@
             <a:endParaRPr lang="en-US" sz="1350" dirty="0"/>
           </a:p>
           <a:p>
-            <a:pPr indent="0" marL="0">
+            <a:pPr marL="0" indent="0">
               <a:lnSpc>
                 <a:spcPct val="112000"/>
               </a:lnSpc>
@@ -21938,7 +22618,7 @@
             <a:endParaRPr lang="en-US" sz="1350" dirty="0"/>
           </a:p>
           <a:p>
-            <a:pPr indent="0" marL="0">
+            <a:pPr marL="0" indent="0">
               <a:lnSpc>
                 <a:spcPct val="112000"/>
               </a:lnSpc>
@@ -21958,7 +22638,7 @@
             <a:endParaRPr lang="en-US" sz="1350" dirty="0"/>
           </a:p>
           <a:p>
-            <a:pPr indent="0" marL="0">
+            <a:pPr marL="0" indent="0">
               <a:lnSpc>
                 <a:spcPct val="112000"/>
               </a:lnSpc>
@@ -21967,7 +22647,7 @@
             <a:endParaRPr lang="en-US" sz="1350" dirty="0"/>
           </a:p>
           <a:p>
-            <a:pPr indent="0" marL="0">
+            <a:pPr marL="0" indent="0">
               <a:lnSpc>
                 <a:spcPct val="112000"/>
               </a:lnSpc>
@@ -22009,6 +22689,13 @@
           </a:solidFill>
           <a:ln/>
         </p:spPr>
+        <p:txBody>
+          <a:bodyPr/>
+          <a:lstStyle/>
+          <a:p>
+            <a:endParaRPr lang="es-AR"/>
+          </a:p>
+        </p:txBody>
       </p:sp>
       <p:sp>
         <p:nvSpPr>
@@ -22031,7 +22718,7 @@
           <a:bodyPr wrap="square" lIns="0" tIns="0" rIns="0" bIns="0" rtlCol="0" anchor="ctr"/>
           <a:lstStyle/>
           <a:p>
-            <a:pPr indent="0" marL="0">
+            <a:pPr marL="0" indent="0">
               <a:buNone/>
             </a:pPr>
             <a:r>
@@ -22070,7 +22757,7 @@
           <a:bodyPr wrap="square" lIns="0" tIns="0" rIns="0" bIns="0" rtlCol="0" anchor="ctr"/>
           <a:lstStyle/>
           <a:p>
-            <a:pPr algn="l" indent="0" marL="0">
+            <a:pPr marL="0" indent="0" algn="l">
               <a:buNone/>
             </a:pPr>
             <a:r>
@@ -22109,7 +22796,7 @@
           <a:bodyPr wrap="square" lIns="0" tIns="0" rIns="0" bIns="0" rtlCol="0" anchor="ctr"/>
           <a:lstStyle/>
           <a:p>
-            <a:pPr algn="r" indent="0" marL="0">
+            <a:pPr marL="0" indent="0" algn="r">
               <a:buNone/>
             </a:pPr>
             <a:r>
@@ -22143,6 +22830,7 @@
         <a:solidFill>
           <a:srgbClr val="FFFFFF"/>
         </a:solidFill>
+        <a:effectLst/>
       </p:bgPr>
     </p:bg>
     <p:spTree>
@@ -22180,11 +22868,11 @@
           <a:bodyPr wrap="square" lIns="0" tIns="0" rIns="0" bIns="0" rtlCol="0" anchor="ctr"/>
           <a:lstStyle/>
           <a:p>
-            <a:pPr algn="l" indent="0" marL="0">
-              <a:buNone/>
-            </a:pPr>
-            <a:r>
-              <a:rPr lang="en-US" sz="1300" b="1" spc="200" kern="0" dirty="0">
+            <a:pPr marL="0" indent="0" algn="l">
+              <a:buNone/>
+            </a:pPr>
+            <a:r>
+              <a:rPr lang="en-US" sz="1300" b="1" kern="0" spc="200" dirty="0">
                 <a:solidFill>
                   <a:srgbClr val="E8A33D"/>
                 </a:solidFill>
@@ -22219,7 +22907,7 @@
           <a:bodyPr wrap="square" lIns="0" tIns="0" rIns="0" bIns="0" rtlCol="0" anchor="ctr"/>
           <a:lstStyle/>
           <a:p>
-            <a:pPr algn="l" indent="0" marL="0">
+            <a:pPr marL="0" indent="0" algn="l">
               <a:buNone/>
             </a:pPr>
             <a:r>
@@ -22263,6 +22951,13 @@
             <a:prstDash val="solid"/>
           </a:ln>
         </p:spPr>
+        <p:txBody>
+          <a:bodyPr/>
+          <a:lstStyle/>
+          <a:p>
+            <a:endParaRPr lang="es-AR"/>
+          </a:p>
+        </p:txBody>
       </p:sp>
       <p:sp>
         <p:nvSpPr>
@@ -22285,7 +22980,7 @@
           <a:bodyPr wrap="square" lIns="0" tIns="0" rIns="0" bIns="0" rtlCol="0" anchor="t"/>
           <a:lstStyle/>
           <a:p>
-            <a:pPr indent="0" marL="0">
+            <a:pPr marL="0" indent="0">
               <a:lnSpc>
                 <a:spcPct val="115000"/>
               </a:lnSpc>
@@ -22305,7 +23000,7 @@
             <a:endParaRPr lang="en-US" sz="1350" dirty="0"/>
           </a:p>
           <a:p>
-            <a:pPr indent="0" marL="0">
+            <a:pPr marL="0" indent="0">
               <a:lnSpc>
                 <a:spcPct val="115000"/>
               </a:lnSpc>
@@ -22325,7 +23020,7 @@
             <a:endParaRPr lang="en-US" sz="1350" dirty="0"/>
           </a:p>
           <a:p>
-            <a:pPr indent="0" marL="0">
+            <a:pPr marL="0" indent="0">
               <a:lnSpc>
                 <a:spcPct val="115000"/>
               </a:lnSpc>
@@ -22345,7 +23040,7 @@
             <a:endParaRPr lang="en-US" sz="1350" dirty="0"/>
           </a:p>
           <a:p>
-            <a:pPr indent="0" marL="0">
+            <a:pPr marL="0" indent="0">
               <a:lnSpc>
                 <a:spcPct val="115000"/>
               </a:lnSpc>
@@ -22365,7 +23060,7 @@
             <a:endParaRPr lang="en-US" sz="1350" dirty="0"/>
           </a:p>
           <a:p>
-            <a:pPr indent="0" marL="0">
+            <a:pPr marL="0" indent="0">
               <a:lnSpc>
                 <a:spcPct val="115000"/>
               </a:lnSpc>
@@ -22385,7 +23080,7 @@
             <a:endParaRPr lang="en-US" sz="1350" dirty="0"/>
           </a:p>
           <a:p>
-            <a:pPr indent="0" marL="0">
+            <a:pPr marL="0" indent="0">
               <a:lnSpc>
                 <a:spcPct val="115000"/>
               </a:lnSpc>
@@ -22405,7 +23100,7 @@
             <a:endParaRPr lang="en-US" sz="1350" dirty="0"/>
           </a:p>
           <a:p>
-            <a:pPr indent="0" marL="0">
+            <a:pPr marL="0" indent="0">
               <a:lnSpc>
                 <a:spcPct val="115000"/>
               </a:lnSpc>
@@ -22425,7 +23120,7 @@
             <a:endParaRPr lang="en-US" sz="1350" dirty="0"/>
           </a:p>
           <a:p>
-            <a:pPr indent="0" marL="0">
+            <a:pPr marL="0" indent="0">
               <a:lnSpc>
                 <a:spcPct val="115000"/>
               </a:lnSpc>
@@ -22445,7 +23140,7 @@
             <a:endParaRPr lang="en-US" sz="1350" dirty="0"/>
           </a:p>
           <a:p>
-            <a:pPr indent="0" marL="0">
+            <a:pPr marL="0" indent="0">
               <a:lnSpc>
                 <a:spcPct val="115000"/>
               </a:lnSpc>
@@ -22465,7 +23160,7 @@
             <a:endParaRPr lang="en-US" sz="1350" dirty="0"/>
           </a:p>
           <a:p>
-            <a:pPr indent="0" marL="0">
+            <a:pPr marL="0" indent="0">
               <a:lnSpc>
                 <a:spcPct val="115000"/>
               </a:lnSpc>
@@ -22485,7 +23180,7 @@
             <a:endParaRPr lang="en-US" sz="1350" dirty="0"/>
           </a:p>
           <a:p>
-            <a:pPr indent="0" marL="0">
+            <a:pPr marL="0" indent="0">
               <a:lnSpc>
                 <a:spcPct val="115000"/>
               </a:lnSpc>
@@ -22505,7 +23200,7 @@
             <a:endParaRPr lang="en-US" sz="1350" dirty="0"/>
           </a:p>
           <a:p>
-            <a:pPr indent="0" marL="0">
+            <a:pPr marL="0" indent="0">
               <a:lnSpc>
                 <a:spcPct val="115000"/>
               </a:lnSpc>
@@ -22525,7 +23220,7 @@
             <a:endParaRPr lang="en-US" sz="1350" dirty="0"/>
           </a:p>
           <a:p>
-            <a:pPr indent="0" marL="0">
+            <a:pPr marL="0" indent="0">
               <a:lnSpc>
                 <a:spcPct val="115000"/>
               </a:lnSpc>
@@ -22545,7 +23240,7 @@
             <a:endParaRPr lang="en-US" sz="1350" dirty="0"/>
           </a:p>
           <a:p>
-            <a:pPr indent="0" marL="0">
+            <a:pPr marL="0" indent="0">
               <a:lnSpc>
                 <a:spcPct val="115000"/>
               </a:lnSpc>
@@ -22592,6 +23287,13 @@
             <a:prstDash val="solid"/>
           </a:ln>
         </p:spPr>
+        <p:txBody>
+          <a:bodyPr/>
+          <a:lstStyle/>
+          <a:p>
+            <a:endParaRPr lang="es-AR"/>
+          </a:p>
+        </p:txBody>
       </p:sp>
       <p:sp>
         <p:nvSpPr>
@@ -22614,7 +23316,7 @@
           <a:bodyPr wrap="square" lIns="0" tIns="0" rIns="0" bIns="0" rtlCol="0" anchor="ctr"/>
           <a:lstStyle/>
           <a:p>
-            <a:pPr indent="0" marL="0">
+            <a:pPr marL="0" indent="0">
               <a:buNone/>
             </a:pPr>
             <a:r>
@@ -22653,7 +23355,7 @@
           <a:bodyPr wrap="square" lIns="0" tIns="0" rIns="0" bIns="0" rtlCol="0" anchor="t"/>
           <a:lstStyle/>
           <a:p>
-            <a:pPr indent="0" marL="0">
+            <a:pPr marL="0" indent="0">
               <a:lnSpc>
                 <a:spcPct val="120000"/>
               </a:lnSpc>
@@ -22670,12 +23372,6 @@
               </a:rPr>
               <a:t>Orden: </a:t>
             </a:r>
-            <a:pPr indent="0" marL="0">
-              <a:lnSpc>
-                <a:spcPct val="120000"/>
-              </a:lnSpc>
-              <a:buNone/>
-            </a:pPr>
             <a:r>
               <a:rPr lang="en-US" sz="1250" dirty="0">
                 <a:solidFill>
@@ -22690,7 +23386,7 @@
             <a:endParaRPr lang="en-US" sz="1250" dirty="0"/>
           </a:p>
           <a:p>
-            <a:pPr indent="0" marL="0">
+            <a:pPr marL="0" indent="0">
               <a:lnSpc>
                 <a:spcPct val="120000"/>
               </a:lnSpc>
@@ -22699,7 +23395,7 @@
             <a:endParaRPr lang="en-US" sz="1250" dirty="0"/>
           </a:p>
           <a:p>
-            <a:pPr indent="0" marL="0">
+            <a:pPr marL="0" indent="0">
               <a:lnSpc>
                 <a:spcPct val="120000"/>
               </a:lnSpc>
@@ -22716,12 +23412,6 @@
               </a:rPr>
               <a:t>Implementación estática circular: </a:t>
             </a:r>
-            <a:pPr indent="0" marL="0">
-              <a:lnSpc>
-                <a:spcPct val="120000"/>
-              </a:lnSpc>
-              <a:buNone/>
-            </a:pPr>
             <a:r>
               <a:rPr lang="en-US" sz="1250" dirty="0">
                 <a:solidFill>
@@ -22736,7 +23426,7 @@
             <a:endParaRPr lang="en-US" sz="1250" dirty="0"/>
           </a:p>
           <a:p>
-            <a:pPr indent="0" marL="0">
+            <a:pPr marL="0" indent="0">
               <a:lnSpc>
                 <a:spcPct val="120000"/>
               </a:lnSpc>
@@ -22745,7 +23435,7 @@
             <a:endParaRPr lang="en-US" sz="1250" dirty="0"/>
           </a:p>
           <a:p>
-            <a:pPr indent="0" marL="0">
+            <a:pPr marL="0" indent="0">
               <a:lnSpc>
                 <a:spcPct val="120000"/>
               </a:lnSpc>
@@ -22762,12 +23452,6 @@
               </a:rPr>
               <a:t>Costo: </a:t>
             </a:r>
-            <a:pPr indent="0" marL="0">
-              <a:lnSpc>
-                <a:spcPct val="120000"/>
-              </a:lnSpc>
-              <a:buNone/>
-            </a:pPr>
             <a:r>
               <a:rPr lang="en-US" sz="1250" dirty="0">
                 <a:solidFill>
@@ -22782,7 +23466,7 @@
             <a:endParaRPr lang="en-US" sz="1250" dirty="0"/>
           </a:p>
           <a:p>
-            <a:pPr indent="0" marL="0">
+            <a:pPr marL="0" indent="0">
               <a:lnSpc>
                 <a:spcPct val="120000"/>
               </a:lnSpc>
@@ -22813,7 +23497,7 @@
           <a:bodyPr wrap="square" lIns="0" tIns="0" rIns="0" bIns="0" rtlCol="0" anchor="ctr"/>
           <a:lstStyle/>
           <a:p>
-            <a:pPr algn="l" indent="0" marL="0">
+            <a:pPr marL="0" indent="0" algn="l">
               <a:buNone/>
             </a:pPr>
             <a:r>
@@ -22852,7 +23536,7 @@
           <a:bodyPr wrap="square" lIns="0" tIns="0" rIns="0" bIns="0" rtlCol="0" anchor="ctr"/>
           <a:lstStyle/>
           <a:p>
-            <a:pPr algn="r" indent="0" marL="0">
+            <a:pPr marL="0" indent="0" algn="r">
               <a:buNone/>
             </a:pPr>
             <a:r>
@@ -22886,6 +23570,7 @@
         <a:solidFill>
           <a:srgbClr val="FFFFFF"/>
         </a:solidFill>
+        <a:effectLst/>
       </p:bgPr>
     </p:bg>
     <p:spTree>
@@ -22923,11 +23608,11 @@
           <a:bodyPr wrap="square" lIns="0" tIns="0" rIns="0" bIns="0" rtlCol="0" anchor="ctr"/>
           <a:lstStyle/>
           <a:p>
-            <a:pPr algn="l" indent="0" marL="0">
-              <a:buNone/>
-            </a:pPr>
-            <a:r>
-              <a:rPr lang="en-US" sz="1300" b="1" spc="200" kern="0" dirty="0">
+            <a:pPr marL="0" indent="0" algn="l">
+              <a:buNone/>
+            </a:pPr>
+            <a:r>
+              <a:rPr lang="en-US" sz="1300" b="1" kern="0" spc="200" dirty="0">
                 <a:solidFill>
                   <a:srgbClr val="E8A33D"/>
                 </a:solidFill>
@@ -22962,7 +23647,7 @@
           <a:bodyPr wrap="square" lIns="0" tIns="0" rIns="0" bIns="0" rtlCol="0" anchor="ctr"/>
           <a:lstStyle/>
           <a:p>
-            <a:pPr algn="l" indent="0" marL="0">
+            <a:pPr marL="0" indent="0" algn="l">
               <a:buNone/>
             </a:pPr>
             <a:r>
@@ -23006,6 +23691,13 @@
             <a:prstDash val="solid"/>
           </a:ln>
         </p:spPr>
+        <p:txBody>
+          <a:bodyPr/>
+          <a:lstStyle/>
+          <a:p>
+            <a:endParaRPr lang="es-AR"/>
+          </a:p>
+        </p:txBody>
       </p:sp>
       <p:sp>
         <p:nvSpPr>
@@ -23028,7 +23720,7 @@
           <a:bodyPr wrap="square" lIns="0" tIns="0" rIns="0" bIns="0" rtlCol="0" anchor="t"/>
           <a:lstStyle/>
           <a:p>
-            <a:pPr indent="0" marL="0">
+            <a:pPr marL="0" indent="0">
               <a:lnSpc>
                 <a:spcPct val="112000"/>
               </a:lnSpc>
@@ -23048,7 +23740,7 @@
             <a:endParaRPr lang="en-US" sz="1350" dirty="0"/>
           </a:p>
           <a:p>
-            <a:pPr indent="0" marL="0">
+            <a:pPr marL="0" indent="0">
               <a:lnSpc>
                 <a:spcPct val="112000"/>
               </a:lnSpc>
@@ -23068,7 +23760,7 @@
             <a:endParaRPr lang="en-US" sz="1350" dirty="0"/>
           </a:p>
           <a:p>
-            <a:pPr indent="0" marL="0">
+            <a:pPr marL="0" indent="0">
               <a:lnSpc>
                 <a:spcPct val="112000"/>
               </a:lnSpc>
@@ -23077,7 +23769,7 @@
             <a:endParaRPr lang="en-US" sz="1350" dirty="0"/>
           </a:p>
           <a:p>
-            <a:pPr indent="0" marL="0">
+            <a:pPr marL="0" indent="0">
               <a:lnSpc>
                 <a:spcPct val="112000"/>
               </a:lnSpc>
@@ -23097,7 +23789,7 @@
             <a:endParaRPr lang="en-US" sz="1350" dirty="0"/>
           </a:p>
           <a:p>
-            <a:pPr indent="0" marL="0">
+            <a:pPr marL="0" indent="0">
               <a:lnSpc>
                 <a:spcPct val="112000"/>
               </a:lnSpc>
@@ -23117,7 +23809,7 @@
             <a:endParaRPr lang="en-US" sz="1350" dirty="0"/>
           </a:p>
           <a:p>
-            <a:pPr indent="0" marL="0">
+            <a:pPr marL="0" indent="0">
               <a:lnSpc>
                 <a:spcPct val="112000"/>
               </a:lnSpc>
@@ -23137,7 +23829,7 @@
             <a:endParaRPr lang="en-US" sz="1350" dirty="0"/>
           </a:p>
           <a:p>
-            <a:pPr indent="0" marL="0">
+            <a:pPr marL="0" indent="0">
               <a:lnSpc>
                 <a:spcPct val="112000"/>
               </a:lnSpc>
@@ -23157,7 +23849,7 @@
             <a:endParaRPr lang="en-US" sz="1350" dirty="0"/>
           </a:p>
           <a:p>
-            <a:pPr indent="0" marL="0">
+            <a:pPr marL="0" indent="0">
               <a:lnSpc>
                 <a:spcPct val="112000"/>
               </a:lnSpc>
@@ -23177,7 +23869,7 @@
             <a:endParaRPr lang="en-US" sz="1350" dirty="0"/>
           </a:p>
           <a:p>
-            <a:pPr indent="0" marL="0">
+            <a:pPr marL="0" indent="0">
               <a:lnSpc>
                 <a:spcPct val="112000"/>
               </a:lnSpc>
@@ -23186,7 +23878,7 @@
             <a:endParaRPr lang="en-US" sz="1350" dirty="0"/>
           </a:p>
           <a:p>
-            <a:pPr indent="0" marL="0">
+            <a:pPr marL="0" indent="0">
               <a:lnSpc>
                 <a:spcPct val="112000"/>
               </a:lnSpc>
@@ -23206,7 +23898,7 @@
             <a:endParaRPr lang="en-US" sz="1350" dirty="0"/>
           </a:p>
           <a:p>
-            <a:pPr indent="0" marL="0">
+            <a:pPr marL="0" indent="0">
               <a:lnSpc>
                 <a:spcPct val="112000"/>
               </a:lnSpc>
@@ -23226,7 +23918,7 @@
             <a:endParaRPr lang="en-US" sz="1350" dirty="0"/>
           </a:p>
           <a:p>
-            <a:pPr indent="0" marL="0">
+            <a:pPr marL="0" indent="0">
               <a:lnSpc>
                 <a:spcPct val="112000"/>
               </a:lnSpc>
@@ -23246,7 +23938,7 @@
             <a:endParaRPr lang="en-US" sz="1350" dirty="0"/>
           </a:p>
           <a:p>
-            <a:pPr indent="0" marL="0">
+            <a:pPr marL="0" indent="0">
               <a:lnSpc>
                 <a:spcPct val="112000"/>
               </a:lnSpc>
@@ -23266,7 +23958,7 @@
             <a:endParaRPr lang="en-US" sz="1350" dirty="0"/>
           </a:p>
           <a:p>
-            <a:pPr indent="0" marL="0">
+            <a:pPr marL="0" indent="0">
               <a:lnSpc>
                 <a:spcPct val="112000"/>
               </a:lnSpc>
@@ -23286,7 +23978,7 @@
             <a:endParaRPr lang="en-US" sz="1350" dirty="0"/>
           </a:p>
           <a:p>
-            <a:pPr indent="0" marL="0">
+            <a:pPr marL="0" indent="0">
               <a:lnSpc>
                 <a:spcPct val="112000"/>
               </a:lnSpc>
@@ -23328,6 +24020,13 @@
           </a:solidFill>
           <a:ln/>
         </p:spPr>
+        <p:txBody>
+          <a:bodyPr/>
+          <a:lstStyle/>
+          <a:p>
+            <a:endParaRPr lang="es-AR"/>
+          </a:p>
+        </p:txBody>
       </p:sp>
       <p:sp>
         <p:nvSpPr>
@@ -23350,7 +24049,7 @@
           <a:bodyPr wrap="square" lIns="0" tIns="0" rIns="0" bIns="0" rtlCol="0" anchor="ctr"/>
           <a:lstStyle/>
           <a:p>
-            <a:pPr indent="0" marL="0">
+            <a:pPr marL="0" indent="0">
               <a:buNone/>
             </a:pPr>
             <a:r>
@@ -23389,7 +24088,7 @@
           <a:bodyPr wrap="square" lIns="0" tIns="0" rIns="0" bIns="0" rtlCol="0" anchor="ctr"/>
           <a:lstStyle/>
           <a:p>
-            <a:pPr algn="l" indent="0" marL="0">
+            <a:pPr marL="0" indent="0" algn="l">
               <a:buNone/>
             </a:pPr>
             <a:r>
@@ -23428,7 +24127,7 @@
           <a:bodyPr wrap="square" lIns="0" tIns="0" rIns="0" bIns="0" rtlCol="0" anchor="ctr"/>
           <a:lstStyle/>
           <a:p>
-            <a:pPr algn="r" indent="0" marL="0">
+            <a:pPr marL="0" indent="0" algn="r">
               <a:buNone/>
             </a:pPr>
             <a:r>
@@ -23462,6 +24161,7 @@
         <a:solidFill>
           <a:srgbClr val="FFFFFF"/>
         </a:solidFill>
+        <a:effectLst/>
       </p:bgPr>
     </p:bg>
     <p:spTree>
@@ -23499,11 +24199,11 @@
           <a:bodyPr wrap="square" lIns="0" tIns="0" rIns="0" bIns="0" rtlCol="0" anchor="ctr"/>
           <a:lstStyle/>
           <a:p>
-            <a:pPr algn="l" indent="0" marL="0">
-              <a:buNone/>
-            </a:pPr>
-            <a:r>
-              <a:rPr lang="en-US" sz="1300" b="1" spc="200" kern="0" dirty="0">
+            <a:pPr marL="0" indent="0" algn="l">
+              <a:buNone/>
+            </a:pPr>
+            <a:r>
+              <a:rPr lang="en-US" sz="1300" b="1" kern="0" spc="200" dirty="0">
                 <a:solidFill>
                   <a:srgbClr val="E8A33D"/>
                 </a:solidFill>
@@ -23538,7 +24238,7 @@
           <a:bodyPr wrap="square" lIns="0" tIns="0" rIns="0" bIns="0" rtlCol="0" anchor="ctr"/>
           <a:lstStyle/>
           <a:p>
-            <a:pPr algn="l" indent="0" marL="0">
+            <a:pPr marL="0" indent="0" algn="l">
               <a:buNone/>
             </a:pPr>
             <a:r>
@@ -23582,6 +24282,13 @@
             <a:prstDash val="solid"/>
           </a:ln>
         </p:spPr>
+        <p:txBody>
+          <a:bodyPr/>
+          <a:lstStyle/>
+          <a:p>
+            <a:endParaRPr lang="es-AR"/>
+          </a:p>
+        </p:txBody>
       </p:sp>
       <p:sp>
         <p:nvSpPr>
@@ -23604,7 +24311,7 @@
           <a:bodyPr wrap="square" lIns="0" tIns="0" rIns="0" bIns="0" rtlCol="0" anchor="t"/>
           <a:lstStyle/>
           <a:p>
-            <a:pPr indent="0" marL="0">
+            <a:pPr marL="0" indent="0">
               <a:lnSpc>
                 <a:spcPct val="115000"/>
               </a:lnSpc>
@@ -23624,7 +24331,7 @@
             <a:endParaRPr lang="en-US" sz="1350" dirty="0"/>
           </a:p>
           <a:p>
-            <a:pPr indent="0" marL="0">
+            <a:pPr marL="0" indent="0">
               <a:lnSpc>
                 <a:spcPct val="115000"/>
               </a:lnSpc>
@@ -23644,7 +24351,7 @@
             <a:endParaRPr lang="en-US" sz="1350" dirty="0"/>
           </a:p>
           <a:p>
-            <a:pPr indent="0" marL="0">
+            <a:pPr marL="0" indent="0">
               <a:lnSpc>
                 <a:spcPct val="115000"/>
               </a:lnSpc>
@@ -23664,7 +24371,7 @@
             <a:endParaRPr lang="en-US" sz="1350" dirty="0"/>
           </a:p>
           <a:p>
-            <a:pPr indent="0" marL="0">
+            <a:pPr marL="0" indent="0">
               <a:lnSpc>
                 <a:spcPct val="115000"/>
               </a:lnSpc>
@@ -23684,7 +24391,7 @@
             <a:endParaRPr lang="en-US" sz="1350" dirty="0"/>
           </a:p>
           <a:p>
-            <a:pPr indent="0" marL="0">
+            <a:pPr marL="0" indent="0">
               <a:lnSpc>
                 <a:spcPct val="115000"/>
               </a:lnSpc>
@@ -23699,12 +24406,34 @@
                 <a:ea typeface="Courier New" pitchFamily="34" charset="-122"/>
                 <a:cs typeface="Courier New" pitchFamily="34" charset="-120"/>
               </a:rPr>
-              <a:t>  insertar(c: CCP, x: elemento, prioridad: entero)</a:t>
-            </a:r>
-            <a:endParaRPr lang="en-US" sz="1350" dirty="0"/>
-          </a:p>
-          <a:p>
-            <a:pPr indent="0" marL="0">
+              <a:t>  insertar(c: CCP, x: elemento, </a:t>
+            </a:r>
+            <a:r>
+              <a:rPr lang="en-US" sz="1350" dirty="0" err="1">
+                <a:solidFill>
+                  <a:srgbClr val="1C1C2A"/>
+                </a:solidFill>
+                <a:latin typeface="Courier New" pitchFamily="34" charset="0"/>
+                <a:ea typeface="Courier New" pitchFamily="34" charset="-122"/>
+                <a:cs typeface="Courier New" pitchFamily="34" charset="-120"/>
+              </a:rPr>
+              <a:t>prioridad</a:t>
+            </a:r>
+            <a:r>
+              <a:rPr lang="en-US" sz="1350" dirty="0">
+                <a:solidFill>
+                  <a:srgbClr val="1C1C2A"/>
+                </a:solidFill>
+                <a:latin typeface="Courier New" pitchFamily="34" charset="0"/>
+                <a:ea typeface="Courier New" pitchFamily="34" charset="-122"/>
+                <a:cs typeface="Courier New" pitchFamily="34" charset="-120"/>
+              </a:rPr>
+              <a:t>: entero)</a:t>
+            </a:r>
+            <a:endParaRPr lang="en-US" sz="1350" dirty="0"/>
+          </a:p>
+          <a:p>
+            <a:pPr marL="0" indent="0">
               <a:lnSpc>
                 <a:spcPct val="115000"/>
               </a:lnSpc>
@@ -23724,7 +24453,7 @@
             <a:endParaRPr lang="en-US" sz="1350" dirty="0"/>
           </a:p>
           <a:p>
-            <a:pPr indent="0" marL="0">
+            <a:pPr marL="0" indent="0">
               <a:lnSpc>
                 <a:spcPct val="115000"/>
               </a:lnSpc>
@@ -23739,12 +24468,23 @@
                 <a:ea typeface="Courier New" pitchFamily="34" charset="-122"/>
                 <a:cs typeface="Courier New" pitchFamily="34" charset="-120"/>
               </a:rPr>
-              <a:t>    post: x queda agregado con esa prioridad</a:t>
-            </a:r>
-            <a:endParaRPr lang="en-US" sz="1350" dirty="0"/>
-          </a:p>
-          <a:p>
-            <a:pPr indent="0" marL="0">
+              <a:t>    post: x queda agregado con esa </a:t>
+            </a:r>
+            <a:r>
+              <a:rPr lang="en-US" sz="1350" dirty="0" err="1">
+                <a:solidFill>
+                  <a:srgbClr val="1C1C2A"/>
+                </a:solidFill>
+                <a:latin typeface="Courier New" pitchFamily="34" charset="0"/>
+                <a:ea typeface="Courier New" pitchFamily="34" charset="-122"/>
+                <a:cs typeface="Courier New" pitchFamily="34" charset="-120"/>
+              </a:rPr>
+              <a:t>prioridad</a:t>
+            </a:r>
+            <a:endParaRPr lang="en-US" sz="1350" dirty="0"/>
+          </a:p>
+          <a:p>
+            <a:pPr marL="0" indent="0">
               <a:lnSpc>
                 <a:spcPct val="115000"/>
               </a:lnSpc>
@@ -23764,7 +24504,7 @@
             <a:endParaRPr lang="en-US" sz="1350" dirty="0"/>
           </a:p>
           <a:p>
-            <a:pPr indent="0" marL="0">
+            <a:pPr marL="0" indent="0">
               <a:lnSpc>
                 <a:spcPct val="115000"/>
               </a:lnSpc>
@@ -23784,7 +24524,7 @@
             <a:endParaRPr lang="en-US" sz="1350" dirty="0"/>
           </a:p>
           <a:p>
-            <a:pPr indent="0" marL="0">
+            <a:pPr marL="0" indent="0">
               <a:lnSpc>
                 <a:spcPct val="115000"/>
               </a:lnSpc>
@@ -23799,12 +24539,23 @@
                 <a:ea typeface="Courier New" pitchFamily="34" charset="-122"/>
                 <a:cs typeface="Courier New" pitchFamily="34" charset="-120"/>
               </a:rPr>
-              <a:t>    post: se quita el elemento de mayor prioridad</a:t>
-            </a:r>
-            <a:endParaRPr lang="en-US" sz="1350" dirty="0"/>
-          </a:p>
-          <a:p>
-            <a:pPr indent="0" marL="0">
+              <a:t>    post: se quita el elemento de mayor </a:t>
+            </a:r>
+            <a:r>
+              <a:rPr lang="en-US" sz="1350" dirty="0" err="1">
+                <a:solidFill>
+                  <a:srgbClr val="1C1C2A"/>
+                </a:solidFill>
+                <a:latin typeface="Courier New" pitchFamily="34" charset="0"/>
+                <a:ea typeface="Courier New" pitchFamily="34" charset="-122"/>
+                <a:cs typeface="Courier New" pitchFamily="34" charset="-120"/>
+              </a:rPr>
+              <a:t>prioridad</a:t>
+            </a:r>
+            <a:endParaRPr lang="en-US" sz="1350" dirty="0"/>
+          </a:p>
+          <a:p>
+            <a:pPr marL="0" indent="0">
               <a:lnSpc>
                 <a:spcPct val="115000"/>
               </a:lnSpc>
@@ -23824,7 +24575,7 @@
             <a:endParaRPr lang="en-US" sz="1350" dirty="0"/>
           </a:p>
           <a:p>
-            <a:pPr indent="0" marL="0">
+            <a:pPr marL="0" indent="0">
               <a:lnSpc>
                 <a:spcPct val="115000"/>
               </a:lnSpc>
@@ -23844,7 +24595,7 @@
             <a:endParaRPr lang="en-US" sz="1350" dirty="0"/>
           </a:p>
           <a:p>
-            <a:pPr indent="0" marL="0">
+            <a:pPr marL="0" indent="0">
               <a:lnSpc>
                 <a:spcPct val="115000"/>
               </a:lnSpc>
@@ -23859,12 +24610,34 @@
                 <a:ea typeface="Courier New" pitchFamily="34" charset="-122"/>
                 <a:cs typeface="Courier New" pitchFamily="34" charset="-120"/>
               </a:rPr>
-              <a:t>    post: devuelve el elemento de mayor prioridad,</a:t>
-            </a:r>
-            <a:endParaRPr lang="en-US" sz="1350" dirty="0"/>
-          </a:p>
-          <a:p>
-            <a:pPr indent="0" marL="0">
+              <a:t>    post: devuelve el elemento de mayor </a:t>
+            </a:r>
+            <a:r>
+              <a:rPr lang="en-US" sz="1350" dirty="0" err="1">
+                <a:solidFill>
+                  <a:srgbClr val="1C1C2A"/>
+                </a:solidFill>
+                <a:latin typeface="Courier New" pitchFamily="34" charset="0"/>
+                <a:ea typeface="Courier New" pitchFamily="34" charset="-122"/>
+                <a:cs typeface="Courier New" pitchFamily="34" charset="-120"/>
+              </a:rPr>
+              <a:t>prioridad</a:t>
+            </a:r>
+            <a:r>
+              <a:rPr lang="en-US" sz="1350" dirty="0">
+                <a:solidFill>
+                  <a:srgbClr val="1C1C2A"/>
+                </a:solidFill>
+                <a:latin typeface="Courier New" pitchFamily="34" charset="0"/>
+                <a:ea typeface="Courier New" pitchFamily="34" charset="-122"/>
+                <a:cs typeface="Courier New" pitchFamily="34" charset="-120"/>
+              </a:rPr>
+              <a:t>,</a:t>
+            </a:r>
+            <a:endParaRPr lang="en-US" sz="1350" dirty="0"/>
+          </a:p>
+          <a:p>
+            <a:pPr marL="0" indent="0">
               <a:lnSpc>
                 <a:spcPct val="115000"/>
               </a:lnSpc>
@@ -23884,7 +24657,7 @@
             <a:endParaRPr lang="en-US" sz="1350" dirty="0"/>
           </a:p>
           <a:p>
-            <a:pPr indent="0" marL="0">
+            <a:pPr marL="0" indent="0">
               <a:lnSpc>
                 <a:spcPct val="115000"/>
               </a:lnSpc>
@@ -23931,6 +24704,13 @@
             <a:prstDash val="solid"/>
           </a:ln>
         </p:spPr>
+        <p:txBody>
+          <a:bodyPr/>
+          <a:lstStyle/>
+          <a:p>
+            <a:endParaRPr lang="es-AR"/>
+          </a:p>
+        </p:txBody>
       </p:sp>
       <p:sp>
         <p:nvSpPr>
@@ -23953,7 +24733,7 @@
           <a:bodyPr wrap="square" lIns="0" tIns="0" rIns="0" bIns="0" rtlCol="0" anchor="ctr"/>
           <a:lstStyle/>
           <a:p>
-            <a:pPr indent="0" marL="0">
+            <a:pPr marL="0" indent="0">
               <a:buNone/>
             </a:pPr>
             <a:r>
@@ -23992,7 +24772,7 @@
           <a:bodyPr wrap="square" lIns="0" tIns="0" rIns="0" bIns="0" rtlCol="0" anchor="t"/>
           <a:lstStyle/>
           <a:p>
-            <a:pPr indent="0" marL="0">
+            <a:pPr marL="0" indent="0">
               <a:lnSpc>
                 <a:spcPct val="120000"/>
               </a:lnSpc>
@@ -24009,12 +24789,6 @@
               </a:rPr>
               <a:t>insertar: </a:t>
             </a:r>
-            <a:pPr indent="0" marL="0">
-              <a:lnSpc>
-                <a:spcPct val="120000"/>
-              </a:lnSpc>
-              <a:buNone/>
-            </a:pPr>
             <a:r>
               <a:rPr lang="en-US" sz="1250" dirty="0">
                 <a:solidFill>
@@ -24029,7 +24803,7 @@
             <a:endParaRPr lang="en-US" sz="1250" dirty="0"/>
           </a:p>
           <a:p>
-            <a:pPr indent="0" marL="0">
+            <a:pPr marL="0" indent="0">
               <a:lnSpc>
                 <a:spcPct val="120000"/>
               </a:lnSpc>
@@ -24038,7 +24812,7 @@
             <a:endParaRPr lang="en-US" sz="1250" dirty="0"/>
           </a:p>
           <a:p>
-            <a:pPr indent="0" marL="0">
+            <a:pPr marL="0" indent="0">
               <a:lnSpc>
                 <a:spcPct val="120000"/>
               </a:lnSpc>
@@ -24055,12 +24829,6 @@
               </a:rPr>
               <a:t>verMax / extraerMax: </a:t>
             </a:r>
-            <a:pPr indent="0" marL="0">
-              <a:lnSpc>
-                <a:spcPct val="120000"/>
-              </a:lnSpc>
-              <a:buNone/>
-            </a:pPr>
             <a:r>
               <a:rPr lang="en-US" sz="1250" dirty="0">
                 <a:solidFill>
@@ -24070,43 +24838,19 @@
                 <a:ea typeface="Calibri" pitchFamily="34" charset="-122"/>
                 <a:cs typeface="Calibri" pitchFamily="34" charset="-120"/>
               </a:rPr>
-              <a:t>hay que recorrer TODO el arreglo para encontrar la mayor prioridad → O(n).</a:t>
-            </a:r>
-            <a:endParaRPr lang="en-US" sz="1250" dirty="0"/>
-          </a:p>
-          <a:p>
-            <a:pPr indent="0" marL="0">
-              <a:lnSpc>
-                <a:spcPct val="120000"/>
-              </a:lnSpc>
-              <a:buNone/>
-            </a:pPr>
-            <a:endParaRPr lang="en-US" sz="1250" dirty="0"/>
-          </a:p>
-          <a:p>
-            <a:pPr indent="0" marL="0">
-              <a:lnSpc>
-                <a:spcPct val="120000"/>
-              </a:lnSpc>
-              <a:buNone/>
-            </a:pPr>
-            <a:r>
-              <a:rPr lang="en-US" sz="1250" b="1" dirty="0">
-                <a:solidFill>
-                  <a:srgbClr val="1E2761"/>
+              <a:t>hay que recorrer TODO el arreglo para encontrar la mayor </a:t>
+            </a:r>
+            <a:r>
+              <a:rPr lang="en-US" sz="1250" dirty="0" err="1">
+                <a:solidFill>
+                  <a:srgbClr val="1C1C2A"/>
                 </a:solidFill>
                 <a:latin typeface="Calibri" pitchFamily="34" charset="0"/>
                 <a:ea typeface="Calibri" pitchFamily="34" charset="-122"/>
                 <a:cs typeface="Calibri" pitchFamily="34" charset="-120"/>
               </a:rPr>
-              <a:t>Alternativa: </a:t>
-            </a:r>
-            <a:pPr indent="0" marL="0">
-              <a:lnSpc>
-                <a:spcPct val="120000"/>
-              </a:lnSpc>
-              <a:buNone/>
-            </a:pPr>
+              <a:t>prioridad</a:t>
+            </a:r>
             <a:r>
               <a:rPr lang="en-US" sz="1250" dirty="0">
                 <a:solidFill>
@@ -24116,12 +24860,12 @@
                 <a:ea typeface="Calibri" pitchFamily="34" charset="-122"/>
                 <a:cs typeface="Calibri" pitchFamily="34" charset="-120"/>
               </a:rPr>
-              <a:t>una variante ordenada invierte el costo: insertar O(n), extraerMax O(1).</a:t>
+              <a:t> → O(n).</a:t>
             </a:r>
             <a:endParaRPr lang="en-US" sz="1250" dirty="0"/>
           </a:p>
           <a:p>
-            <a:pPr indent="0" marL="0">
+            <a:pPr marL="0" indent="0">
               <a:lnSpc>
                 <a:spcPct val="120000"/>
               </a:lnSpc>
@@ -24129,41 +24873,81 @@
             </a:pPr>
             <a:endParaRPr lang="en-US" sz="1250" dirty="0"/>
           </a:p>
-        </p:txBody>
-      </p:sp>
-      <p:sp>
-        <p:nvSpPr>
-          <p:cNvPr id="9" name="Text 7"/>
-          <p:cNvSpPr txBox="1"/>
-          <p:nvPr/>
-        </p:nvSpPr>
-        <p:spPr>
-          <a:xfrm>
-            <a:off x="457200" y="6537960"/>
-            <a:ext cx="8229600" cy="274320"/>
-          </a:xfrm>
-          <a:prstGeom prst="rect">
-            <a:avLst/>
-          </a:prstGeom>
-          <a:noFill/>
-          <a:ln/>
-        </p:spPr>
-        <p:txBody>
-          <a:bodyPr wrap="square" lIns="0" tIns="0" rIns="0" bIns="0" rtlCol="0" anchor="ctr"/>
-          <a:lstStyle/>
-          <a:p>
-            <a:pPr algn="l" indent="0" marL="0">
-              <a:buNone/>
-            </a:pPr>
-            <a:r>
-              <a:rPr lang="en-US" sz="1000" dirty="0">
-                <a:solidFill>
-                  <a:srgbClr val="5B6472"/>
+          <a:p>
+            <a:pPr marL="0" indent="0">
+              <a:lnSpc>
+                <a:spcPct val="120000"/>
+              </a:lnSpc>
+              <a:buNone/>
+            </a:pPr>
+            <a:r>
+              <a:rPr lang="en-US" sz="1250" b="1" dirty="0">
+                <a:solidFill>
+                  <a:srgbClr val="1E2761"/>
                 </a:solidFill>
                 <a:latin typeface="Calibri" pitchFamily="34" charset="0"/>
                 <a:ea typeface="Calibri" pitchFamily="34" charset="-122"/>
                 <a:cs typeface="Calibri" pitchFamily="34" charset="-120"/>
               </a:rPr>
+              <a:t>Alternativa: </a:t>
+            </a:r>
+            <a:r>
+              <a:rPr lang="en-US" sz="1250" dirty="0">
+                <a:solidFill>
+                  <a:srgbClr val="1C1C2A"/>
+                </a:solidFill>
+                <a:latin typeface="Calibri" pitchFamily="34" charset="0"/>
+                <a:ea typeface="Calibri" pitchFamily="34" charset="-122"/>
+                <a:cs typeface="Calibri" pitchFamily="34" charset="-120"/>
+              </a:rPr>
+              <a:t>una variante ordenada invierte el costo: insertar O(n), extraerMax O(1).</a:t>
+            </a:r>
+            <a:endParaRPr lang="en-US" sz="1250" dirty="0"/>
+          </a:p>
+          <a:p>
+            <a:pPr marL="0" indent="0">
+              <a:lnSpc>
+                <a:spcPct val="120000"/>
+              </a:lnSpc>
+              <a:buNone/>
+            </a:pPr>
+            <a:endParaRPr lang="en-US" sz="1250" dirty="0"/>
+          </a:p>
+        </p:txBody>
+      </p:sp>
+      <p:sp>
+        <p:nvSpPr>
+          <p:cNvPr id="9" name="Text 7"/>
+          <p:cNvSpPr txBox="1"/>
+          <p:nvPr/>
+        </p:nvSpPr>
+        <p:spPr>
+          <a:xfrm>
+            <a:off x="457200" y="6537960"/>
+            <a:ext cx="8229600" cy="274320"/>
+          </a:xfrm>
+          <a:prstGeom prst="rect">
+            <a:avLst/>
+          </a:prstGeom>
+          <a:noFill/>
+          <a:ln/>
+        </p:spPr>
+        <p:txBody>
+          <a:bodyPr wrap="square" lIns="0" tIns="0" rIns="0" bIns="0" rtlCol="0" anchor="ctr"/>
+          <a:lstStyle/>
+          <a:p>
+            <a:pPr marL="0" indent="0" algn="l">
+              <a:buNone/>
+            </a:pPr>
+            <a:r>
+              <a:rPr lang="en-US" sz="1000" dirty="0">
+                <a:solidFill>
+                  <a:srgbClr val="5B6472"/>
+                </a:solidFill>
+                <a:latin typeface="Calibri" pitchFamily="34" charset="0"/>
+                <a:ea typeface="Calibri" pitchFamily="34" charset="-122"/>
+                <a:cs typeface="Calibri" pitchFamily="34" charset="-120"/>
+              </a:rPr>
               <a:t>Algoritmos y Estructuras de Datos II  |  Clase 4</a:t>
             </a:r>
             <a:endParaRPr lang="en-US" sz="1000" dirty="0"/>
@@ -24191,7 +24975,7 @@
           <a:bodyPr wrap="square" lIns="0" tIns="0" rIns="0" bIns="0" rtlCol="0" anchor="ctr"/>
           <a:lstStyle/>
           <a:p>
-            <a:pPr algn="r" indent="0" marL="0">
+            <a:pPr marL="0" indent="0" algn="r">
               <a:buNone/>
             </a:pPr>
             <a:r>
@@ -24510,4 +25294,319 @@
     </a:ext>
   </a:extLst>
 </a:theme>
+</file>
+
+<file path=ppt/theme/theme2.xml><?xml version="1.0" encoding="utf-8"?>
+<a:theme xmlns:a="http://schemas.openxmlformats.org/drawingml/2006/main" name="Tema de Office">
+  <a:themeElements>
+    <a:clrScheme name="Office">
+      <a:dk1>
+        <a:sysClr val="windowText" lastClr="000000"/>
+      </a:dk1>
+      <a:lt1>
+        <a:sysClr val="window" lastClr="FFFFFF"/>
+      </a:lt1>
+      <a:dk2>
+        <a:srgbClr val="0E2841"/>
+      </a:dk2>
+      <a:lt2>
+        <a:srgbClr val="E8E8E8"/>
+      </a:lt2>
+      <a:accent1>
+        <a:srgbClr val="156082"/>
+      </a:accent1>
+      <a:accent2>
+        <a:srgbClr val="E97132"/>
+      </a:accent2>
+      <a:accent3>
+        <a:srgbClr val="196B24"/>
+      </a:accent3>
+      <a:accent4>
+        <a:srgbClr val="0F9ED5"/>
+      </a:accent4>
+      <a:accent5>
+        <a:srgbClr val="A02B93"/>
+      </a:accent5>
+      <a:accent6>
+        <a:srgbClr val="4EA72E"/>
+      </a:accent6>
+      <a:hlink>
+        <a:srgbClr val="467886"/>
+      </a:hlink>
+      <a:folHlink>
+        <a:srgbClr val="96607D"/>
+      </a:folHlink>
+    </a:clrScheme>
+    <a:fontScheme name="Office">
+      <a:majorFont>
+        <a:latin typeface="Aptos Display" panose="02110004020202020204"/>
+        <a:ea typeface=""/>
+        <a:cs typeface=""/>
+        <a:font script="Jpan" typeface="游ゴシック Light"/>
+        <a:font script="Hang" typeface="맑은 고딕"/>
+        <a:font script="Hans" typeface="等线 Light"/>
+        <a:font script="Hant" typeface="新細明體"/>
+        <a:font script="Arab" typeface="Times New Roman"/>
+        <a:font script="Hebr" typeface="Times New Roman"/>
+        <a:font script="Thai" typeface="Angsana New"/>
+        <a:font script="Ethi" typeface="Nyala"/>
+        <a:font script="Beng" typeface="Vrinda"/>
+        <a:font script="Gujr" typeface="Shruti"/>
+        <a:font script="Khmr" typeface="MoolBoran"/>
+        <a:font script="Knda" typeface="Tunga"/>
+        <a:font script="Guru" typeface="Raavi"/>
+        <a:font script="Cans" typeface="Euphemia"/>
+        <a:font script="Cher" typeface="Plantagenet Cherokee"/>
+        <a:font script="Yiii" typeface="Microsoft Yi Baiti"/>
+        <a:font script="Tibt" typeface="Microsoft Himalaya"/>
+        <a:font script="Thaa" typeface="MV Boli"/>
+        <a:font script="Deva" typeface="Mangal"/>
+        <a:font script="Telu" typeface="Gautami"/>
+        <a:font script="Taml" typeface="Latha"/>
+        <a:font script="Syrc" typeface="Estrangelo Edessa"/>
+        <a:font script="Orya" typeface="Kalinga"/>
+        <a:font script="Mlym" typeface="Kartika"/>
+        <a:font script="Laoo" typeface="DokChampa"/>
+        <a:font script="Sinh" typeface="Iskoola Pota"/>
+        <a:font script="Mong" typeface="Mongolian Baiti"/>
+        <a:font script="Viet" typeface="Times New Roman"/>
+        <a:font script="Uigh" typeface="Microsoft Uighur"/>
+        <a:font script="Geor" typeface="Sylfaen"/>
+        <a:font script="Armn" typeface="Arial"/>
+        <a:font script="Bugi" typeface="Leelawadee UI"/>
+        <a:font script="Bopo" typeface="Microsoft JhengHei"/>
+        <a:font script="Java" typeface="Javanese Text"/>
+        <a:font script="Lisu" typeface="Segoe UI"/>
+        <a:font script="Mymr" typeface="Myanmar Text"/>
+        <a:font script="Nkoo" typeface="Ebrima"/>
+        <a:font script="Olck" typeface="Nirmala UI"/>
+        <a:font script="Osma" typeface="Ebrima"/>
+        <a:font script="Phag" typeface="Phagspa"/>
+        <a:font script="Syrn" typeface="Estrangelo Edessa"/>
+        <a:font script="Syrj" typeface="Estrangelo Edessa"/>
+        <a:font script="Syre" typeface="Estrangelo Edessa"/>
+        <a:font script="Sora" typeface="Nirmala UI"/>
+        <a:font script="Tale" typeface="Microsoft Tai Le"/>
+        <a:font script="Talu" typeface="Microsoft New Tai Lue"/>
+        <a:font script="Tfng" typeface="Ebrima"/>
+      </a:majorFont>
+      <a:minorFont>
+        <a:latin typeface="Aptos" panose="02110004020202020204"/>
+        <a:ea typeface=""/>
+        <a:cs typeface=""/>
+        <a:font script="Jpan" typeface="游ゴシック"/>
+        <a:font script="Hang" typeface="맑은 고딕"/>
+        <a:font script="Hans" typeface="等线"/>
+        <a:font script="Hant" typeface="新細明體"/>
+        <a:font script="Arab" typeface="Arial"/>
+        <a:font script="Hebr" typeface="Arial"/>
+        <a:font script="Thai" typeface="Cordia New"/>
+        <a:font script="Ethi" typeface="Nyala"/>
+        <a:font script="Beng" typeface="Vrinda"/>
+        <a:font script="Gujr" typeface="Shruti"/>
+        <a:font script="Khmr" typeface="DaunPenh"/>
+        <a:font script="Knda" typeface="Tunga"/>
+        <a:font script="Guru" typeface="Raavi"/>
+        <a:font script="Cans" typeface="Euphemia"/>
+        <a:font script="Cher" typeface="Plantagenet Cherokee"/>
+        <a:font script="Yiii" typeface="Microsoft Yi Baiti"/>
+        <a:font script="Tibt" typeface="Microsoft Himalaya"/>
+        <a:font script="Thaa" typeface="MV Boli"/>
+        <a:font script="Deva" typeface="Mangal"/>
+        <a:font script="Telu" typeface="Gautami"/>
+        <a:font script="Taml" typeface="Latha"/>
+        <a:font script="Syrc" typeface="Estrangelo Edessa"/>
+        <a:font script="Orya" typeface="Kalinga"/>
+        <a:font script="Mlym" typeface="Kartika"/>
+        <a:font script="Laoo" typeface="DokChampa"/>
+        <a:font script="Sinh" typeface="Iskoola Pota"/>
+        <a:font script="Mong" typeface="Mongolian Baiti"/>
+        <a:font script="Viet" typeface="Arial"/>
+        <a:font script="Uigh" typeface="Microsoft Uighur"/>
+        <a:font script="Geor" typeface="Sylfaen"/>
+        <a:font script="Armn" typeface="Arial"/>
+        <a:font script="Bugi" typeface="Leelawadee UI"/>
+        <a:font script="Bopo" typeface="Microsoft JhengHei"/>
+        <a:font script="Java" typeface="Javanese Text"/>
+        <a:font script="Lisu" typeface="Segoe UI"/>
+        <a:font script="Mymr" typeface="Myanmar Text"/>
+        <a:font script="Nkoo" typeface="Ebrima"/>
+        <a:font script="Olck" typeface="Nirmala UI"/>
+        <a:font script="Osma" typeface="Ebrima"/>
+        <a:font script="Phag" typeface="Phagspa"/>
+        <a:font script="Syrn" typeface="Estrangelo Edessa"/>
+        <a:font script="Syrj" typeface="Estrangelo Edessa"/>
+        <a:font script="Syre" typeface="Estrangelo Edessa"/>
+        <a:font script="Sora" typeface="Nirmala UI"/>
+        <a:font script="Tale" typeface="Microsoft Tai Le"/>
+        <a:font script="Talu" typeface="Microsoft New Tai Lue"/>
+        <a:font script="Tfng" typeface="Ebrima"/>
+      </a:minorFont>
+    </a:fontScheme>
+    <a:fmtScheme name="Office">
+      <a:fillStyleLst>
+        <a:solidFill>
+          <a:schemeClr val="phClr"/>
+        </a:solidFill>
+        <a:gradFill rotWithShape="1">
+          <a:gsLst>
+            <a:gs pos="0">
+              <a:schemeClr val="phClr">
+                <a:lumMod val="110000"/>
+                <a:satMod val="105000"/>
+                <a:tint val="67000"/>
+              </a:schemeClr>
+            </a:gs>
+            <a:gs pos="50000">
+              <a:schemeClr val="phClr">
+                <a:lumMod val="105000"/>
+                <a:satMod val="103000"/>
+                <a:tint val="73000"/>
+              </a:schemeClr>
+            </a:gs>
+            <a:gs pos="100000">
+              <a:schemeClr val="phClr">
+                <a:lumMod val="105000"/>
+                <a:satMod val="109000"/>
+                <a:tint val="81000"/>
+              </a:schemeClr>
+            </a:gs>
+          </a:gsLst>
+          <a:lin ang="5400000" scaled="0"/>
+        </a:gradFill>
+        <a:gradFill rotWithShape="1">
+          <a:gsLst>
+            <a:gs pos="0">
+              <a:schemeClr val="phClr">
+                <a:satMod val="103000"/>
+                <a:lumMod val="102000"/>
+                <a:tint val="94000"/>
+              </a:schemeClr>
+            </a:gs>
+            <a:gs pos="50000">
+              <a:schemeClr val="phClr">
+                <a:satMod val="110000"/>
+                <a:lumMod val="100000"/>
+                <a:shade val="100000"/>
+              </a:schemeClr>
+            </a:gs>
+            <a:gs pos="100000">
+              <a:schemeClr val="phClr">
+                <a:lumMod val="99000"/>
+                <a:satMod val="120000"/>
+                <a:shade val="78000"/>
+              </a:schemeClr>
+            </a:gs>
+          </a:gsLst>
+          <a:lin ang="5400000" scaled="0"/>
+        </a:gradFill>
+      </a:fillStyleLst>
+      <a:lnStyleLst>
+        <a:ln w="12700" cap="flat" cmpd="sng" algn="ctr">
+          <a:solidFill>
+            <a:schemeClr val="phClr"/>
+          </a:solidFill>
+          <a:prstDash val="solid"/>
+          <a:miter lim="800000"/>
+        </a:ln>
+        <a:ln w="19050" cap="flat" cmpd="sng" algn="ctr">
+          <a:solidFill>
+            <a:schemeClr val="phClr"/>
+          </a:solidFill>
+          <a:prstDash val="solid"/>
+          <a:miter lim="800000"/>
+        </a:ln>
+        <a:ln w="25400" cap="flat" cmpd="sng" algn="ctr">
+          <a:solidFill>
+            <a:schemeClr val="phClr"/>
+          </a:solidFill>
+          <a:prstDash val="solid"/>
+          <a:miter lim="800000"/>
+        </a:ln>
+      </a:lnStyleLst>
+      <a:effectStyleLst>
+        <a:effectStyle>
+          <a:effectLst/>
+        </a:effectStyle>
+        <a:effectStyle>
+          <a:effectLst/>
+        </a:effectStyle>
+        <a:effectStyle>
+          <a:effectLst>
+            <a:outerShdw blurRad="57150" dist="19050" dir="5400000" algn="ctr" rotWithShape="0">
+              <a:srgbClr val="000000">
+                <a:alpha val="63000"/>
+              </a:srgbClr>
+            </a:outerShdw>
+          </a:effectLst>
+        </a:effectStyle>
+      </a:effectStyleLst>
+      <a:bgFillStyleLst>
+        <a:solidFill>
+          <a:schemeClr val="phClr"/>
+        </a:solidFill>
+        <a:solidFill>
+          <a:schemeClr val="phClr">
+            <a:tint val="95000"/>
+            <a:satMod val="170000"/>
+          </a:schemeClr>
+        </a:solidFill>
+        <a:gradFill rotWithShape="1">
+          <a:gsLst>
+            <a:gs pos="0">
+              <a:schemeClr val="phClr">
+                <a:tint val="93000"/>
+                <a:satMod val="150000"/>
+                <a:shade val="98000"/>
+                <a:lumMod val="102000"/>
+              </a:schemeClr>
+            </a:gs>
+            <a:gs pos="50000">
+              <a:schemeClr val="phClr">
+                <a:tint val="98000"/>
+                <a:satMod val="130000"/>
+                <a:shade val="90000"/>
+                <a:lumMod val="103000"/>
+              </a:schemeClr>
+            </a:gs>
+            <a:gs pos="100000">
+              <a:schemeClr val="phClr">
+                <a:shade val="63000"/>
+                <a:satMod val="120000"/>
+              </a:schemeClr>
+            </a:gs>
+          </a:gsLst>
+          <a:lin ang="5400000" scaled="0"/>
+        </a:gradFill>
+      </a:bgFillStyleLst>
+    </a:fmtScheme>
+  </a:themeElements>
+  <a:objectDefaults>
+    <a:lnDef>
+      <a:spPr/>
+      <a:bodyPr/>
+      <a:lstStyle/>
+      <a:style>
+        <a:lnRef idx="2">
+          <a:schemeClr val="accent1"/>
+        </a:lnRef>
+        <a:fillRef idx="0">
+          <a:schemeClr val="accent1"/>
+        </a:fillRef>
+        <a:effectRef idx="1">
+          <a:schemeClr val="accent1"/>
+        </a:effectRef>
+        <a:fontRef idx="minor">
+          <a:schemeClr val="tx1"/>
+        </a:fontRef>
+      </a:style>
+    </a:lnDef>
+  </a:objectDefaults>
+  <a:extraClrSchemeLst/>
+  <a:extLst>
+    <a:ext uri="{05A4C25C-085E-4340-85A3-A5531E510DB2}">
+      <thm15:themeFamily xmlns:thm15="http://schemas.microsoft.com/office/thememl/2012/main" name="Office Theme" id="{2E142A2C-CD16-42D6-873A-C26D2A0506FA}" vid="{1BDDFF52-6CD6-40A5-AB3C-68EB2F1E4D0A}"/>
+    </a:ext>
+  </a:extLst>
+</a:theme>
 </file>